--- a/templates/tree_yellow_texture/KCLNLP_TreeYellow.pptx
+++ b/templates/tree_yellow_texture/KCLNLP_TreeYellow.pptx
@@ -3094,7 +3094,7 @@
       <p:grpSpPr/>
       <p:pic>
         <p:nvPicPr>
-          <p:cNvPr id="2" name="Picture 1" descr="parchment_bg.png"/>
+          <p:cNvPr id="2" name="Picture 1" descr="KCL.png"/>
           <p:cNvPicPr>
             <a:picLocks noChangeAspect="1"/>
           </p:cNvPicPr>
@@ -3108,8 +3108,8 @@
         </p:blipFill>
         <p:spPr>
           <a:xfrm>
-            <a:off x="0" y="0"/>
-            <a:ext cx="12191695" cy="6858000"/>
+            <a:off x="9111763" y="201168"/>
+            <a:ext cx="831046" cy="411480"/>
           </a:xfrm>
           <a:prstGeom prst="rect">
             <a:avLst/>
@@ -3118,7 +3118,7 @@
       </p:pic>
       <p:pic>
         <p:nvPicPr>
-          <p:cNvPr id="3" name="Picture 2" descr="tree_branch.png"/>
+          <p:cNvPr id="3" name="Picture 2" descr="KCLNLP.png"/>
           <p:cNvPicPr>
             <a:picLocks noChangeAspect="1"/>
           </p:cNvPicPr>
@@ -3132,8 +3132,8 @@
         </p:blipFill>
         <p:spPr>
           <a:xfrm>
-            <a:off x="5105096" y="1520191"/>
-            <a:ext cx="7360919" cy="5520689"/>
+            <a:off x="10125688" y="201168"/>
+            <a:ext cx="452782" cy="411480"/>
           </a:xfrm>
           <a:prstGeom prst="rect">
             <a:avLst/>
@@ -3142,7 +3142,7 @@
       </p:pic>
       <p:pic>
         <p:nvPicPr>
-          <p:cNvPr id="4" name="Picture 3" descr="KCL.png"/>
+          <p:cNvPr id="4" name="Picture 3" descr="Alan.png"/>
           <p:cNvPicPr>
             <a:picLocks noChangeAspect="1"/>
           </p:cNvPicPr>
@@ -3156,8 +3156,8 @@
         </p:blipFill>
         <p:spPr>
           <a:xfrm>
-            <a:off x="9298804" y="128016"/>
-            <a:ext cx="775643" cy="384048"/>
+            <a:off x="10761349" y="201168"/>
+            <a:ext cx="973146" cy="411480"/>
           </a:xfrm>
           <a:prstGeom prst="rect">
             <a:avLst/>
@@ -3172,15 +3172,15 @@
         </p:nvCxnSpPr>
         <p:spPr>
           <a:xfrm>
-            <a:off x="10156742" y="182880"/>
-            <a:ext cx="0" cy="274320"/>
+            <a:off x="457200" y="777240"/>
+            <a:ext cx="11277295" cy="0"/>
           </a:xfrm>
           <a:prstGeom prst="line">
             <a:avLst/>
           </a:prstGeom>
-          <a:ln w="4000">
+          <a:ln w="9525">
             <a:solidFill>
-              <a:srgbClr val="8A6A2E"/>
+              <a:srgbClr val="C8963E"/>
             </a:solidFill>
           </a:ln>
         </p:spPr>
@@ -3199,47 +3199,136 @@
           </a:fontRef>
         </p:style>
       </p:cxnSp>
-      <p:pic>
-        <p:nvPicPr>
-          <p:cNvPr id="6" name="Picture 5" descr="KCLNLP.png"/>
-          <p:cNvPicPr>
-            <a:picLocks noChangeAspect="1"/>
-          </p:cNvPicPr>
+      <p:sp>
+        <p:nvSpPr>
+          <p:cNvPr id="6" name="Rectangle 5"/>
+          <p:cNvSpPr/>
           <p:nvPr/>
-        </p:nvPicPr>
-        <p:blipFill>
-          <a:blip r:embed="rId5"/>
-          <a:stretch>
-            <a:fillRect/>
-          </a:stretch>
-        </p:blipFill>
-        <p:spPr>
-          <a:xfrm>
-            <a:off x="10239038" y="128016"/>
-            <a:ext cx="422596" cy="384048"/>
+        </p:nvSpPr>
+        <p:spPr>
+          <a:xfrm>
+            <a:off x="640080" y="2468880"/>
+            <a:ext cx="109728" cy="1280160"/>
           </a:xfrm>
           <a:prstGeom prst="rect">
             <a:avLst/>
           </a:prstGeom>
-        </p:spPr>
-      </p:pic>
+          <a:solidFill>
+            <a:srgbClr val="C8963E"/>
+          </a:solidFill>
+          <a:ln>
+            <a:noFill/>
+          </a:ln>
+        </p:spPr>
+        <p:style>
+          <a:lnRef idx="1">
+            <a:schemeClr val="accent1"/>
+          </a:lnRef>
+          <a:fillRef idx="3">
+            <a:schemeClr val="accent1"/>
+          </a:fillRef>
+          <a:effectRef idx="2">
+            <a:schemeClr val="accent1"/>
+          </a:effectRef>
+          <a:fontRef idx="minor">
+            <a:schemeClr val="lt1"/>
+          </a:fontRef>
+        </p:style>
+        <p:txBody>
+          <a:bodyPr rtlCol="0" anchor="ctr"/>
+          <a:lstStyle/>
+          <a:p>
+            <a:pPr algn="ctr"/>
+          </a:p>
+        </p:txBody>
+      </p:sp>
+      <p:sp>
+        <p:nvSpPr>
+          <p:cNvPr id="7" name="TextBox 6"/>
+          <p:cNvSpPr txBox="1"/>
+          <p:nvPr/>
+        </p:nvSpPr>
+        <p:spPr>
+          <a:xfrm>
+            <a:off x="960120" y="2377440"/>
+            <a:ext cx="10058400" cy="1463040"/>
+          </a:xfrm>
+          <a:prstGeom prst="rect">
+            <a:avLst/>
+          </a:prstGeom>
+          <a:noFill/>
+        </p:spPr>
+        <p:txBody>
+          <a:bodyPr wrap="square" lIns="0" rIns="0" tIns="0" bIns="0" anchor="t">
+            <a:spAutoFit/>
+          </a:bodyPr>
+          <a:lstStyle/>
+          <a:p>
+            <a:pPr algn="l"/>
+            <a:r>
+              <a:rPr sz="4000" b="1" i="0">
+                <a:solidFill>
+                  <a:srgbClr val="1F1F1F"/>
+                </a:solidFill>
+                <a:latin typeface="Calibri"/>
+              </a:rPr>
+              <a:t>Talk Title Goes Here</a:t>
+            </a:r>
+          </a:p>
+        </p:txBody>
+      </p:sp>
+      <p:sp>
+        <p:nvSpPr>
+          <p:cNvPr id="8" name="TextBox 7"/>
+          <p:cNvSpPr txBox="1"/>
+          <p:nvPr/>
+        </p:nvSpPr>
+        <p:spPr>
+          <a:xfrm>
+            <a:off x="960120" y="3749040"/>
+            <a:ext cx="10058400" cy="548640"/>
+          </a:xfrm>
+          <a:prstGeom prst="rect">
+            <a:avLst/>
+          </a:prstGeom>
+          <a:noFill/>
+        </p:spPr>
+        <p:txBody>
+          <a:bodyPr wrap="square" lIns="0" rIns="0" tIns="0" bIns="0" anchor="t">
+            <a:spAutoFit/>
+          </a:bodyPr>
+          <a:lstStyle/>
+          <a:p>
+            <a:pPr algn="l"/>
+            <a:r>
+              <a:rPr sz="1800" b="0" i="1">
+                <a:solidFill>
+                  <a:srgbClr val="707070"/>
+                </a:solidFill>
+                <a:latin typeface="Calibri"/>
+              </a:rPr>
+              <a:t>A concise subtitle or one-line abstract</a:t>
+            </a:r>
+          </a:p>
+        </p:txBody>
+      </p:sp>
       <p:cxnSp>
         <p:nvCxnSpPr>
-          <p:cNvPr id="7" name="Connector 6"/>
+          <p:cNvPr id="9" name="Connector 8"/>
           <p:cNvCxnSpPr/>
           <p:nvPr/>
         </p:nvCxnSpPr>
         <p:spPr>
           <a:xfrm>
-            <a:off x="10743930" y="182880"/>
-            <a:ext cx="0" cy="274320"/>
+            <a:off x="960120" y="4480560"/>
+            <a:ext cx="1691640" cy="0"/>
           </a:xfrm>
           <a:prstGeom prst="line">
             <a:avLst/>
           </a:prstGeom>
-          <a:ln w="4000">
+          <a:ln w="19050">
             <a:solidFill>
-              <a:srgbClr val="8A6A2E"/>
+              <a:srgbClr val="C8963E"/>
             </a:solidFill>
           </a:ln>
         </p:spPr>
@@ -3258,65 +3347,6 @@
           </a:fontRef>
         </p:style>
       </p:cxnSp>
-      <p:pic>
-        <p:nvPicPr>
-          <p:cNvPr id="8" name="Picture 7" descr="Alan.png"/>
-          <p:cNvPicPr>
-            <a:picLocks noChangeAspect="1"/>
-          </p:cNvPicPr>
-          <p:nvPr/>
-        </p:nvPicPr>
-        <p:blipFill>
-          <a:blip r:embed="rId6"/>
-          <a:stretch>
-            <a:fillRect/>
-          </a:stretch>
-        </p:blipFill>
-        <p:spPr>
-          <a:xfrm>
-            <a:off x="10826226" y="128016"/>
-            <a:ext cx="908270" cy="384048"/>
-          </a:xfrm>
-          <a:prstGeom prst="rect">
-            <a:avLst/>
-          </a:prstGeom>
-        </p:spPr>
-      </p:pic>
-      <p:cxnSp>
-        <p:nvCxnSpPr>
-          <p:cNvPr id="9" name="Connector 8"/>
-          <p:cNvCxnSpPr/>
-          <p:nvPr/>
-        </p:nvCxnSpPr>
-        <p:spPr>
-          <a:xfrm>
-            <a:off x="457200" y="667512"/>
-            <a:ext cx="11277295" cy="0"/>
-          </a:xfrm>
-          <a:prstGeom prst="line">
-            <a:avLst/>
-          </a:prstGeom>
-          <a:ln w="9525">
-            <a:solidFill>
-              <a:srgbClr val="C8963E"/>
-            </a:solidFill>
-          </a:ln>
-        </p:spPr>
-        <p:style>
-          <a:lnRef idx="2">
-            <a:schemeClr val="accent1"/>
-          </a:lnRef>
-          <a:fillRef idx="0">
-            <a:schemeClr val="accent1"/>
-          </a:fillRef>
-          <a:effectRef idx="1">
-            <a:schemeClr val="accent1"/>
-          </a:effectRef>
-          <a:fontRef idx="minor">
-            <a:schemeClr val="tx1"/>
-          </a:fontRef>
-        </p:style>
-      </p:cxnSp>
       <p:sp>
         <p:nvSpPr>
           <p:cNvPr id="10" name="TextBox 9"/>
@@ -3325,8 +3355,8 @@
         </p:nvSpPr>
         <p:spPr>
           <a:xfrm>
-            <a:off x="640080" y="2011680"/>
-            <a:ext cx="7315200" cy="365760"/>
+            <a:off x="960120" y="4617720"/>
+            <a:ext cx="10058400" cy="365760"/>
           </a:xfrm>
           <a:prstGeom prst="rect">
             <a:avLst/>
@@ -3341,149 +3371,9 @@
           <a:p>
             <a:pPr algn="l"/>
             <a:r>
-              <a:rPr sz="1400" b="1" i="1">
-                <a:solidFill>
-                  <a:srgbClr val="8A6A2E"/>
-                </a:solidFill>
-                <a:latin typeface="Calibri"/>
-              </a:rPr>
-              <a:t>KCL NLP  ·  Research Talk</a:t>
-            </a:r>
-          </a:p>
-        </p:txBody>
-      </p:sp>
-      <p:sp>
-        <p:nvSpPr>
-          <p:cNvPr id="11" name="TextBox 10"/>
-          <p:cNvSpPr txBox="1"/>
-          <p:nvPr/>
-        </p:nvSpPr>
-        <p:spPr>
-          <a:xfrm>
-            <a:off x="640080" y="2468880"/>
-            <a:ext cx="9144000" cy="1463040"/>
-          </a:xfrm>
-          <a:prstGeom prst="rect">
-            <a:avLst/>
-          </a:prstGeom>
-          <a:noFill/>
-        </p:spPr>
-        <p:txBody>
-          <a:bodyPr wrap="square" lIns="0" rIns="0" tIns="0" bIns="0" anchor="t">
-            <a:spAutoFit/>
-          </a:bodyPr>
-          <a:lstStyle/>
-          <a:p>
-            <a:pPr algn="l"/>
-            <a:r>
-              <a:rPr sz="4400" b="1" i="0">
-                <a:solidFill>
-                  <a:srgbClr val="2B1F12"/>
-                </a:solidFill>
-                <a:latin typeface="Georgia"/>
-              </a:rPr>
-              <a:t>Talk Title Goes Here</a:t>
-            </a:r>
-          </a:p>
-        </p:txBody>
-      </p:sp>
-      <p:sp>
-        <p:nvSpPr>
-          <p:cNvPr id="12" name="TextBox 11"/>
-          <p:cNvSpPr txBox="1"/>
-          <p:nvPr/>
-        </p:nvSpPr>
-        <p:spPr>
-          <a:xfrm>
-            <a:off x="640080" y="3840480"/>
-            <a:ext cx="9144000" cy="548640"/>
-          </a:xfrm>
-          <a:prstGeom prst="rect">
-            <a:avLst/>
-          </a:prstGeom>
-          <a:noFill/>
-        </p:spPr>
-        <p:txBody>
-          <a:bodyPr wrap="square" lIns="0" rIns="0" tIns="0" bIns="0" anchor="t">
-            <a:spAutoFit/>
-          </a:bodyPr>
-          <a:lstStyle/>
-          <a:p>
-            <a:pPr algn="l"/>
-            <a:r>
-              <a:rPr sz="2000" b="0" i="1">
-                <a:solidFill>
-                  <a:srgbClr val="6E5A3C"/>
-                </a:solidFill>
-                <a:latin typeface="Georgia"/>
-              </a:rPr>
-              <a:t>A concise subtitle or one-line abstract</a:t>
-            </a:r>
-          </a:p>
-        </p:txBody>
-      </p:sp>
-      <p:cxnSp>
-        <p:nvCxnSpPr>
-          <p:cNvPr id="13" name="Connector 12"/>
-          <p:cNvCxnSpPr/>
-          <p:nvPr/>
-        </p:nvCxnSpPr>
-        <p:spPr>
-          <a:xfrm>
-            <a:off x="640080" y="4663440"/>
-            <a:ext cx="1645920" cy="0"/>
-          </a:xfrm>
-          <a:prstGeom prst="line">
-            <a:avLst/>
-          </a:prstGeom>
-          <a:ln w="19050">
-            <a:solidFill>
-              <a:srgbClr val="C8963E"/>
-            </a:solidFill>
-          </a:ln>
-        </p:spPr>
-        <p:style>
-          <a:lnRef idx="2">
-            <a:schemeClr val="accent1"/>
-          </a:lnRef>
-          <a:fillRef idx="0">
-            <a:schemeClr val="accent1"/>
-          </a:fillRef>
-          <a:effectRef idx="1">
-            <a:schemeClr val="accent1"/>
-          </a:effectRef>
-          <a:fontRef idx="minor">
-            <a:schemeClr val="tx1"/>
-          </a:fontRef>
-        </p:style>
-      </p:cxnSp>
-      <p:sp>
-        <p:nvSpPr>
-          <p:cNvPr id="14" name="TextBox 13"/>
-          <p:cNvSpPr txBox="1"/>
-          <p:nvPr/>
-        </p:nvSpPr>
-        <p:spPr>
-          <a:xfrm>
-            <a:off x="640080" y="4754880"/>
-            <a:ext cx="9144000" cy="365760"/>
-          </a:xfrm>
-          <a:prstGeom prst="rect">
-            <a:avLst/>
-          </a:prstGeom>
-          <a:noFill/>
-        </p:spPr>
-        <p:txBody>
-          <a:bodyPr wrap="square" lIns="0" rIns="0" tIns="0" bIns="0" anchor="t">
-            <a:spAutoFit/>
-          </a:bodyPr>
-          <a:lstStyle/>
-          <a:p>
-            <a:pPr algn="l"/>
-            <a:r>
               <a:rPr sz="1400" b="0" i="0">
                 <a:solidFill>
-                  <a:srgbClr val="2B1F12"/>
+                  <a:srgbClr val="1F1F1F"/>
                 </a:solidFill>
                 <a:latin typeface="Calibri"/>
               </a:rPr>
@@ -3512,7 +3402,7 @@
       <p:grpSpPr/>
       <p:pic>
         <p:nvPicPr>
-          <p:cNvPr id="2" name="Picture 1" descr="parchment_bg.png"/>
+          <p:cNvPr id="2" name="Picture 1" descr="KCL.png"/>
           <p:cNvPicPr>
             <a:picLocks noChangeAspect="1"/>
           </p:cNvPicPr>
@@ -3526,8 +3416,8 @@
         </p:blipFill>
         <p:spPr>
           <a:xfrm>
-            <a:off x="0" y="0"/>
-            <a:ext cx="12191695" cy="6858000"/>
+            <a:off x="9111763" y="201168"/>
+            <a:ext cx="831046" cy="411480"/>
           </a:xfrm>
           <a:prstGeom prst="rect">
             <a:avLst/>
@@ -3536,7 +3426,7 @@
       </p:pic>
       <p:pic>
         <p:nvPicPr>
-          <p:cNvPr id="3" name="Picture 2" descr="tree_branch.png"/>
+          <p:cNvPr id="3" name="Picture 2" descr="KCLNLP.png"/>
           <p:cNvPicPr>
             <a:picLocks noChangeAspect="1"/>
           </p:cNvPicPr>
@@ -3550,8 +3440,8 @@
         </p:blipFill>
         <p:spPr>
           <a:xfrm>
-            <a:off x="-274320" y="2240280"/>
-            <a:ext cx="6400800" cy="4800600"/>
+            <a:off x="10125688" y="201168"/>
+            <a:ext cx="452782" cy="411480"/>
           </a:xfrm>
           <a:prstGeom prst="rect">
             <a:avLst/>
@@ -3560,7 +3450,7 @@
       </p:pic>
       <p:pic>
         <p:nvPicPr>
-          <p:cNvPr id="4" name="Picture 3" descr="KCL.png"/>
+          <p:cNvPr id="4" name="Picture 3" descr="Alan.png"/>
           <p:cNvPicPr>
             <a:picLocks noChangeAspect="1"/>
           </p:cNvPicPr>
@@ -3574,8 +3464,8 @@
         </p:blipFill>
         <p:spPr>
           <a:xfrm>
-            <a:off x="9298804" y="128016"/>
-            <a:ext cx="775643" cy="384048"/>
+            <a:off x="10761349" y="201168"/>
+            <a:ext cx="973146" cy="411480"/>
           </a:xfrm>
           <a:prstGeom prst="rect">
             <a:avLst/>
@@ -3590,15 +3480,15 @@
         </p:nvCxnSpPr>
         <p:spPr>
           <a:xfrm>
-            <a:off x="10156742" y="182880"/>
-            <a:ext cx="0" cy="274320"/>
+            <a:off x="457200" y="777240"/>
+            <a:ext cx="11277295" cy="0"/>
           </a:xfrm>
           <a:prstGeom prst="line">
             <a:avLst/>
           </a:prstGeom>
-          <a:ln w="4000">
+          <a:ln w="9525">
             <a:solidFill>
-              <a:srgbClr val="8A6A2E"/>
+              <a:srgbClr val="C8963E"/>
             </a:solidFill>
           </a:ln>
         </p:spPr>
@@ -3617,30 +3507,41 @@
           </a:fontRef>
         </p:style>
       </p:cxnSp>
-      <p:pic>
-        <p:nvPicPr>
-          <p:cNvPr id="6" name="Picture 5" descr="KCLNLP.png"/>
-          <p:cNvPicPr>
-            <a:picLocks noChangeAspect="1"/>
-          </p:cNvPicPr>
+      <p:sp>
+        <p:nvSpPr>
+          <p:cNvPr id="6" name="TextBox 5"/>
+          <p:cNvSpPr txBox="1"/>
           <p:nvPr/>
-        </p:nvPicPr>
-        <p:blipFill>
-          <a:blip r:embed="rId5"/>
-          <a:stretch>
-            <a:fillRect/>
-          </a:stretch>
-        </p:blipFill>
-        <p:spPr>
-          <a:xfrm>
-            <a:off x="10239038" y="128016"/>
-            <a:ext cx="422596" cy="384048"/>
+        </p:nvSpPr>
+        <p:spPr>
+          <a:xfrm>
+            <a:off x="914400" y="2743200"/>
+            <a:ext cx="1645920" cy="1097280"/>
           </a:xfrm>
           <a:prstGeom prst="rect">
             <a:avLst/>
           </a:prstGeom>
-        </p:spPr>
-      </p:pic>
+          <a:noFill/>
+        </p:spPr>
+        <p:txBody>
+          <a:bodyPr wrap="square" lIns="0" rIns="0" tIns="0" bIns="0" anchor="t">
+            <a:spAutoFit/>
+          </a:bodyPr>
+          <a:lstStyle/>
+          <a:p>
+            <a:pPr algn="l"/>
+            <a:r>
+              <a:rPr sz="5600" b="1" i="0">
+                <a:solidFill>
+                  <a:srgbClr val="C8963E"/>
+                </a:solidFill>
+                <a:latin typeface="Calibri"/>
+              </a:rPr>
+              <a:t>01</a:t>
+            </a:r>
+          </a:p>
+        </p:txBody>
+      </p:sp>
       <p:cxnSp>
         <p:nvCxnSpPr>
           <p:cNvPr id="7" name="Connector 6"/>
@@ -3649,15 +3550,15 @@
         </p:nvCxnSpPr>
         <p:spPr>
           <a:xfrm>
-            <a:off x="10743930" y="182880"/>
-            <a:ext cx="0" cy="274320"/>
+            <a:off x="2651760" y="2971800"/>
+            <a:ext cx="0" cy="822960"/>
           </a:xfrm>
           <a:prstGeom prst="line">
             <a:avLst/>
           </a:prstGeom>
-          <a:ln w="4000">
+          <a:ln w="12700">
             <a:solidFill>
-              <a:srgbClr val="8A6A2E"/>
+              <a:srgbClr val="C8963E"/>
             </a:solidFill>
           </a:ln>
         </p:spPr>
@@ -3676,75 +3577,16 @@
           </a:fontRef>
         </p:style>
       </p:cxnSp>
-      <p:pic>
-        <p:nvPicPr>
-          <p:cNvPr id="8" name="Picture 7" descr="Alan.png"/>
-          <p:cNvPicPr>
-            <a:picLocks noChangeAspect="1"/>
-          </p:cNvPicPr>
-          <p:nvPr/>
-        </p:nvPicPr>
-        <p:blipFill>
-          <a:blip r:embed="rId6"/>
-          <a:stretch>
-            <a:fillRect/>
-          </a:stretch>
-        </p:blipFill>
-        <p:spPr>
-          <a:xfrm>
-            <a:off x="10826226" y="128016"/>
-            <a:ext cx="908270" cy="384048"/>
-          </a:xfrm>
-          <a:prstGeom prst="rect">
-            <a:avLst/>
-          </a:prstGeom>
-        </p:spPr>
-      </p:pic>
-      <p:cxnSp>
-        <p:nvCxnSpPr>
-          <p:cNvPr id="9" name="Connector 8"/>
-          <p:cNvCxnSpPr/>
-          <p:nvPr/>
-        </p:nvCxnSpPr>
-        <p:spPr>
-          <a:xfrm>
-            <a:off x="457200" y="667512"/>
-            <a:ext cx="11277295" cy="0"/>
-          </a:xfrm>
-          <a:prstGeom prst="line">
-            <a:avLst/>
-          </a:prstGeom>
-          <a:ln w="9525">
-            <a:solidFill>
-              <a:srgbClr val="C8963E"/>
-            </a:solidFill>
-          </a:ln>
-        </p:spPr>
-        <p:style>
-          <a:lnRef idx="2">
-            <a:schemeClr val="accent1"/>
-          </a:lnRef>
-          <a:fillRef idx="0">
-            <a:schemeClr val="accent1"/>
-          </a:fillRef>
-          <a:effectRef idx="1">
-            <a:schemeClr val="accent1"/>
-          </a:effectRef>
-          <a:fontRef idx="minor">
-            <a:schemeClr val="tx1"/>
-          </a:fontRef>
-        </p:style>
-      </p:cxnSp>
-      <p:sp>
-        <p:nvSpPr>
-          <p:cNvPr id="10" name="TextBox 9"/>
+      <p:sp>
+        <p:nvSpPr>
+          <p:cNvPr id="8" name="TextBox 7"/>
           <p:cNvSpPr txBox="1"/>
           <p:nvPr/>
         </p:nvSpPr>
         <p:spPr>
           <a:xfrm>
-            <a:off x="3931920" y="2468880"/>
-            <a:ext cx="1463040" cy="914400"/>
+            <a:off x="2926080" y="2926080"/>
+            <a:ext cx="7315200" cy="914400"/>
           </a:xfrm>
           <a:prstGeom prst="rect">
             <a:avLst/>
@@ -3759,62 +3601,27 @@
           <a:p>
             <a:pPr algn="l"/>
             <a:r>
-              <a:rPr sz="6400" b="1" i="0">
+              <a:rPr sz="3400" b="1" i="0">
                 <a:solidFill>
-                  <a:srgbClr val="C8963E"/>
+                  <a:srgbClr val="1F1F1F"/>
                 </a:solidFill>
-                <a:latin typeface="Georgia"/>
+                <a:latin typeface="Calibri"/>
               </a:rPr>
-              <a:t>01</a:t>
-            </a:r>
-          </a:p>
-        </p:txBody>
-      </p:sp>
-      <p:cxnSp>
-        <p:nvCxnSpPr>
-          <p:cNvPr id="11" name="Connector 10"/>
-          <p:cNvCxnSpPr/>
-          <p:nvPr/>
-        </p:nvCxnSpPr>
-        <p:spPr>
-          <a:xfrm>
-            <a:off x="5486400" y="2880360"/>
-            <a:ext cx="0" cy="1280160"/>
-          </a:xfrm>
-          <a:prstGeom prst="line">
-            <a:avLst/>
-          </a:prstGeom>
-          <a:ln w="12700">
-            <a:solidFill>
-              <a:srgbClr val="8A6A2E"/>
-            </a:solidFill>
-          </a:ln>
-        </p:spPr>
-        <p:style>
-          <a:lnRef idx="2">
-            <a:schemeClr val="accent1"/>
-          </a:lnRef>
-          <a:fillRef idx="0">
-            <a:schemeClr val="accent1"/>
-          </a:fillRef>
-          <a:effectRef idx="1">
-            <a:schemeClr val="accent1"/>
-          </a:effectRef>
-          <a:fontRef idx="minor">
-            <a:schemeClr val="tx1"/>
-          </a:fontRef>
-        </p:style>
-      </p:cxnSp>
-      <p:sp>
-        <p:nvSpPr>
-          <p:cNvPr id="12" name="TextBox 11"/>
+              <a:t>Motivation</a:t>
+            </a:r>
+          </a:p>
+        </p:txBody>
+      </p:sp>
+      <p:sp>
+        <p:nvSpPr>
+          <p:cNvPr id="9" name="TextBox 8"/>
           <p:cNvSpPr txBox="1"/>
           <p:nvPr/>
         </p:nvSpPr>
         <p:spPr>
           <a:xfrm>
-            <a:off x="5760720" y="2697480"/>
-            <a:ext cx="6858000" cy="1188720"/>
+            <a:off x="2926080" y="3703320"/>
+            <a:ext cx="7315200" cy="365760"/>
           </a:xfrm>
           <a:prstGeom prst="rect">
             <a:avLst/>
@@ -3829,44 +3636,9 @@
           <a:p>
             <a:pPr algn="l"/>
             <a:r>
-              <a:rPr sz="3600" b="1" i="0">
-                <a:solidFill>
-                  <a:srgbClr val="2B1F12"/>
-                </a:solidFill>
-                <a:latin typeface="Georgia"/>
-              </a:rPr>
-              <a:t>Motivation</a:t>
-            </a:r>
-          </a:p>
-        </p:txBody>
-      </p:sp>
-      <p:sp>
-        <p:nvSpPr>
-          <p:cNvPr id="13" name="TextBox 12"/>
-          <p:cNvSpPr txBox="1"/>
-          <p:nvPr/>
-        </p:nvSpPr>
-        <p:spPr>
-          <a:xfrm>
-            <a:off x="5760720" y="3657600"/>
-            <a:ext cx="6858000" cy="457200"/>
-          </a:xfrm>
-          <a:prstGeom prst="rect">
-            <a:avLst/>
-          </a:prstGeom>
-          <a:noFill/>
-        </p:spPr>
-        <p:txBody>
-          <a:bodyPr wrap="square" lIns="0" rIns="0" tIns="0" bIns="0" anchor="t">
-            <a:spAutoFit/>
-          </a:bodyPr>
-          <a:lstStyle/>
-          <a:p>
-            <a:pPr algn="l"/>
-            <a:r>
               <a:rPr sz="1400" b="0" i="1">
                 <a:solidFill>
-                  <a:srgbClr val="6E5A3C"/>
+                  <a:srgbClr val="707070"/>
                 </a:solidFill>
                 <a:latin typeface="Calibri"/>
               </a:rPr>
@@ -3895,7 +3667,7 @@
       <p:grpSpPr/>
       <p:pic>
         <p:nvPicPr>
-          <p:cNvPr id="2" name="Picture 1" descr="parchment_bg.png"/>
+          <p:cNvPr id="2" name="Picture 1" descr="KCL.png"/>
           <p:cNvPicPr>
             <a:picLocks noChangeAspect="1"/>
           </p:cNvPicPr>
@@ -3909,8 +3681,8 @@
         </p:blipFill>
         <p:spPr>
           <a:xfrm>
-            <a:off x="0" y="0"/>
-            <a:ext cx="12191695" cy="6858000"/>
+            <a:off x="9111763" y="201168"/>
+            <a:ext cx="831046" cy="411480"/>
           </a:xfrm>
           <a:prstGeom prst="rect">
             <a:avLst/>
@@ -3919,7 +3691,7 @@
       </p:pic>
       <p:pic>
         <p:nvPicPr>
-          <p:cNvPr id="3" name="Picture 2" descr="KCL.png"/>
+          <p:cNvPr id="3" name="Picture 2" descr="KCLNLP.png"/>
           <p:cNvPicPr>
             <a:picLocks noChangeAspect="1"/>
           </p:cNvPicPr>
@@ -3933,31 +3705,55 @@
         </p:blipFill>
         <p:spPr>
           <a:xfrm>
-            <a:off x="9298804" y="128016"/>
-            <a:ext cx="775643" cy="384048"/>
+            <a:off x="10125688" y="201168"/>
+            <a:ext cx="452782" cy="411480"/>
           </a:xfrm>
           <a:prstGeom prst="rect">
             <a:avLst/>
           </a:prstGeom>
         </p:spPr>
       </p:pic>
+      <p:pic>
+        <p:nvPicPr>
+          <p:cNvPr id="4" name="Picture 3" descr="Alan.png"/>
+          <p:cNvPicPr>
+            <a:picLocks noChangeAspect="1"/>
+          </p:cNvPicPr>
+          <p:nvPr/>
+        </p:nvPicPr>
+        <p:blipFill>
+          <a:blip r:embed="rId4"/>
+          <a:stretch>
+            <a:fillRect/>
+          </a:stretch>
+        </p:blipFill>
+        <p:spPr>
+          <a:xfrm>
+            <a:off x="10761349" y="201168"/>
+            <a:ext cx="973146" cy="411480"/>
+          </a:xfrm>
+          <a:prstGeom prst="rect">
+            <a:avLst/>
+          </a:prstGeom>
+        </p:spPr>
+      </p:pic>
       <p:cxnSp>
         <p:nvCxnSpPr>
-          <p:cNvPr id="4" name="Connector 3"/>
+          <p:cNvPr id="5" name="Connector 4"/>
           <p:cNvCxnSpPr/>
           <p:nvPr/>
         </p:nvCxnSpPr>
         <p:spPr>
           <a:xfrm>
-            <a:off x="10156742" y="182880"/>
-            <a:ext cx="0" cy="274320"/>
+            <a:off x="457200" y="777240"/>
+            <a:ext cx="11277295" cy="0"/>
           </a:xfrm>
           <a:prstGeom prst="line">
             <a:avLst/>
           </a:prstGeom>
-          <a:ln w="4000">
+          <a:ln w="9525">
             <a:solidFill>
-              <a:srgbClr val="8A6A2E"/>
+              <a:srgbClr val="C8963E"/>
             </a:solidFill>
           </a:ln>
         </p:spPr>
@@ -3976,47 +3772,101 @@
           </a:fontRef>
         </p:style>
       </p:cxnSp>
-      <p:pic>
-        <p:nvPicPr>
-          <p:cNvPr id="5" name="Picture 4" descr="KCLNLP.png"/>
-          <p:cNvPicPr>
-            <a:picLocks noChangeAspect="1"/>
-          </p:cNvPicPr>
+      <p:sp>
+        <p:nvSpPr>
+          <p:cNvPr id="6" name="Rectangle 5"/>
+          <p:cNvSpPr/>
           <p:nvPr/>
-        </p:nvPicPr>
-        <p:blipFill>
-          <a:blip r:embed="rId4"/>
-          <a:stretch>
-            <a:fillRect/>
-          </a:stretch>
-        </p:blipFill>
-        <p:spPr>
-          <a:xfrm>
-            <a:off x="10239038" y="128016"/>
-            <a:ext cx="422596" cy="384048"/>
+        </p:nvSpPr>
+        <p:spPr>
+          <a:xfrm>
+            <a:off x="548640" y="1078992"/>
+            <a:ext cx="109728" cy="640080"/>
           </a:xfrm>
           <a:prstGeom prst="rect">
             <a:avLst/>
           </a:prstGeom>
-        </p:spPr>
-      </p:pic>
+          <a:solidFill>
+            <a:srgbClr val="C8963E"/>
+          </a:solidFill>
+          <a:ln>
+            <a:noFill/>
+          </a:ln>
+        </p:spPr>
+        <p:style>
+          <a:lnRef idx="1">
+            <a:schemeClr val="accent1"/>
+          </a:lnRef>
+          <a:fillRef idx="3">
+            <a:schemeClr val="accent1"/>
+          </a:fillRef>
+          <a:effectRef idx="2">
+            <a:schemeClr val="accent1"/>
+          </a:effectRef>
+          <a:fontRef idx="minor">
+            <a:schemeClr val="lt1"/>
+          </a:fontRef>
+        </p:style>
+        <p:txBody>
+          <a:bodyPr rtlCol="0" anchor="ctr"/>
+          <a:lstStyle/>
+          <a:p>
+            <a:pPr algn="ctr"/>
+          </a:p>
+        </p:txBody>
+      </p:sp>
+      <p:sp>
+        <p:nvSpPr>
+          <p:cNvPr id="7" name="TextBox 6"/>
+          <p:cNvSpPr txBox="1"/>
+          <p:nvPr/>
+        </p:nvSpPr>
+        <p:spPr>
+          <a:xfrm>
+            <a:off x="822960" y="1005840"/>
+            <a:ext cx="10058400" cy="822960"/>
+          </a:xfrm>
+          <a:prstGeom prst="rect">
+            <a:avLst/>
+          </a:prstGeom>
+          <a:noFill/>
+        </p:spPr>
+        <p:txBody>
+          <a:bodyPr wrap="square" lIns="0" rIns="0" tIns="0" bIns="0" anchor="t">
+            <a:spAutoFit/>
+          </a:bodyPr>
+          <a:lstStyle/>
+          <a:p>
+            <a:pPr algn="l"/>
+            <a:r>
+              <a:rPr sz="2600" b="1" i="0">
+                <a:solidFill>
+                  <a:srgbClr val="1F1F1F"/>
+                </a:solidFill>
+                <a:latin typeface="Calibri"/>
+              </a:rPr>
+              <a:t>Slide title</a:t>
+            </a:r>
+          </a:p>
+        </p:txBody>
+      </p:sp>
       <p:cxnSp>
         <p:nvCxnSpPr>
-          <p:cNvPr id="6" name="Connector 5"/>
+          <p:cNvPr id="8" name="Connector 7"/>
           <p:cNvCxnSpPr/>
           <p:nvPr/>
         </p:nvCxnSpPr>
         <p:spPr>
           <a:xfrm>
-            <a:off x="10743930" y="182880"/>
-            <a:ext cx="0" cy="274320"/>
+            <a:off x="822960" y="1874520"/>
+            <a:ext cx="10911535" cy="0"/>
           </a:xfrm>
           <a:prstGeom prst="line">
             <a:avLst/>
           </a:prstGeom>
-          <a:ln w="4000">
+          <a:ln w="6350">
             <a:solidFill>
-              <a:srgbClr val="8A6A2E"/>
+              <a:srgbClr val="C8963E"/>
             </a:solidFill>
           </a:ln>
         </p:spPr>
@@ -4035,225 +3885,16 @@
           </a:fontRef>
         </p:style>
       </p:cxnSp>
-      <p:pic>
-        <p:nvPicPr>
-          <p:cNvPr id="7" name="Picture 6" descr="Alan.png"/>
-          <p:cNvPicPr>
-            <a:picLocks noChangeAspect="1"/>
-          </p:cNvPicPr>
-          <p:nvPr/>
-        </p:nvPicPr>
-        <p:blipFill>
-          <a:blip r:embed="rId5"/>
-          <a:stretch>
-            <a:fillRect/>
-          </a:stretch>
-        </p:blipFill>
-        <p:spPr>
-          <a:xfrm>
-            <a:off x="10826226" y="128016"/>
-            <a:ext cx="908270" cy="384048"/>
-          </a:xfrm>
-          <a:prstGeom prst="rect">
-            <a:avLst/>
-          </a:prstGeom>
-        </p:spPr>
-      </p:pic>
-      <p:cxnSp>
-        <p:nvCxnSpPr>
-          <p:cNvPr id="8" name="Connector 7"/>
-          <p:cNvCxnSpPr/>
-          <p:nvPr/>
-        </p:nvCxnSpPr>
-        <p:spPr>
-          <a:xfrm>
-            <a:off x="457200" y="667512"/>
-            <a:ext cx="11277295" cy="0"/>
-          </a:xfrm>
-          <a:prstGeom prst="line">
-            <a:avLst/>
-          </a:prstGeom>
-          <a:ln w="9525">
-            <a:solidFill>
-              <a:srgbClr val="C8963E"/>
-            </a:solidFill>
-          </a:ln>
-        </p:spPr>
-        <p:style>
-          <a:lnRef idx="2">
-            <a:schemeClr val="accent1"/>
-          </a:lnRef>
-          <a:fillRef idx="0">
-            <a:schemeClr val="accent1"/>
-          </a:fillRef>
-          <a:effectRef idx="1">
-            <a:schemeClr val="accent1"/>
-          </a:effectRef>
-          <a:fontRef idx="minor">
-            <a:schemeClr val="tx1"/>
-          </a:fontRef>
-        </p:style>
-      </p:cxnSp>
-      <p:cxnSp>
-        <p:nvCxnSpPr>
-          <p:cNvPr id="9" name="Connector 8"/>
-          <p:cNvCxnSpPr/>
-          <p:nvPr/>
-        </p:nvCxnSpPr>
-        <p:spPr>
-          <a:xfrm>
-            <a:off x="347472" y="868680"/>
-            <a:ext cx="0" cy="5532120"/>
-          </a:xfrm>
-          <a:prstGeom prst="line">
-            <a:avLst/>
-          </a:prstGeom>
-          <a:ln w="12700">
-            <a:solidFill>
-              <a:srgbClr val="C8963E"/>
-            </a:solidFill>
-          </a:ln>
-        </p:spPr>
-        <p:style>
-          <a:lnRef idx="2">
-            <a:schemeClr val="accent1"/>
-          </a:lnRef>
-          <a:fillRef idx="0">
-            <a:schemeClr val="accent1"/>
-          </a:fillRef>
-          <a:effectRef idx="1">
-            <a:schemeClr val="accent1"/>
-          </a:effectRef>
-          <a:fontRef idx="minor">
-            <a:schemeClr val="tx1"/>
-          </a:fontRef>
-        </p:style>
-      </p:cxnSp>
-      <p:sp>
-        <p:nvSpPr>
-          <p:cNvPr id="10" name="Oval 9"/>
-          <p:cNvSpPr/>
-          <p:nvPr/>
-        </p:nvSpPr>
-        <p:spPr>
-          <a:xfrm rot="1500000">
-            <a:off x="274320" y="3552444"/>
-            <a:ext cx="146304" cy="201168"/>
-          </a:xfrm>
-          <a:prstGeom prst="ellipse">
-            <a:avLst/>
-          </a:prstGeom>
-          <a:solidFill>
-            <a:srgbClr val="6B7A3E"/>
-          </a:solidFill>
-          <a:ln w="4000">
-            <a:solidFill>
-              <a:srgbClr val="8A6A2E"/>
-            </a:solidFill>
-          </a:ln>
-        </p:spPr>
-        <p:style>
-          <a:lnRef idx="1">
-            <a:schemeClr val="accent1"/>
-          </a:lnRef>
-          <a:fillRef idx="3">
-            <a:schemeClr val="accent1"/>
-          </a:fillRef>
-          <a:effectRef idx="2">
-            <a:schemeClr val="accent1"/>
-          </a:effectRef>
-          <a:fontRef idx="minor">
-            <a:schemeClr val="lt1"/>
-          </a:fontRef>
-        </p:style>
-        <p:txBody>
-          <a:bodyPr rtlCol="0" anchor="ctr"/>
-          <a:lstStyle/>
-          <a:p>
-            <a:pPr algn="ctr"/>
-          </a:p>
-        </p:txBody>
-      </p:sp>
-      <p:sp>
-        <p:nvSpPr>
-          <p:cNvPr id="11" name="TextBox 10"/>
+      <p:sp>
+        <p:nvSpPr>
+          <p:cNvPr id="9" name="TextBox 8"/>
           <p:cNvSpPr txBox="1"/>
           <p:nvPr/>
         </p:nvSpPr>
         <p:spPr>
           <a:xfrm>
-            <a:off x="731520" y="914400"/>
-            <a:ext cx="10058400" cy="822960"/>
-          </a:xfrm>
-          <a:prstGeom prst="rect">
-            <a:avLst/>
-          </a:prstGeom>
-          <a:noFill/>
-        </p:spPr>
-        <p:txBody>
-          <a:bodyPr wrap="square" lIns="0" rIns="0" tIns="0" bIns="0" anchor="t">
-            <a:spAutoFit/>
-          </a:bodyPr>
-          <a:lstStyle/>
-          <a:p>
-            <a:pPr algn="l"/>
-            <a:r>
-              <a:rPr sz="2800" b="1" i="0">
-                <a:solidFill>
-                  <a:srgbClr val="2B1F12"/>
-                </a:solidFill>
-                <a:latin typeface="Georgia"/>
-              </a:rPr>
-              <a:t>Slide title</a:t>
-            </a:r>
-          </a:p>
-        </p:txBody>
-      </p:sp>
-      <p:cxnSp>
-        <p:nvCxnSpPr>
-          <p:cNvPr id="12" name="Connector 11"/>
-          <p:cNvCxnSpPr/>
-          <p:nvPr/>
-        </p:nvCxnSpPr>
-        <p:spPr>
-          <a:xfrm>
-            <a:off x="731520" y="1691640"/>
-            <a:ext cx="822960" cy="0"/>
-          </a:xfrm>
-          <a:prstGeom prst="line">
-            <a:avLst/>
-          </a:prstGeom>
-          <a:ln w="12700">
-            <a:solidFill>
-              <a:srgbClr val="C8963E"/>
-            </a:solidFill>
-          </a:ln>
-        </p:spPr>
-        <p:style>
-          <a:lnRef idx="2">
-            <a:schemeClr val="accent1"/>
-          </a:lnRef>
-          <a:fillRef idx="0">
-            <a:schemeClr val="accent1"/>
-          </a:fillRef>
-          <a:effectRef idx="1">
-            <a:schemeClr val="accent1"/>
-          </a:effectRef>
-          <a:fontRef idx="minor">
-            <a:schemeClr val="tx1"/>
-          </a:fontRef>
-        </p:style>
-      </p:cxnSp>
-      <p:sp>
-        <p:nvSpPr>
-          <p:cNvPr id="13" name="TextBox 12"/>
-          <p:cNvSpPr txBox="1"/>
-          <p:nvPr/>
-        </p:nvSpPr>
-        <p:spPr>
-          <a:xfrm>
-            <a:off x="731520" y="1965960"/>
-            <a:ext cx="10698480" cy="4206240"/>
+            <a:off x="822960" y="2148840"/>
+            <a:ext cx="10972800" cy="4206240"/>
           </a:xfrm>
           <a:prstGeom prst="rect">
             <a:avLst/>
@@ -4274,7 +3915,7 @@
             <a:r>
               <a:rPr sz="1800">
                 <a:solidFill>
-                  <a:srgbClr val="2B1F12"/>
+                  <a:srgbClr val="1F1F1F"/>
                 </a:solidFill>
                 <a:latin typeface="Calibri"/>
               </a:rPr>
@@ -4290,7 +3931,7 @@
             <a:r>
               <a:rPr sz="1800">
                 <a:solidFill>
-                  <a:srgbClr val="2B1F12"/>
+                  <a:srgbClr val="1F1F1F"/>
                 </a:solidFill>
                 <a:latin typeface="Calibri"/>
               </a:rPr>
@@ -4306,7 +3947,7 @@
             <a:r>
               <a:rPr sz="1800">
                 <a:solidFill>
-                  <a:srgbClr val="2B1F12"/>
+                  <a:srgbClr val="1F1F1F"/>
                 </a:solidFill>
                 <a:latin typeface="Calibri"/>
               </a:rPr>
@@ -4322,7 +3963,7 @@
             <a:r>
               <a:rPr sz="1800">
                 <a:solidFill>
-                  <a:srgbClr val="2B1F12"/>
+                  <a:srgbClr val="1F1F1F"/>
                 </a:solidFill>
                 <a:latin typeface="Calibri"/>
               </a:rPr>
@@ -4333,14 +3974,14 @@
       </p:sp>
       <p:sp>
         <p:nvSpPr>
-          <p:cNvPr id="14" name="TextBox 13"/>
+          <p:cNvPr id="10" name="TextBox 9"/>
           <p:cNvSpPr txBox="1"/>
           <p:nvPr/>
         </p:nvSpPr>
         <p:spPr>
           <a:xfrm>
-            <a:off x="731520" y="6446520"/>
-            <a:ext cx="10698480" cy="274320"/>
+            <a:off x="822960" y="6492240"/>
+            <a:ext cx="10972800" cy="274320"/>
           </a:xfrm>
           <a:prstGeom prst="rect">
             <a:avLst/>
@@ -4357,7 +3998,7 @@
             <a:r>
               <a:rPr sz="1100" b="0" i="1">
                 <a:solidFill>
-                  <a:srgbClr val="6E5A3C"/>
+                  <a:srgbClr val="707070"/>
                 </a:solidFill>
                 <a:latin typeface="Calibri"/>
               </a:rPr>
@@ -4386,7 +4027,7 @@
       <p:grpSpPr/>
       <p:pic>
         <p:nvPicPr>
-          <p:cNvPr id="2" name="Picture 1" descr="parchment_bg.png"/>
+          <p:cNvPr id="2" name="Picture 1" descr="KCL.png"/>
           <p:cNvPicPr>
             <a:picLocks noChangeAspect="1"/>
           </p:cNvPicPr>
@@ -4400,8 +4041,8 @@
         </p:blipFill>
         <p:spPr>
           <a:xfrm>
-            <a:off x="0" y="0"/>
-            <a:ext cx="12191695" cy="6858000"/>
+            <a:off x="9111763" y="201168"/>
+            <a:ext cx="831046" cy="411480"/>
           </a:xfrm>
           <a:prstGeom prst="rect">
             <a:avLst/>
@@ -4410,7 +4051,7 @@
       </p:pic>
       <p:pic>
         <p:nvPicPr>
-          <p:cNvPr id="3" name="Picture 2" descr="KCL.png"/>
+          <p:cNvPr id="3" name="Picture 2" descr="KCLNLP.png"/>
           <p:cNvPicPr>
             <a:picLocks noChangeAspect="1"/>
           </p:cNvPicPr>
@@ -4424,31 +4065,55 @@
         </p:blipFill>
         <p:spPr>
           <a:xfrm>
-            <a:off x="9298804" y="128016"/>
-            <a:ext cx="775643" cy="384048"/>
+            <a:off x="10125688" y="201168"/>
+            <a:ext cx="452782" cy="411480"/>
           </a:xfrm>
           <a:prstGeom prst="rect">
             <a:avLst/>
           </a:prstGeom>
         </p:spPr>
       </p:pic>
+      <p:pic>
+        <p:nvPicPr>
+          <p:cNvPr id="4" name="Picture 3" descr="Alan.png"/>
+          <p:cNvPicPr>
+            <a:picLocks noChangeAspect="1"/>
+          </p:cNvPicPr>
+          <p:nvPr/>
+        </p:nvPicPr>
+        <p:blipFill>
+          <a:blip r:embed="rId4"/>
+          <a:stretch>
+            <a:fillRect/>
+          </a:stretch>
+        </p:blipFill>
+        <p:spPr>
+          <a:xfrm>
+            <a:off x="10761349" y="201168"/>
+            <a:ext cx="973146" cy="411480"/>
+          </a:xfrm>
+          <a:prstGeom prst="rect">
+            <a:avLst/>
+          </a:prstGeom>
+        </p:spPr>
+      </p:pic>
       <p:cxnSp>
         <p:nvCxnSpPr>
-          <p:cNvPr id="4" name="Connector 3"/>
+          <p:cNvPr id="5" name="Connector 4"/>
           <p:cNvCxnSpPr/>
           <p:nvPr/>
         </p:nvCxnSpPr>
         <p:spPr>
           <a:xfrm>
-            <a:off x="10156742" y="182880"/>
-            <a:ext cx="0" cy="274320"/>
+            <a:off x="457200" y="777240"/>
+            <a:ext cx="11277295" cy="0"/>
           </a:xfrm>
           <a:prstGeom prst="line">
             <a:avLst/>
           </a:prstGeom>
-          <a:ln w="4000">
+          <a:ln w="9525">
             <a:solidFill>
-              <a:srgbClr val="8A6A2E"/>
+              <a:srgbClr val="C8963E"/>
             </a:solidFill>
           </a:ln>
         </p:spPr>
@@ -4467,47 +4132,101 @@
           </a:fontRef>
         </p:style>
       </p:cxnSp>
-      <p:pic>
-        <p:nvPicPr>
-          <p:cNvPr id="5" name="Picture 4" descr="KCLNLP.png"/>
-          <p:cNvPicPr>
-            <a:picLocks noChangeAspect="1"/>
-          </p:cNvPicPr>
+      <p:sp>
+        <p:nvSpPr>
+          <p:cNvPr id="6" name="Rectangle 5"/>
+          <p:cNvSpPr/>
           <p:nvPr/>
-        </p:nvPicPr>
-        <p:blipFill>
-          <a:blip r:embed="rId4"/>
-          <a:stretch>
-            <a:fillRect/>
-          </a:stretch>
-        </p:blipFill>
-        <p:spPr>
-          <a:xfrm>
-            <a:off x="10239038" y="128016"/>
-            <a:ext cx="422596" cy="384048"/>
+        </p:nvSpPr>
+        <p:spPr>
+          <a:xfrm>
+            <a:off x="548640" y="1078992"/>
+            <a:ext cx="109728" cy="640080"/>
           </a:xfrm>
           <a:prstGeom prst="rect">
             <a:avLst/>
           </a:prstGeom>
-        </p:spPr>
-      </p:pic>
+          <a:solidFill>
+            <a:srgbClr val="C8963E"/>
+          </a:solidFill>
+          <a:ln>
+            <a:noFill/>
+          </a:ln>
+        </p:spPr>
+        <p:style>
+          <a:lnRef idx="1">
+            <a:schemeClr val="accent1"/>
+          </a:lnRef>
+          <a:fillRef idx="3">
+            <a:schemeClr val="accent1"/>
+          </a:fillRef>
+          <a:effectRef idx="2">
+            <a:schemeClr val="accent1"/>
+          </a:effectRef>
+          <a:fontRef idx="minor">
+            <a:schemeClr val="lt1"/>
+          </a:fontRef>
+        </p:style>
+        <p:txBody>
+          <a:bodyPr rtlCol="0" anchor="ctr"/>
+          <a:lstStyle/>
+          <a:p>
+            <a:pPr algn="ctr"/>
+          </a:p>
+        </p:txBody>
+      </p:sp>
+      <p:sp>
+        <p:nvSpPr>
+          <p:cNvPr id="7" name="TextBox 6"/>
+          <p:cNvSpPr txBox="1"/>
+          <p:nvPr/>
+        </p:nvSpPr>
+        <p:spPr>
+          <a:xfrm>
+            <a:off x="822960" y="1005840"/>
+            <a:ext cx="10058400" cy="822960"/>
+          </a:xfrm>
+          <a:prstGeom prst="rect">
+            <a:avLst/>
+          </a:prstGeom>
+          <a:noFill/>
+        </p:spPr>
+        <p:txBody>
+          <a:bodyPr wrap="square" lIns="0" rIns="0" tIns="0" bIns="0" anchor="t">
+            <a:spAutoFit/>
+          </a:bodyPr>
+          <a:lstStyle/>
+          <a:p>
+            <a:pPr algn="l"/>
+            <a:r>
+              <a:rPr sz="2600" b="1" i="0">
+                <a:solidFill>
+                  <a:srgbClr val="1F1F1F"/>
+                </a:solidFill>
+                <a:latin typeface="Calibri"/>
+              </a:rPr>
+              <a:t>Figure or image + text</a:t>
+            </a:r>
+          </a:p>
+        </p:txBody>
+      </p:sp>
       <p:cxnSp>
         <p:nvCxnSpPr>
-          <p:cNvPr id="6" name="Connector 5"/>
+          <p:cNvPr id="8" name="Connector 7"/>
           <p:cNvCxnSpPr/>
           <p:nvPr/>
         </p:nvCxnSpPr>
         <p:spPr>
           <a:xfrm>
-            <a:off x="10743930" y="182880"/>
-            <a:ext cx="0" cy="274320"/>
+            <a:off x="822960" y="1874520"/>
+            <a:ext cx="10911535" cy="0"/>
           </a:xfrm>
           <a:prstGeom prst="line">
             <a:avLst/>
           </a:prstGeom>
-          <a:ln w="4000">
+          <a:ln w="6350">
             <a:solidFill>
-              <a:srgbClr val="8A6A2E"/>
+              <a:srgbClr val="C8963E"/>
             </a:solidFill>
           </a:ln>
         </p:spPr>
@@ -4526,120 +4245,24 @@
           </a:fontRef>
         </p:style>
       </p:cxnSp>
-      <p:pic>
-        <p:nvPicPr>
-          <p:cNvPr id="7" name="Picture 6" descr="Alan.png"/>
-          <p:cNvPicPr>
-            <a:picLocks noChangeAspect="1"/>
-          </p:cNvPicPr>
+      <p:sp>
+        <p:nvSpPr>
+          <p:cNvPr id="9" name="Rectangle 8"/>
+          <p:cNvSpPr/>
           <p:nvPr/>
-        </p:nvPicPr>
-        <p:blipFill>
-          <a:blip r:embed="rId5"/>
-          <a:stretch>
-            <a:fillRect/>
-          </a:stretch>
-        </p:blipFill>
-        <p:spPr>
-          <a:xfrm>
-            <a:off x="10826226" y="128016"/>
-            <a:ext cx="908270" cy="384048"/>
+        </p:nvSpPr>
+        <p:spPr>
+          <a:xfrm>
+            <a:off x="822960" y="2148840"/>
+            <a:ext cx="5303520" cy="4114800"/>
           </a:xfrm>
           <a:prstGeom prst="rect">
             <a:avLst/>
           </a:prstGeom>
-        </p:spPr>
-      </p:pic>
-      <p:cxnSp>
-        <p:nvCxnSpPr>
-          <p:cNvPr id="8" name="Connector 7"/>
-          <p:cNvCxnSpPr/>
-          <p:nvPr/>
-        </p:nvCxnSpPr>
-        <p:spPr>
-          <a:xfrm>
-            <a:off x="457200" y="667512"/>
-            <a:ext cx="11277295" cy="0"/>
-          </a:xfrm>
-          <a:prstGeom prst="line">
-            <a:avLst/>
-          </a:prstGeom>
-          <a:ln w="9525">
+          <a:noFill/>
+          <a:ln w="6350">
             <a:solidFill>
-              <a:srgbClr val="C8963E"/>
-            </a:solidFill>
-          </a:ln>
-        </p:spPr>
-        <p:style>
-          <a:lnRef idx="2">
-            <a:schemeClr val="accent1"/>
-          </a:lnRef>
-          <a:fillRef idx="0">
-            <a:schemeClr val="accent1"/>
-          </a:fillRef>
-          <a:effectRef idx="1">
-            <a:schemeClr val="accent1"/>
-          </a:effectRef>
-          <a:fontRef idx="minor">
-            <a:schemeClr val="tx1"/>
-          </a:fontRef>
-        </p:style>
-      </p:cxnSp>
-      <p:cxnSp>
-        <p:nvCxnSpPr>
-          <p:cNvPr id="9" name="Connector 8"/>
-          <p:cNvCxnSpPr/>
-          <p:nvPr/>
-        </p:nvCxnSpPr>
-        <p:spPr>
-          <a:xfrm>
-            <a:off x="347472" y="868680"/>
-            <a:ext cx="0" cy="5532120"/>
-          </a:xfrm>
-          <a:prstGeom prst="line">
-            <a:avLst/>
-          </a:prstGeom>
-          <a:ln w="12700">
-            <a:solidFill>
-              <a:srgbClr val="C8963E"/>
-            </a:solidFill>
-          </a:ln>
-        </p:spPr>
-        <p:style>
-          <a:lnRef idx="2">
-            <a:schemeClr val="accent1"/>
-          </a:lnRef>
-          <a:fillRef idx="0">
-            <a:schemeClr val="accent1"/>
-          </a:fillRef>
-          <a:effectRef idx="1">
-            <a:schemeClr val="accent1"/>
-          </a:effectRef>
-          <a:fontRef idx="minor">
-            <a:schemeClr val="tx1"/>
-          </a:fontRef>
-        </p:style>
-      </p:cxnSp>
-      <p:sp>
-        <p:nvSpPr>
-          <p:cNvPr id="10" name="Oval 9"/>
-          <p:cNvSpPr/>
-          <p:nvPr/>
-        </p:nvSpPr>
-        <p:spPr>
-          <a:xfrm rot="1500000">
-            <a:off x="274320" y="3552444"/>
-            <a:ext cx="146304" cy="201168"/>
-          </a:xfrm>
-          <a:prstGeom prst="ellipse">
-            <a:avLst/>
-          </a:prstGeom>
-          <a:solidFill>
-            <a:srgbClr val="6B7A3E"/>
-          </a:solidFill>
-          <a:ln w="4000">
-            <a:solidFill>
-              <a:srgbClr val="8A6A2E"/>
+              <a:srgbClr val="707070"/>
             </a:solidFill>
           </a:ln>
         </p:spPr>
@@ -4667,14 +4290,14 @@
       </p:sp>
       <p:sp>
         <p:nvSpPr>
-          <p:cNvPr id="11" name="TextBox 10"/>
+          <p:cNvPr id="10" name="TextBox 9"/>
           <p:cNvSpPr txBox="1"/>
           <p:nvPr/>
         </p:nvSpPr>
         <p:spPr>
           <a:xfrm>
-            <a:off x="731520" y="914400"/>
-            <a:ext cx="10058400" cy="822960"/>
+            <a:off x="822960" y="2148840"/>
+            <a:ext cx="5303520" cy="4114800"/>
           </a:xfrm>
           <a:prstGeom prst="rect">
             <a:avLst/>
@@ -4682,114 +4305,34 @@
           <a:noFill/>
         </p:spPr>
         <p:txBody>
-          <a:bodyPr wrap="square" lIns="0" rIns="0" tIns="0" bIns="0" anchor="t">
+          <a:bodyPr wrap="square" lIns="0" rIns="0" tIns="0" bIns="0" anchor="ctr">
             <a:spAutoFit/>
           </a:bodyPr>
           <a:lstStyle/>
           <a:p>
-            <a:pPr algn="l"/>
-            <a:r>
-              <a:rPr sz="2800" b="1" i="0">
+            <a:pPr algn="ctr"/>
+            <a:r>
+              <a:rPr sz="1400" b="0" i="1">
                 <a:solidFill>
-                  <a:srgbClr val="2B1F12"/>
+                  <a:srgbClr val="707070"/>
                 </a:solidFill>
-                <a:latin typeface="Georgia"/>
+                <a:latin typeface="Calibri"/>
               </a:rPr>
-              <a:t>Figure or image + text</a:t>
-            </a:r>
-          </a:p>
-        </p:txBody>
-      </p:sp>
-      <p:cxnSp>
-        <p:nvCxnSpPr>
-          <p:cNvPr id="12" name="Connector 11"/>
-          <p:cNvCxnSpPr/>
-          <p:nvPr/>
-        </p:nvCxnSpPr>
-        <p:spPr>
-          <a:xfrm>
-            <a:off x="731520" y="1691640"/>
-            <a:ext cx="822960" cy="0"/>
-          </a:xfrm>
-          <a:prstGeom prst="line">
-            <a:avLst/>
-          </a:prstGeom>
-          <a:ln w="12700">
-            <a:solidFill>
-              <a:srgbClr val="C8963E"/>
-            </a:solidFill>
-          </a:ln>
-        </p:spPr>
-        <p:style>
-          <a:lnRef idx="2">
-            <a:schemeClr val="accent1"/>
-          </a:lnRef>
-          <a:fillRef idx="0">
-            <a:schemeClr val="accent1"/>
-          </a:fillRef>
-          <a:effectRef idx="1">
-            <a:schemeClr val="accent1"/>
-          </a:effectRef>
-          <a:fontRef idx="minor">
-            <a:schemeClr val="tx1"/>
-          </a:fontRef>
-        </p:style>
-      </p:cxnSp>
-      <p:sp>
-        <p:nvSpPr>
-          <p:cNvPr id="13" name="Rectangle 12"/>
-          <p:cNvSpPr/>
-          <p:nvPr/>
-        </p:nvSpPr>
-        <p:spPr>
-          <a:xfrm>
-            <a:off x="731520" y="2011680"/>
-            <a:ext cx="5120640" cy="4206240"/>
-          </a:xfrm>
-          <a:prstGeom prst="rect">
-            <a:avLst/>
-          </a:prstGeom>
-          <a:solidFill>
-            <a:srgbClr val="ECDFC3"/>
-          </a:solidFill>
-          <a:ln w="9525">
-            <a:solidFill>
-              <a:srgbClr val="8A6A2E"/>
-            </a:solidFill>
-          </a:ln>
-        </p:spPr>
-        <p:style>
-          <a:lnRef idx="1">
-            <a:schemeClr val="accent1"/>
-          </a:lnRef>
-          <a:fillRef idx="3">
-            <a:schemeClr val="accent1"/>
-          </a:fillRef>
-          <a:effectRef idx="2">
-            <a:schemeClr val="accent1"/>
-          </a:effectRef>
-          <a:fontRef idx="minor">
-            <a:schemeClr val="lt1"/>
-          </a:fontRef>
-        </p:style>
-        <p:txBody>
-          <a:bodyPr rtlCol="0" anchor="ctr"/>
-          <a:lstStyle/>
-          <a:p>
-            <a:pPr algn="ctr"/>
-          </a:p>
-        </p:txBody>
-      </p:sp>
-      <p:sp>
-        <p:nvSpPr>
-          <p:cNvPr id="14" name="TextBox 13"/>
+              <a:t>[ figure / diagram ]</a:t>
+            </a:r>
+          </a:p>
+        </p:txBody>
+      </p:sp>
+      <p:sp>
+        <p:nvSpPr>
+          <p:cNvPr id="11" name="TextBox 10"/>
           <p:cNvSpPr txBox="1"/>
           <p:nvPr/>
         </p:nvSpPr>
         <p:spPr>
           <a:xfrm>
-            <a:off x="731520" y="2011680"/>
-            <a:ext cx="5120640" cy="4206240"/>
+            <a:off x="6583680" y="2148840"/>
+            <a:ext cx="5150815" cy="457200"/>
           </a:xfrm>
           <a:prstGeom prst="rect">
             <a:avLst/>
@@ -4797,104 +4340,34 @@
           <a:noFill/>
         </p:spPr>
         <p:txBody>
-          <a:bodyPr wrap="square" lIns="0" rIns="0" tIns="0" bIns="0" anchor="ctr">
+          <a:bodyPr wrap="square" lIns="0" rIns="0" tIns="0" bIns="0" anchor="t">
             <a:spAutoFit/>
           </a:bodyPr>
           <a:lstStyle/>
           <a:p>
-            <a:pPr algn="ctr"/>
-            <a:r>
-              <a:rPr sz="1400" b="0" i="1">
+            <a:pPr algn="l"/>
+            <a:r>
+              <a:rPr sz="2000" b="1" i="0">
                 <a:solidFill>
-                  <a:srgbClr val="6E5A3C"/>
+                  <a:srgbClr val="1F1F1F"/>
                 </a:solidFill>
                 <a:latin typeface="Calibri"/>
               </a:rPr>
-              <a:t>[ figure / diagram ]</a:t>
-            </a:r>
-          </a:p>
-        </p:txBody>
-      </p:sp>
-      <p:cxnSp>
-        <p:nvCxnSpPr>
-          <p:cNvPr id="15" name="Connector 14"/>
-          <p:cNvCxnSpPr/>
-          <p:nvPr/>
-        </p:nvCxnSpPr>
-        <p:spPr>
-          <a:xfrm>
-            <a:off x="6172200" y="2194560"/>
-            <a:ext cx="0" cy="3840480"/>
-          </a:xfrm>
-          <a:prstGeom prst="line">
-            <a:avLst/>
-          </a:prstGeom>
-          <a:ln w="9525">
-            <a:solidFill>
-              <a:srgbClr val="6B7A3E"/>
-            </a:solidFill>
-          </a:ln>
-        </p:spPr>
-        <p:style>
-          <a:lnRef idx="2">
-            <a:schemeClr val="accent1"/>
-          </a:lnRef>
-          <a:fillRef idx="0">
-            <a:schemeClr val="accent1"/>
-          </a:fillRef>
-          <a:effectRef idx="1">
-            <a:schemeClr val="accent1"/>
-          </a:effectRef>
-          <a:fontRef idx="minor">
-            <a:schemeClr val="tx1"/>
-          </a:fontRef>
-        </p:style>
-      </p:cxnSp>
-      <p:sp>
-        <p:nvSpPr>
-          <p:cNvPr id="16" name="TextBox 15"/>
+              <a:t>Caption or claim</a:t>
+            </a:r>
+          </a:p>
+        </p:txBody>
+      </p:sp>
+      <p:sp>
+        <p:nvSpPr>
+          <p:cNvPr id="12" name="TextBox 11"/>
           <p:cNvSpPr txBox="1"/>
           <p:nvPr/>
         </p:nvSpPr>
         <p:spPr>
           <a:xfrm>
-            <a:off x="6492240" y="2011680"/>
-            <a:ext cx="5242255" cy="457200"/>
-          </a:xfrm>
-          <a:prstGeom prst="rect">
-            <a:avLst/>
-          </a:prstGeom>
-          <a:noFill/>
-        </p:spPr>
-        <p:txBody>
-          <a:bodyPr wrap="square" lIns="0" rIns="0" tIns="0" bIns="0" anchor="t">
-            <a:spAutoFit/>
-          </a:bodyPr>
-          <a:lstStyle/>
-          <a:p>
-            <a:pPr algn="l"/>
-            <a:r>
-              <a:rPr sz="2000" b="1" i="0">
-                <a:solidFill>
-                  <a:srgbClr val="2B1F12"/>
-                </a:solidFill>
-                <a:latin typeface="Georgia"/>
-              </a:rPr>
-              <a:t>Caption or claim</a:t>
-            </a:r>
-          </a:p>
-        </p:txBody>
-      </p:sp>
-      <p:sp>
-        <p:nvSpPr>
-          <p:cNvPr id="17" name="TextBox 16"/>
-          <p:cNvSpPr txBox="1"/>
-          <p:nvPr/>
-        </p:nvSpPr>
-        <p:spPr>
-          <a:xfrm>
-            <a:off x="6492240" y="2651760"/>
-            <a:ext cx="5242255" cy="3566160"/>
+            <a:off x="6583680" y="2788920"/>
+            <a:ext cx="5150815" cy="3474720"/>
           </a:xfrm>
           <a:prstGeom prst="rect">
             <a:avLst/>
@@ -4915,7 +4388,7 @@
             <a:r>
               <a:rPr sz="1500">
                 <a:solidFill>
-                  <a:srgbClr val="2B1F12"/>
+                  <a:srgbClr val="1F1F1F"/>
                 </a:solidFill>
                 <a:latin typeface="Calibri"/>
               </a:rPr>
@@ -4931,7 +4404,7 @@
             <a:r>
               <a:rPr sz="1500">
                 <a:solidFill>
-                  <a:srgbClr val="2B1F12"/>
+                  <a:srgbClr val="1F1F1F"/>
                 </a:solidFill>
                 <a:latin typeface="Calibri"/>
               </a:rPr>
@@ -4947,7 +4420,7 @@
             <a:r>
               <a:rPr sz="1500">
                 <a:solidFill>
-                  <a:srgbClr val="2B1F12"/>
+                  <a:srgbClr val="1F1F1F"/>
                 </a:solidFill>
                 <a:latin typeface="Calibri"/>
               </a:rPr>
@@ -4976,7 +4449,7 @@
       <p:grpSpPr/>
       <p:pic>
         <p:nvPicPr>
-          <p:cNvPr id="2" name="Picture 1" descr="parchment_bg.png"/>
+          <p:cNvPr id="2" name="Picture 1" descr="KCL.png"/>
           <p:cNvPicPr>
             <a:picLocks noChangeAspect="1"/>
           </p:cNvPicPr>
@@ -4990,8 +4463,8 @@
         </p:blipFill>
         <p:spPr>
           <a:xfrm>
-            <a:off x="0" y="0"/>
-            <a:ext cx="12191695" cy="6858000"/>
+            <a:off x="9111763" y="201168"/>
+            <a:ext cx="831046" cy="411480"/>
           </a:xfrm>
           <a:prstGeom prst="rect">
             <a:avLst/>
@@ -5000,7 +4473,7 @@
       </p:pic>
       <p:pic>
         <p:nvPicPr>
-          <p:cNvPr id="3" name="Picture 2" descr="tree_branch.png"/>
+          <p:cNvPr id="3" name="Picture 2" descr="KCLNLP.png"/>
           <p:cNvPicPr>
             <a:picLocks noChangeAspect="1"/>
           </p:cNvPicPr>
@@ -5014,8 +4487,8 @@
         </p:blipFill>
         <p:spPr>
           <a:xfrm>
-            <a:off x="4785055" y="1280160"/>
-            <a:ext cx="7680960" cy="5760720"/>
+            <a:off x="10125688" y="201168"/>
+            <a:ext cx="452782" cy="411480"/>
           </a:xfrm>
           <a:prstGeom prst="rect">
             <a:avLst/>
@@ -5024,7 +4497,7 @@
       </p:pic>
       <p:pic>
         <p:nvPicPr>
-          <p:cNvPr id="4" name="Picture 3" descr="KCL.png"/>
+          <p:cNvPr id="4" name="Picture 3" descr="Alan.png"/>
           <p:cNvPicPr>
             <a:picLocks noChangeAspect="1"/>
           </p:cNvPicPr>
@@ -5038,8 +4511,8 @@
         </p:blipFill>
         <p:spPr>
           <a:xfrm>
-            <a:off x="9298804" y="128016"/>
-            <a:ext cx="775643" cy="384048"/>
+            <a:off x="10761349" y="201168"/>
+            <a:ext cx="973146" cy="411480"/>
           </a:xfrm>
           <a:prstGeom prst="rect">
             <a:avLst/>
@@ -5054,15 +4527,15 @@
         </p:nvCxnSpPr>
         <p:spPr>
           <a:xfrm>
-            <a:off x="10156742" y="182880"/>
-            <a:ext cx="0" cy="274320"/>
+            <a:off x="457200" y="777240"/>
+            <a:ext cx="11277295" cy="0"/>
           </a:xfrm>
           <a:prstGeom prst="line">
             <a:avLst/>
           </a:prstGeom>
-          <a:ln w="4000">
+          <a:ln w="9525">
             <a:solidFill>
-              <a:srgbClr val="8A6A2E"/>
+              <a:srgbClr val="C8963E"/>
             </a:solidFill>
           </a:ln>
         </p:spPr>
@@ -5081,47 +4554,101 @@
           </a:fontRef>
         </p:style>
       </p:cxnSp>
-      <p:pic>
-        <p:nvPicPr>
-          <p:cNvPr id="6" name="Picture 5" descr="KCLNLP.png"/>
-          <p:cNvPicPr>
-            <a:picLocks noChangeAspect="1"/>
-          </p:cNvPicPr>
+      <p:sp>
+        <p:nvSpPr>
+          <p:cNvPr id="6" name="Rectangle 5"/>
+          <p:cNvSpPr/>
           <p:nvPr/>
-        </p:nvPicPr>
-        <p:blipFill>
-          <a:blip r:embed="rId5"/>
-          <a:stretch>
-            <a:fillRect/>
-          </a:stretch>
-        </p:blipFill>
-        <p:spPr>
-          <a:xfrm>
-            <a:off x="10239038" y="128016"/>
-            <a:ext cx="422596" cy="384048"/>
+        </p:nvSpPr>
+        <p:spPr>
+          <a:xfrm>
+            <a:off x="640080" y="2880360"/>
+            <a:ext cx="109728" cy="1463040"/>
           </a:xfrm>
           <a:prstGeom prst="rect">
             <a:avLst/>
           </a:prstGeom>
-        </p:spPr>
-      </p:pic>
+          <a:solidFill>
+            <a:srgbClr val="C8963E"/>
+          </a:solidFill>
+          <a:ln>
+            <a:noFill/>
+          </a:ln>
+        </p:spPr>
+        <p:style>
+          <a:lnRef idx="1">
+            <a:schemeClr val="accent1"/>
+          </a:lnRef>
+          <a:fillRef idx="3">
+            <a:schemeClr val="accent1"/>
+          </a:fillRef>
+          <a:effectRef idx="2">
+            <a:schemeClr val="accent1"/>
+          </a:effectRef>
+          <a:fontRef idx="minor">
+            <a:schemeClr val="lt1"/>
+          </a:fontRef>
+        </p:style>
+        <p:txBody>
+          <a:bodyPr rtlCol="0" anchor="ctr"/>
+          <a:lstStyle/>
+          <a:p>
+            <a:pPr algn="ctr"/>
+          </a:p>
+        </p:txBody>
+      </p:sp>
+      <p:sp>
+        <p:nvSpPr>
+          <p:cNvPr id="7" name="TextBox 6"/>
+          <p:cNvSpPr txBox="1"/>
+          <p:nvPr/>
+        </p:nvSpPr>
+        <p:spPr>
+          <a:xfrm>
+            <a:off x="960120" y="2743200"/>
+            <a:ext cx="9144000" cy="1463040"/>
+          </a:xfrm>
+          <a:prstGeom prst="rect">
+            <a:avLst/>
+          </a:prstGeom>
+          <a:noFill/>
+        </p:spPr>
+        <p:txBody>
+          <a:bodyPr wrap="square" lIns="0" rIns="0" tIns="0" bIns="0" anchor="t">
+            <a:spAutoFit/>
+          </a:bodyPr>
+          <a:lstStyle/>
+          <a:p>
+            <a:pPr algn="l"/>
+            <a:r>
+              <a:rPr sz="5600" b="1" i="0">
+                <a:solidFill>
+                  <a:srgbClr val="1F1F1F"/>
+                </a:solidFill>
+                <a:latin typeface="Calibri"/>
+              </a:rPr>
+              <a:t>Thank you</a:t>
+            </a:r>
+          </a:p>
+        </p:txBody>
+      </p:sp>
       <p:cxnSp>
         <p:nvCxnSpPr>
-          <p:cNvPr id="7" name="Connector 6"/>
+          <p:cNvPr id="8" name="Connector 7"/>
           <p:cNvCxnSpPr/>
           <p:nvPr/>
         </p:nvCxnSpPr>
         <p:spPr>
           <a:xfrm>
-            <a:off x="10743930" y="182880"/>
-            <a:ext cx="0" cy="274320"/>
+            <a:off x="960120" y="4343400"/>
+            <a:ext cx="1691640" cy="0"/>
           </a:xfrm>
           <a:prstGeom prst="line">
             <a:avLst/>
           </a:prstGeom>
-          <a:ln w="4000">
+          <a:ln w="19050">
             <a:solidFill>
-              <a:srgbClr val="8A6A2E"/>
+              <a:srgbClr val="C8963E"/>
             </a:solidFill>
           </a:ln>
         </p:spPr>
@@ -5140,75 +4667,16 @@
           </a:fontRef>
         </p:style>
       </p:cxnSp>
-      <p:pic>
-        <p:nvPicPr>
-          <p:cNvPr id="8" name="Picture 7" descr="Alan.png"/>
-          <p:cNvPicPr>
-            <a:picLocks noChangeAspect="1"/>
-          </p:cNvPicPr>
-          <p:nvPr/>
-        </p:nvPicPr>
-        <p:blipFill>
-          <a:blip r:embed="rId6"/>
-          <a:stretch>
-            <a:fillRect/>
-          </a:stretch>
-        </p:blipFill>
-        <p:spPr>
-          <a:xfrm>
-            <a:off x="10826226" y="128016"/>
-            <a:ext cx="908270" cy="384048"/>
-          </a:xfrm>
-          <a:prstGeom prst="rect">
-            <a:avLst/>
-          </a:prstGeom>
-        </p:spPr>
-      </p:pic>
-      <p:cxnSp>
-        <p:nvCxnSpPr>
-          <p:cNvPr id="9" name="Connector 8"/>
-          <p:cNvCxnSpPr/>
-          <p:nvPr/>
-        </p:nvCxnSpPr>
-        <p:spPr>
-          <a:xfrm>
-            <a:off x="457200" y="667512"/>
-            <a:ext cx="11277295" cy="0"/>
-          </a:xfrm>
-          <a:prstGeom prst="line">
-            <a:avLst/>
-          </a:prstGeom>
-          <a:ln w="9525">
-            <a:solidFill>
-              <a:srgbClr val="C8963E"/>
-            </a:solidFill>
-          </a:ln>
-        </p:spPr>
-        <p:style>
-          <a:lnRef idx="2">
-            <a:schemeClr val="accent1"/>
-          </a:lnRef>
-          <a:fillRef idx="0">
-            <a:schemeClr val="accent1"/>
-          </a:fillRef>
-          <a:effectRef idx="1">
-            <a:schemeClr val="accent1"/>
-          </a:effectRef>
-          <a:fontRef idx="minor">
-            <a:schemeClr val="tx1"/>
-          </a:fontRef>
-        </p:style>
-      </p:cxnSp>
-      <p:sp>
-        <p:nvSpPr>
-          <p:cNvPr id="10" name="TextBox 9"/>
+      <p:sp>
+        <p:nvSpPr>
+          <p:cNvPr id="9" name="TextBox 8"/>
           <p:cNvSpPr txBox="1"/>
           <p:nvPr/>
         </p:nvSpPr>
         <p:spPr>
           <a:xfrm>
-            <a:off x="640080" y="2560320"/>
-            <a:ext cx="9144000" cy="1280160"/>
+            <a:off x="960120" y="4526280"/>
+            <a:ext cx="9144000" cy="457200"/>
           </a:xfrm>
           <a:prstGeom prst="rect">
             <a:avLst/>
@@ -5223,62 +4691,27 @@
           <a:p>
             <a:pPr algn="l"/>
             <a:r>
-              <a:rPr sz="6000" b="1" i="0">
+              <a:rPr sz="2000" b="0" i="1">
                 <a:solidFill>
-                  <a:srgbClr val="2B1F12"/>
+                  <a:srgbClr val="707070"/>
                 </a:solidFill>
-                <a:latin typeface="Georgia"/>
+                <a:latin typeface="Calibri"/>
               </a:rPr>
-              <a:t>Thank you</a:t>
-            </a:r>
-          </a:p>
-        </p:txBody>
-      </p:sp>
-      <p:cxnSp>
-        <p:nvCxnSpPr>
-          <p:cNvPr id="11" name="Connector 10"/>
-          <p:cNvCxnSpPr/>
-          <p:nvPr/>
-        </p:nvCxnSpPr>
-        <p:spPr>
-          <a:xfrm>
-            <a:off x="640080" y="3931920"/>
-            <a:ext cx="1645920" cy="0"/>
-          </a:xfrm>
-          <a:prstGeom prst="line">
-            <a:avLst/>
-          </a:prstGeom>
-          <a:ln w="19050">
-            <a:solidFill>
-              <a:srgbClr val="C8963E"/>
-            </a:solidFill>
-          </a:ln>
-        </p:spPr>
-        <p:style>
-          <a:lnRef idx="2">
-            <a:schemeClr val="accent1"/>
-          </a:lnRef>
-          <a:fillRef idx="0">
-            <a:schemeClr val="accent1"/>
-          </a:fillRef>
-          <a:effectRef idx="1">
-            <a:schemeClr val="accent1"/>
-          </a:effectRef>
-          <a:fontRef idx="minor">
-            <a:schemeClr val="tx1"/>
-          </a:fontRef>
-        </p:style>
-      </p:cxnSp>
-      <p:sp>
-        <p:nvSpPr>
-          <p:cNvPr id="12" name="TextBox 11"/>
+              <a:t>Questions &amp; discussion</a:t>
+            </a:r>
+          </a:p>
+        </p:txBody>
+      </p:sp>
+      <p:sp>
+        <p:nvSpPr>
+          <p:cNvPr id="10" name="TextBox 9"/>
           <p:cNvSpPr txBox="1"/>
           <p:nvPr/>
         </p:nvSpPr>
         <p:spPr>
           <a:xfrm>
-            <a:off x="640080" y="4114800"/>
-            <a:ext cx="9144000" cy="457200"/>
+            <a:off x="960120" y="5257800"/>
+            <a:ext cx="9144000" cy="365760"/>
           </a:xfrm>
           <a:prstGeom prst="rect">
             <a:avLst/>
@@ -5293,44 +4726,9 @@
           <a:p>
             <a:pPr algn="l"/>
             <a:r>
-              <a:rPr sz="2200" b="0" i="1">
-                <a:solidFill>
-                  <a:srgbClr val="6E5A3C"/>
-                </a:solidFill>
-                <a:latin typeface="Georgia"/>
-              </a:rPr>
-              <a:t>Questions &amp; discussion</a:t>
-            </a:r>
-          </a:p>
-        </p:txBody>
-      </p:sp>
-      <p:sp>
-        <p:nvSpPr>
-          <p:cNvPr id="13" name="TextBox 12"/>
-          <p:cNvSpPr txBox="1"/>
-          <p:nvPr/>
-        </p:nvSpPr>
-        <p:spPr>
-          <a:xfrm>
-            <a:off x="640080" y="4937760"/>
-            <a:ext cx="9144000" cy="365760"/>
-          </a:xfrm>
-          <a:prstGeom prst="rect">
-            <a:avLst/>
-          </a:prstGeom>
-          <a:noFill/>
-        </p:spPr>
-        <p:txBody>
-          <a:bodyPr wrap="square" lIns="0" rIns="0" tIns="0" bIns="0" anchor="t">
-            <a:spAutoFit/>
-          </a:bodyPr>
-          <a:lstStyle/>
-          <a:p>
-            <a:pPr algn="l"/>
-            <a:r>
               <a:rPr sz="1400" b="0" i="0">
                 <a:solidFill>
-                  <a:srgbClr val="2B1F12"/>
+                  <a:srgbClr val="1F1F1F"/>
                 </a:solidFill>
                 <a:latin typeface="Calibri"/>
               </a:rPr>

--- a/templates/tree_yellow_texture/KCLNLP_TreeYellow.pptx
+++ b/templates/tree_yellow_texture/KCLNLP_TreeYellow.pptx
@@ -3092,9 +3092,52 @@
         <p:nvPr/>
       </p:nvGrpSpPr>
       <p:grpSpPr/>
+      <p:sp>
+        <p:nvSpPr>
+          <p:cNvPr id="2" name="Rectangle 1"/>
+          <p:cNvSpPr/>
+          <p:nvPr/>
+        </p:nvSpPr>
+        <p:spPr>
+          <a:xfrm>
+            <a:off x="0" y="0"/>
+            <a:ext cx="12191695" cy="777240"/>
+          </a:xfrm>
+          <a:prstGeom prst="rect">
+            <a:avLst/>
+          </a:prstGeom>
+          <a:solidFill>
+            <a:srgbClr val="F2E6CC"/>
+          </a:solidFill>
+          <a:ln>
+            <a:noFill/>
+          </a:ln>
+        </p:spPr>
+        <p:style>
+          <a:lnRef idx="1">
+            <a:schemeClr val="accent1"/>
+          </a:lnRef>
+          <a:fillRef idx="3">
+            <a:schemeClr val="accent1"/>
+          </a:fillRef>
+          <a:effectRef idx="2">
+            <a:schemeClr val="accent1"/>
+          </a:effectRef>
+          <a:fontRef idx="minor">
+            <a:schemeClr val="lt1"/>
+          </a:fontRef>
+        </p:style>
+        <p:txBody>
+          <a:bodyPr rtlCol="0" anchor="ctr"/>
+          <a:lstStyle/>
+          <a:p>
+            <a:pPr algn="ctr"/>
+          </a:p>
+        </p:txBody>
+      </p:sp>
       <p:pic>
         <p:nvPicPr>
-          <p:cNvPr id="2" name="Picture 1" descr="KCL.png"/>
+          <p:cNvPr id="3" name="Picture 2" descr="KCL.png"/>
           <p:cNvPicPr>
             <a:picLocks noChangeAspect="1"/>
           </p:cNvPicPr>
@@ -3108,8 +3151,8 @@
         </p:blipFill>
         <p:spPr>
           <a:xfrm>
-            <a:off x="9111763" y="201168"/>
-            <a:ext cx="831046" cy="411480"/>
+            <a:off x="8619356" y="137160"/>
+            <a:ext cx="1015723" cy="502920"/>
           </a:xfrm>
           <a:prstGeom prst="rect">
             <a:avLst/>
@@ -3118,7 +3161,7 @@
       </p:pic>
       <p:pic>
         <p:nvPicPr>
-          <p:cNvPr id="3" name="Picture 2" descr="KCLNLP.png"/>
+          <p:cNvPr id="4" name="Picture 3" descr="KCLNLP.png"/>
           <p:cNvPicPr>
             <a:picLocks noChangeAspect="1"/>
           </p:cNvPicPr>
@@ -3132,8 +3175,8 @@
         </p:blipFill>
         <p:spPr>
           <a:xfrm>
-            <a:off x="10125688" y="201168"/>
-            <a:ext cx="452782" cy="411480"/>
+            <a:off x="9836246" y="137160"/>
+            <a:ext cx="553400" cy="502920"/>
           </a:xfrm>
           <a:prstGeom prst="rect">
             <a:avLst/>
@@ -3142,7 +3185,7 @@
       </p:pic>
       <p:pic>
         <p:nvPicPr>
-          <p:cNvPr id="4" name="Picture 3" descr="Alan.png"/>
+          <p:cNvPr id="5" name="Picture 4" descr="Alan.png"/>
           <p:cNvPicPr>
             <a:picLocks noChangeAspect="1"/>
           </p:cNvPicPr>
@@ -3156,8 +3199,8 @@
         </p:blipFill>
         <p:spPr>
           <a:xfrm>
-            <a:off x="10761349" y="201168"/>
-            <a:ext cx="973146" cy="411480"/>
+            <a:off x="10590814" y="137160"/>
+            <a:ext cx="1189401" cy="502920"/>
           </a:xfrm>
           <a:prstGeom prst="rect">
             <a:avLst/>
@@ -3166,21 +3209,21 @@
       </p:pic>
       <p:cxnSp>
         <p:nvCxnSpPr>
-          <p:cNvPr id="5" name="Connector 4"/>
+          <p:cNvPr id="6" name="Connector 5"/>
           <p:cNvCxnSpPr/>
           <p:nvPr/>
         </p:nvCxnSpPr>
         <p:spPr>
           <a:xfrm>
-            <a:off x="457200" y="777240"/>
-            <a:ext cx="11277295" cy="0"/>
+            <a:off x="0" y="777240"/>
+            <a:ext cx="12191695" cy="0"/>
           </a:xfrm>
           <a:prstGeom prst="line">
             <a:avLst/>
           </a:prstGeom>
-          <a:ln w="9525">
+          <a:ln w="19050">
             <a:solidFill>
-              <a:srgbClr val="C8963E"/>
+              <a:srgbClr val="D94A1C"/>
             </a:solidFill>
           </a:ln>
         </p:spPr>
@@ -3201,20 +3244,20 @@
       </p:cxnSp>
       <p:sp>
         <p:nvSpPr>
-          <p:cNvPr id="6" name="Rectangle 5"/>
+          <p:cNvPr id="7" name="Rectangle 6"/>
           <p:cNvSpPr/>
           <p:nvPr/>
         </p:nvSpPr>
         <p:spPr>
           <a:xfrm>
-            <a:off x="640080" y="2468880"/>
+            <a:off x="594360" y="2468880"/>
             <a:ext cx="109728" cy="1280160"/>
           </a:xfrm>
           <a:prstGeom prst="rect">
             <a:avLst/>
           </a:prstGeom>
           <a:solidFill>
-            <a:srgbClr val="C8963E"/>
+            <a:srgbClr val="D94A1C"/>
           </a:solidFill>
           <a:ln>
             <a:noFill/>
@@ -3244,13 +3287,13 @@
       </p:sp>
       <p:sp>
         <p:nvSpPr>
-          <p:cNvPr id="7" name="TextBox 6"/>
+          <p:cNvPr id="8" name="TextBox 7"/>
           <p:cNvSpPr txBox="1"/>
           <p:nvPr/>
         </p:nvSpPr>
         <p:spPr>
           <a:xfrm>
-            <a:off x="960120" y="2377440"/>
+            <a:off x="914400" y="2377440"/>
             <a:ext cx="10058400" cy="1463040"/>
           </a:xfrm>
           <a:prstGeom prst="rect">
@@ -3279,13 +3322,13 @@
       </p:sp>
       <p:sp>
         <p:nvSpPr>
-          <p:cNvPr id="8" name="TextBox 7"/>
+          <p:cNvPr id="9" name="TextBox 8"/>
           <p:cNvSpPr txBox="1"/>
           <p:nvPr/>
         </p:nvSpPr>
         <p:spPr>
           <a:xfrm>
-            <a:off x="960120" y="3749040"/>
+            <a:off x="914400" y="3749040"/>
             <a:ext cx="10058400" cy="548640"/>
           </a:xfrm>
           <a:prstGeom prst="rect">
@@ -3314,13 +3357,13 @@
       </p:sp>
       <p:cxnSp>
         <p:nvCxnSpPr>
-          <p:cNvPr id="9" name="Connector 8"/>
+          <p:cNvPr id="10" name="Connector 9"/>
           <p:cNvCxnSpPr/>
           <p:nvPr/>
         </p:nvCxnSpPr>
         <p:spPr>
           <a:xfrm>
-            <a:off x="960120" y="4480560"/>
+            <a:off x="914400" y="4480560"/>
             <a:ext cx="1691640" cy="0"/>
           </a:xfrm>
           <a:prstGeom prst="line">
@@ -3328,7 +3371,7 @@
           </a:prstGeom>
           <a:ln w="19050">
             <a:solidFill>
-              <a:srgbClr val="C8963E"/>
+              <a:srgbClr val="D94A1C"/>
             </a:solidFill>
           </a:ln>
         </p:spPr>
@@ -3349,13 +3392,13 @@
       </p:cxnSp>
       <p:sp>
         <p:nvSpPr>
-          <p:cNvPr id="10" name="TextBox 9"/>
+          <p:cNvPr id="11" name="TextBox 10"/>
           <p:cNvSpPr txBox="1"/>
           <p:nvPr/>
         </p:nvSpPr>
         <p:spPr>
           <a:xfrm>
-            <a:off x="960120" y="4617720"/>
+            <a:off x="914400" y="4617720"/>
             <a:ext cx="10058400" cy="365760"/>
           </a:xfrm>
           <a:prstGeom prst="rect">
@@ -3400,9 +3443,52 @@
         <p:nvPr/>
       </p:nvGrpSpPr>
       <p:grpSpPr/>
+      <p:sp>
+        <p:nvSpPr>
+          <p:cNvPr id="2" name="Rectangle 1"/>
+          <p:cNvSpPr/>
+          <p:nvPr/>
+        </p:nvSpPr>
+        <p:spPr>
+          <a:xfrm>
+            <a:off x="0" y="0"/>
+            <a:ext cx="12191695" cy="777240"/>
+          </a:xfrm>
+          <a:prstGeom prst="rect">
+            <a:avLst/>
+          </a:prstGeom>
+          <a:solidFill>
+            <a:srgbClr val="F2E6CC"/>
+          </a:solidFill>
+          <a:ln>
+            <a:noFill/>
+          </a:ln>
+        </p:spPr>
+        <p:style>
+          <a:lnRef idx="1">
+            <a:schemeClr val="accent1"/>
+          </a:lnRef>
+          <a:fillRef idx="3">
+            <a:schemeClr val="accent1"/>
+          </a:fillRef>
+          <a:effectRef idx="2">
+            <a:schemeClr val="accent1"/>
+          </a:effectRef>
+          <a:fontRef idx="minor">
+            <a:schemeClr val="lt1"/>
+          </a:fontRef>
+        </p:style>
+        <p:txBody>
+          <a:bodyPr rtlCol="0" anchor="ctr"/>
+          <a:lstStyle/>
+          <a:p>
+            <a:pPr algn="ctr"/>
+          </a:p>
+        </p:txBody>
+      </p:sp>
       <p:pic>
         <p:nvPicPr>
-          <p:cNvPr id="2" name="Picture 1" descr="KCL.png"/>
+          <p:cNvPr id="3" name="Picture 2" descr="KCL.png"/>
           <p:cNvPicPr>
             <a:picLocks noChangeAspect="1"/>
           </p:cNvPicPr>
@@ -3416,8 +3502,8 @@
         </p:blipFill>
         <p:spPr>
           <a:xfrm>
-            <a:off x="9111763" y="201168"/>
-            <a:ext cx="831046" cy="411480"/>
+            <a:off x="8619356" y="137160"/>
+            <a:ext cx="1015723" cy="502920"/>
           </a:xfrm>
           <a:prstGeom prst="rect">
             <a:avLst/>
@@ -3426,7 +3512,7 @@
       </p:pic>
       <p:pic>
         <p:nvPicPr>
-          <p:cNvPr id="3" name="Picture 2" descr="KCLNLP.png"/>
+          <p:cNvPr id="4" name="Picture 3" descr="KCLNLP.png"/>
           <p:cNvPicPr>
             <a:picLocks noChangeAspect="1"/>
           </p:cNvPicPr>
@@ -3440,8 +3526,8 @@
         </p:blipFill>
         <p:spPr>
           <a:xfrm>
-            <a:off x="10125688" y="201168"/>
-            <a:ext cx="452782" cy="411480"/>
+            <a:off x="9836246" y="137160"/>
+            <a:ext cx="553400" cy="502920"/>
           </a:xfrm>
           <a:prstGeom prst="rect">
             <a:avLst/>
@@ -3450,7 +3536,7 @@
       </p:pic>
       <p:pic>
         <p:nvPicPr>
-          <p:cNvPr id="4" name="Picture 3" descr="Alan.png"/>
+          <p:cNvPr id="5" name="Picture 4" descr="Alan.png"/>
           <p:cNvPicPr>
             <a:picLocks noChangeAspect="1"/>
           </p:cNvPicPr>
@@ -3464,31 +3550,75 @@
         </p:blipFill>
         <p:spPr>
           <a:xfrm>
-            <a:off x="10761349" y="201168"/>
-            <a:ext cx="973146" cy="411480"/>
+            <a:off x="10590814" y="137160"/>
+            <a:ext cx="1189401" cy="502920"/>
           </a:xfrm>
           <a:prstGeom prst="rect">
             <a:avLst/>
           </a:prstGeom>
         </p:spPr>
       </p:pic>
+      <p:sp>
+        <p:nvSpPr>
+          <p:cNvPr id="6" name="TextBox 5"/>
+          <p:cNvSpPr txBox="1"/>
+          <p:nvPr/>
+        </p:nvSpPr>
+        <p:spPr>
+          <a:xfrm>
+            <a:off x="411480" y="0"/>
+            <a:ext cx="7315200" cy="777240"/>
+          </a:xfrm>
+          <a:prstGeom prst="rect">
+            <a:avLst/>
+          </a:prstGeom>
+          <a:noFill/>
+        </p:spPr>
+        <p:txBody>
+          <a:bodyPr wrap="square" lIns="0" rIns="0" tIns="0" bIns="0" anchor="ctr">
+            <a:spAutoFit/>
+          </a:bodyPr>
+          <a:lstStyle/>
+          <a:p>
+            <a:pPr algn="l"/>
+            <a:r>
+              <a:rPr sz="1600" b="1" i="1">
+                <a:solidFill>
+                  <a:srgbClr val="D94A1C"/>
+                </a:solidFill>
+                <a:latin typeface="Calibri"/>
+              </a:rPr>
+              <a:t>Now: </a:t>
+            </a:r>
+            <a:r>
+              <a:rPr sz="1600" i="1">
+                <a:solidFill>
+                  <a:srgbClr val="1F1F1F"/>
+                </a:solidFill>
+                <a:latin typeface="Calibri"/>
+              </a:rPr>
+              <a:t>Motivation</a:t>
+            </a:r>
+          </a:p>
+        </p:txBody>
+      </p:sp>
       <p:cxnSp>
         <p:nvCxnSpPr>
-          <p:cNvPr id="5" name="Connector 4"/>
+          <p:cNvPr id="7" name="Connector 6"/>
           <p:cNvCxnSpPr/>
           <p:nvPr/>
         </p:nvCxnSpPr>
         <p:spPr>
           <a:xfrm>
-            <a:off x="457200" y="777240"/>
-            <a:ext cx="11277295" cy="0"/>
+            <a:off x="0" y="777240"/>
+            <a:ext cx="12191695" cy="0"/>
           </a:xfrm>
           <a:prstGeom prst="line">
             <a:avLst/>
           </a:prstGeom>
-          <a:ln w="9525">
+          <a:ln w="19050">
             <a:solidFill>
-              <a:srgbClr val="C8963E"/>
+              <a:srgbClr val="D94A1C"/>
             </a:solidFill>
           </a:ln>
         </p:spPr>
@@ -3509,13 +3639,13 @@
       </p:cxnSp>
       <p:sp>
         <p:nvSpPr>
-          <p:cNvPr id="6" name="TextBox 5"/>
+          <p:cNvPr id="8" name="TextBox 7"/>
           <p:cNvSpPr txBox="1"/>
           <p:nvPr/>
         </p:nvSpPr>
         <p:spPr>
           <a:xfrm>
-            <a:off x="914400" y="2743200"/>
+            <a:off x="868680" y="2743200"/>
             <a:ext cx="1645920" cy="1097280"/>
           </a:xfrm>
           <a:prstGeom prst="rect">
@@ -3533,7 +3663,7 @@
             <a:r>
               <a:rPr sz="5600" b="1" i="0">
                 <a:solidFill>
-                  <a:srgbClr val="C8963E"/>
+                  <a:srgbClr val="D94A1C"/>
                 </a:solidFill>
                 <a:latin typeface="Calibri"/>
               </a:rPr>
@@ -3544,13 +3674,13 @@
       </p:sp>
       <p:cxnSp>
         <p:nvCxnSpPr>
-          <p:cNvPr id="7" name="Connector 6"/>
+          <p:cNvPr id="9" name="Connector 8"/>
           <p:cNvCxnSpPr/>
           <p:nvPr/>
         </p:nvCxnSpPr>
         <p:spPr>
           <a:xfrm>
-            <a:off x="2651760" y="2971800"/>
+            <a:off x="2606040" y="2971800"/>
             <a:ext cx="0" cy="822960"/>
           </a:xfrm>
           <a:prstGeom prst="line">
@@ -3558,7 +3688,7 @@
           </a:prstGeom>
           <a:ln w="12700">
             <a:solidFill>
-              <a:srgbClr val="C8963E"/>
+              <a:srgbClr val="D94A1C"/>
             </a:solidFill>
           </a:ln>
         </p:spPr>
@@ -3579,13 +3709,13 @@
       </p:cxnSp>
       <p:sp>
         <p:nvSpPr>
-          <p:cNvPr id="8" name="TextBox 7"/>
+          <p:cNvPr id="10" name="TextBox 9"/>
           <p:cNvSpPr txBox="1"/>
           <p:nvPr/>
         </p:nvSpPr>
         <p:spPr>
           <a:xfrm>
-            <a:off x="2926080" y="2926080"/>
+            <a:off x="2880360" y="2926080"/>
             <a:ext cx="7315200" cy="914400"/>
           </a:xfrm>
           <a:prstGeom prst="rect">
@@ -3614,13 +3744,13 @@
       </p:sp>
       <p:sp>
         <p:nvSpPr>
-          <p:cNvPr id="9" name="TextBox 8"/>
+          <p:cNvPr id="11" name="TextBox 10"/>
           <p:cNvSpPr txBox="1"/>
           <p:nvPr/>
         </p:nvSpPr>
         <p:spPr>
           <a:xfrm>
-            <a:off x="2926080" y="3703320"/>
+            <a:off x="2880360" y="3703320"/>
             <a:ext cx="7315200" cy="365760"/>
           </a:xfrm>
           <a:prstGeom prst="rect">
@@ -3665,9 +3795,52 @@
         <p:nvPr/>
       </p:nvGrpSpPr>
       <p:grpSpPr/>
+      <p:sp>
+        <p:nvSpPr>
+          <p:cNvPr id="2" name="Rectangle 1"/>
+          <p:cNvSpPr/>
+          <p:nvPr/>
+        </p:nvSpPr>
+        <p:spPr>
+          <a:xfrm>
+            <a:off x="0" y="0"/>
+            <a:ext cx="12191695" cy="777240"/>
+          </a:xfrm>
+          <a:prstGeom prst="rect">
+            <a:avLst/>
+          </a:prstGeom>
+          <a:solidFill>
+            <a:srgbClr val="F2E6CC"/>
+          </a:solidFill>
+          <a:ln>
+            <a:noFill/>
+          </a:ln>
+        </p:spPr>
+        <p:style>
+          <a:lnRef idx="1">
+            <a:schemeClr val="accent1"/>
+          </a:lnRef>
+          <a:fillRef idx="3">
+            <a:schemeClr val="accent1"/>
+          </a:fillRef>
+          <a:effectRef idx="2">
+            <a:schemeClr val="accent1"/>
+          </a:effectRef>
+          <a:fontRef idx="minor">
+            <a:schemeClr val="lt1"/>
+          </a:fontRef>
+        </p:style>
+        <p:txBody>
+          <a:bodyPr rtlCol="0" anchor="ctr"/>
+          <a:lstStyle/>
+          <a:p>
+            <a:pPr algn="ctr"/>
+          </a:p>
+        </p:txBody>
+      </p:sp>
       <p:pic>
         <p:nvPicPr>
-          <p:cNvPr id="2" name="Picture 1" descr="KCL.png"/>
+          <p:cNvPr id="3" name="Picture 2" descr="KCL.png"/>
           <p:cNvPicPr>
             <a:picLocks noChangeAspect="1"/>
           </p:cNvPicPr>
@@ -3681,8 +3854,8 @@
         </p:blipFill>
         <p:spPr>
           <a:xfrm>
-            <a:off x="9111763" y="201168"/>
-            <a:ext cx="831046" cy="411480"/>
+            <a:off x="8619356" y="137160"/>
+            <a:ext cx="1015723" cy="502920"/>
           </a:xfrm>
           <a:prstGeom prst="rect">
             <a:avLst/>
@@ -3691,7 +3864,7 @@
       </p:pic>
       <p:pic>
         <p:nvPicPr>
-          <p:cNvPr id="3" name="Picture 2" descr="KCLNLP.png"/>
+          <p:cNvPr id="4" name="Picture 3" descr="KCLNLP.png"/>
           <p:cNvPicPr>
             <a:picLocks noChangeAspect="1"/>
           </p:cNvPicPr>
@@ -3705,8 +3878,8 @@
         </p:blipFill>
         <p:spPr>
           <a:xfrm>
-            <a:off x="10125688" y="201168"/>
-            <a:ext cx="452782" cy="411480"/>
+            <a:off x="9836246" y="137160"/>
+            <a:ext cx="553400" cy="502920"/>
           </a:xfrm>
           <a:prstGeom prst="rect">
             <a:avLst/>
@@ -3715,7 +3888,7 @@
       </p:pic>
       <p:pic>
         <p:nvPicPr>
-          <p:cNvPr id="4" name="Picture 3" descr="Alan.png"/>
+          <p:cNvPr id="5" name="Picture 4" descr="Alan.png"/>
           <p:cNvPicPr>
             <a:picLocks noChangeAspect="1"/>
           </p:cNvPicPr>
@@ -3729,31 +3902,75 @@
         </p:blipFill>
         <p:spPr>
           <a:xfrm>
-            <a:off x="10761349" y="201168"/>
-            <a:ext cx="973146" cy="411480"/>
+            <a:off x="10590814" y="137160"/>
+            <a:ext cx="1189401" cy="502920"/>
           </a:xfrm>
           <a:prstGeom prst="rect">
             <a:avLst/>
           </a:prstGeom>
         </p:spPr>
       </p:pic>
+      <p:sp>
+        <p:nvSpPr>
+          <p:cNvPr id="6" name="TextBox 5"/>
+          <p:cNvSpPr txBox="1"/>
+          <p:nvPr/>
+        </p:nvSpPr>
+        <p:spPr>
+          <a:xfrm>
+            <a:off x="411480" y="0"/>
+            <a:ext cx="7315200" cy="777240"/>
+          </a:xfrm>
+          <a:prstGeom prst="rect">
+            <a:avLst/>
+          </a:prstGeom>
+          <a:noFill/>
+        </p:spPr>
+        <p:txBody>
+          <a:bodyPr wrap="square" lIns="0" rIns="0" tIns="0" bIns="0" anchor="ctr">
+            <a:spAutoFit/>
+          </a:bodyPr>
+          <a:lstStyle/>
+          <a:p>
+            <a:pPr algn="l"/>
+            <a:r>
+              <a:rPr sz="1600" b="1" i="1">
+                <a:solidFill>
+                  <a:srgbClr val="D94A1C"/>
+                </a:solidFill>
+                <a:latin typeface="Calibri"/>
+              </a:rPr>
+              <a:t>Now: </a:t>
+            </a:r>
+            <a:r>
+              <a:rPr sz="1600" i="1">
+                <a:solidFill>
+                  <a:srgbClr val="1F1F1F"/>
+                </a:solidFill>
+                <a:latin typeface="Calibri"/>
+              </a:rPr>
+              <a:t>Motivation</a:t>
+            </a:r>
+          </a:p>
+        </p:txBody>
+      </p:sp>
       <p:cxnSp>
         <p:nvCxnSpPr>
-          <p:cNvPr id="5" name="Connector 4"/>
+          <p:cNvPr id="7" name="Connector 6"/>
           <p:cNvCxnSpPr/>
           <p:nvPr/>
         </p:nvCxnSpPr>
         <p:spPr>
           <a:xfrm>
-            <a:off x="457200" y="777240"/>
-            <a:ext cx="11277295" cy="0"/>
+            <a:off x="0" y="777240"/>
+            <a:ext cx="12191695" cy="0"/>
           </a:xfrm>
           <a:prstGeom prst="line">
             <a:avLst/>
           </a:prstGeom>
-          <a:ln w="9525">
+          <a:ln w="19050">
             <a:solidFill>
-              <a:srgbClr val="C8963E"/>
+              <a:srgbClr val="D94A1C"/>
             </a:solidFill>
           </a:ln>
         </p:spPr>
@@ -3774,20 +3991,20 @@
       </p:cxnSp>
       <p:sp>
         <p:nvSpPr>
-          <p:cNvPr id="6" name="Rectangle 5"/>
+          <p:cNvPr id="8" name="Rectangle 7"/>
           <p:cNvSpPr/>
           <p:nvPr/>
         </p:nvSpPr>
         <p:spPr>
           <a:xfrm>
-            <a:off x="548640" y="1078992"/>
+            <a:off x="502920" y="1261872"/>
             <a:ext cx="109728" cy="640080"/>
           </a:xfrm>
           <a:prstGeom prst="rect">
             <a:avLst/>
           </a:prstGeom>
           <a:solidFill>
-            <a:srgbClr val="C8963E"/>
+            <a:srgbClr val="D94A1C"/>
           </a:solidFill>
           <a:ln>
             <a:noFill/>
@@ -3817,13 +4034,13 @@
       </p:sp>
       <p:sp>
         <p:nvSpPr>
-          <p:cNvPr id="7" name="TextBox 6"/>
+          <p:cNvPr id="9" name="TextBox 8"/>
           <p:cNvSpPr txBox="1"/>
           <p:nvPr/>
         </p:nvSpPr>
         <p:spPr>
           <a:xfrm>
-            <a:off x="822960" y="1005840"/>
+            <a:off x="777240" y="1188720"/>
             <a:ext cx="10058400" cy="822960"/>
           </a:xfrm>
           <a:prstGeom prst="rect">
@@ -3850,51 +4067,16 @@
           </a:p>
         </p:txBody>
       </p:sp>
-      <p:cxnSp>
-        <p:nvCxnSpPr>
-          <p:cNvPr id="8" name="Connector 7"/>
-          <p:cNvCxnSpPr/>
-          <p:nvPr/>
-        </p:nvCxnSpPr>
-        <p:spPr>
-          <a:xfrm>
-            <a:off x="822960" y="1874520"/>
-            <a:ext cx="10911535" cy="0"/>
-          </a:xfrm>
-          <a:prstGeom prst="line">
-            <a:avLst/>
-          </a:prstGeom>
-          <a:ln w="6350">
-            <a:solidFill>
-              <a:srgbClr val="C8963E"/>
-            </a:solidFill>
-          </a:ln>
-        </p:spPr>
-        <p:style>
-          <a:lnRef idx="2">
-            <a:schemeClr val="accent1"/>
-          </a:lnRef>
-          <a:fillRef idx="0">
-            <a:schemeClr val="accent1"/>
-          </a:fillRef>
-          <a:effectRef idx="1">
-            <a:schemeClr val="accent1"/>
-          </a:effectRef>
-          <a:fontRef idx="minor">
-            <a:schemeClr val="tx1"/>
-          </a:fontRef>
-        </p:style>
-      </p:cxnSp>
-      <p:sp>
-        <p:nvSpPr>
-          <p:cNvPr id="9" name="TextBox 8"/>
+      <p:sp>
+        <p:nvSpPr>
+          <p:cNvPr id="10" name="TextBox 9"/>
           <p:cNvSpPr txBox="1"/>
           <p:nvPr/>
         </p:nvSpPr>
         <p:spPr>
           <a:xfrm>
-            <a:off x="822960" y="2148840"/>
-            <a:ext cx="10972800" cy="4206240"/>
+            <a:off x="777240" y="2194560"/>
+            <a:ext cx="10972800" cy="4023360"/>
           </a:xfrm>
           <a:prstGeom prst="rect">
             <a:avLst/>
@@ -3974,13 +4156,13 @@
       </p:sp>
       <p:sp>
         <p:nvSpPr>
-          <p:cNvPr id="10" name="TextBox 9"/>
+          <p:cNvPr id="11" name="TextBox 10"/>
           <p:cNvSpPr txBox="1"/>
           <p:nvPr/>
         </p:nvSpPr>
         <p:spPr>
           <a:xfrm>
-            <a:off x="822960" y="6492240"/>
+            <a:off x="777240" y="6492240"/>
             <a:ext cx="10972800" cy="274320"/>
           </a:xfrm>
           <a:prstGeom prst="rect">
@@ -4025,9 +4207,52 @@
         <p:nvPr/>
       </p:nvGrpSpPr>
       <p:grpSpPr/>
+      <p:sp>
+        <p:nvSpPr>
+          <p:cNvPr id="2" name="Rectangle 1"/>
+          <p:cNvSpPr/>
+          <p:nvPr/>
+        </p:nvSpPr>
+        <p:spPr>
+          <a:xfrm>
+            <a:off x="0" y="0"/>
+            <a:ext cx="12191695" cy="777240"/>
+          </a:xfrm>
+          <a:prstGeom prst="rect">
+            <a:avLst/>
+          </a:prstGeom>
+          <a:solidFill>
+            <a:srgbClr val="F2E6CC"/>
+          </a:solidFill>
+          <a:ln>
+            <a:noFill/>
+          </a:ln>
+        </p:spPr>
+        <p:style>
+          <a:lnRef idx="1">
+            <a:schemeClr val="accent1"/>
+          </a:lnRef>
+          <a:fillRef idx="3">
+            <a:schemeClr val="accent1"/>
+          </a:fillRef>
+          <a:effectRef idx="2">
+            <a:schemeClr val="accent1"/>
+          </a:effectRef>
+          <a:fontRef idx="minor">
+            <a:schemeClr val="lt1"/>
+          </a:fontRef>
+        </p:style>
+        <p:txBody>
+          <a:bodyPr rtlCol="0" anchor="ctr"/>
+          <a:lstStyle/>
+          <a:p>
+            <a:pPr algn="ctr"/>
+          </a:p>
+        </p:txBody>
+      </p:sp>
       <p:pic>
         <p:nvPicPr>
-          <p:cNvPr id="2" name="Picture 1" descr="KCL.png"/>
+          <p:cNvPr id="3" name="Picture 2" descr="KCL.png"/>
           <p:cNvPicPr>
             <a:picLocks noChangeAspect="1"/>
           </p:cNvPicPr>
@@ -4041,8 +4266,8 @@
         </p:blipFill>
         <p:spPr>
           <a:xfrm>
-            <a:off x="9111763" y="201168"/>
-            <a:ext cx="831046" cy="411480"/>
+            <a:off x="8619356" y="137160"/>
+            <a:ext cx="1015723" cy="502920"/>
           </a:xfrm>
           <a:prstGeom prst="rect">
             <a:avLst/>
@@ -4051,7 +4276,7 @@
       </p:pic>
       <p:pic>
         <p:nvPicPr>
-          <p:cNvPr id="3" name="Picture 2" descr="KCLNLP.png"/>
+          <p:cNvPr id="4" name="Picture 3" descr="KCLNLP.png"/>
           <p:cNvPicPr>
             <a:picLocks noChangeAspect="1"/>
           </p:cNvPicPr>
@@ -4065,8 +4290,8 @@
         </p:blipFill>
         <p:spPr>
           <a:xfrm>
-            <a:off x="10125688" y="201168"/>
-            <a:ext cx="452782" cy="411480"/>
+            <a:off x="9836246" y="137160"/>
+            <a:ext cx="553400" cy="502920"/>
           </a:xfrm>
           <a:prstGeom prst="rect">
             <a:avLst/>
@@ -4075,7 +4300,7 @@
       </p:pic>
       <p:pic>
         <p:nvPicPr>
-          <p:cNvPr id="4" name="Picture 3" descr="Alan.png"/>
+          <p:cNvPr id="5" name="Picture 4" descr="Alan.png"/>
           <p:cNvPicPr>
             <a:picLocks noChangeAspect="1"/>
           </p:cNvPicPr>
@@ -4089,31 +4314,75 @@
         </p:blipFill>
         <p:spPr>
           <a:xfrm>
-            <a:off x="10761349" y="201168"/>
-            <a:ext cx="973146" cy="411480"/>
+            <a:off x="10590814" y="137160"/>
+            <a:ext cx="1189401" cy="502920"/>
           </a:xfrm>
           <a:prstGeom prst="rect">
             <a:avLst/>
           </a:prstGeom>
         </p:spPr>
       </p:pic>
+      <p:sp>
+        <p:nvSpPr>
+          <p:cNvPr id="6" name="TextBox 5"/>
+          <p:cNvSpPr txBox="1"/>
+          <p:nvPr/>
+        </p:nvSpPr>
+        <p:spPr>
+          <a:xfrm>
+            <a:off x="411480" y="0"/>
+            <a:ext cx="7315200" cy="777240"/>
+          </a:xfrm>
+          <a:prstGeom prst="rect">
+            <a:avLst/>
+          </a:prstGeom>
+          <a:noFill/>
+        </p:spPr>
+        <p:txBody>
+          <a:bodyPr wrap="square" lIns="0" rIns="0" tIns="0" bIns="0" anchor="ctr">
+            <a:spAutoFit/>
+          </a:bodyPr>
+          <a:lstStyle/>
+          <a:p>
+            <a:pPr algn="l"/>
+            <a:r>
+              <a:rPr sz="1600" b="1" i="1">
+                <a:solidFill>
+                  <a:srgbClr val="D94A1C"/>
+                </a:solidFill>
+                <a:latin typeface="Calibri"/>
+              </a:rPr>
+              <a:t>Now: </a:t>
+            </a:r>
+            <a:r>
+              <a:rPr sz="1600" i="1">
+                <a:solidFill>
+                  <a:srgbClr val="1F1F1F"/>
+                </a:solidFill>
+                <a:latin typeface="Calibri"/>
+              </a:rPr>
+              <a:t>Motivation</a:t>
+            </a:r>
+          </a:p>
+        </p:txBody>
+      </p:sp>
       <p:cxnSp>
         <p:nvCxnSpPr>
-          <p:cNvPr id="5" name="Connector 4"/>
+          <p:cNvPr id="7" name="Connector 6"/>
           <p:cNvCxnSpPr/>
           <p:nvPr/>
         </p:nvCxnSpPr>
         <p:spPr>
           <a:xfrm>
-            <a:off x="457200" y="777240"/>
-            <a:ext cx="11277295" cy="0"/>
+            <a:off x="0" y="777240"/>
+            <a:ext cx="12191695" cy="0"/>
           </a:xfrm>
           <a:prstGeom prst="line">
             <a:avLst/>
           </a:prstGeom>
-          <a:ln w="9525">
+          <a:ln w="19050">
             <a:solidFill>
-              <a:srgbClr val="C8963E"/>
+              <a:srgbClr val="D94A1C"/>
             </a:solidFill>
           </a:ln>
         </p:spPr>
@@ -4134,20 +4403,20 @@
       </p:cxnSp>
       <p:sp>
         <p:nvSpPr>
-          <p:cNvPr id="6" name="Rectangle 5"/>
+          <p:cNvPr id="8" name="Rectangle 7"/>
           <p:cNvSpPr/>
           <p:nvPr/>
         </p:nvSpPr>
         <p:spPr>
           <a:xfrm>
-            <a:off x="548640" y="1078992"/>
+            <a:off x="502920" y="1261872"/>
             <a:ext cx="109728" cy="640080"/>
           </a:xfrm>
           <a:prstGeom prst="rect">
             <a:avLst/>
           </a:prstGeom>
           <a:solidFill>
-            <a:srgbClr val="C8963E"/>
+            <a:srgbClr val="D94A1C"/>
           </a:solidFill>
           <a:ln>
             <a:noFill/>
@@ -4177,13 +4446,13 @@
       </p:sp>
       <p:sp>
         <p:nvSpPr>
-          <p:cNvPr id="7" name="TextBox 6"/>
+          <p:cNvPr id="9" name="TextBox 8"/>
           <p:cNvSpPr txBox="1"/>
           <p:nvPr/>
         </p:nvSpPr>
         <p:spPr>
           <a:xfrm>
-            <a:off x="822960" y="1005840"/>
+            <a:off x="777240" y="1188720"/>
             <a:ext cx="10058400" cy="822960"/>
           </a:xfrm>
           <a:prstGeom prst="rect">
@@ -4210,51 +4479,16 @@
           </a:p>
         </p:txBody>
       </p:sp>
-      <p:cxnSp>
-        <p:nvCxnSpPr>
-          <p:cNvPr id="8" name="Connector 7"/>
-          <p:cNvCxnSpPr/>
-          <p:nvPr/>
-        </p:nvCxnSpPr>
-        <p:spPr>
-          <a:xfrm>
-            <a:off x="822960" y="1874520"/>
-            <a:ext cx="10911535" cy="0"/>
-          </a:xfrm>
-          <a:prstGeom prst="line">
-            <a:avLst/>
-          </a:prstGeom>
-          <a:ln w="6350">
-            <a:solidFill>
-              <a:srgbClr val="C8963E"/>
-            </a:solidFill>
-          </a:ln>
-        </p:spPr>
-        <p:style>
-          <a:lnRef idx="2">
-            <a:schemeClr val="accent1"/>
-          </a:lnRef>
-          <a:fillRef idx="0">
-            <a:schemeClr val="accent1"/>
-          </a:fillRef>
-          <a:effectRef idx="1">
-            <a:schemeClr val="accent1"/>
-          </a:effectRef>
-          <a:fontRef idx="minor">
-            <a:schemeClr val="tx1"/>
-          </a:fontRef>
-        </p:style>
-      </p:cxnSp>
-      <p:sp>
-        <p:nvSpPr>
-          <p:cNvPr id="9" name="Rectangle 8"/>
+      <p:sp>
+        <p:nvSpPr>
+          <p:cNvPr id="10" name="Rectangle 9"/>
           <p:cNvSpPr/>
           <p:nvPr/>
         </p:nvSpPr>
         <p:spPr>
           <a:xfrm>
-            <a:off x="822960" y="2148840"/>
-            <a:ext cx="5303520" cy="4114800"/>
+            <a:off x="777240" y="2194560"/>
+            <a:ext cx="5303520" cy="3931920"/>
           </a:xfrm>
           <a:prstGeom prst="rect">
             <a:avLst/>
@@ -4290,14 +4524,14 @@
       </p:sp>
       <p:sp>
         <p:nvSpPr>
-          <p:cNvPr id="10" name="TextBox 9"/>
+          <p:cNvPr id="11" name="TextBox 10"/>
           <p:cNvSpPr txBox="1"/>
           <p:nvPr/>
         </p:nvSpPr>
         <p:spPr>
           <a:xfrm>
-            <a:off x="822960" y="2148840"/>
-            <a:ext cx="5303520" cy="4114800"/>
+            <a:off x="777240" y="2194560"/>
+            <a:ext cx="5303520" cy="3931920"/>
           </a:xfrm>
           <a:prstGeom prst="rect">
             <a:avLst/>
@@ -4325,14 +4559,14 @@
       </p:sp>
       <p:sp>
         <p:nvSpPr>
-          <p:cNvPr id="11" name="TextBox 10"/>
+          <p:cNvPr id="12" name="TextBox 11"/>
           <p:cNvSpPr txBox="1"/>
           <p:nvPr/>
         </p:nvSpPr>
         <p:spPr>
           <a:xfrm>
-            <a:off x="6583680" y="2148840"/>
-            <a:ext cx="5150815" cy="457200"/>
+            <a:off x="6537960" y="2194560"/>
+            <a:ext cx="5242255" cy="457200"/>
           </a:xfrm>
           <a:prstGeom prst="rect">
             <a:avLst/>
@@ -4360,14 +4594,14 @@
       </p:sp>
       <p:sp>
         <p:nvSpPr>
-          <p:cNvPr id="12" name="TextBox 11"/>
+          <p:cNvPr id="13" name="TextBox 12"/>
           <p:cNvSpPr txBox="1"/>
           <p:nvPr/>
         </p:nvSpPr>
         <p:spPr>
           <a:xfrm>
-            <a:off x="6583680" y="2788920"/>
-            <a:ext cx="5150815" cy="3474720"/>
+            <a:off x="6537960" y="2834640"/>
+            <a:ext cx="5242255" cy="3291840"/>
           </a:xfrm>
           <a:prstGeom prst="rect">
             <a:avLst/>
@@ -4447,9 +4681,52 @@
         <p:nvPr/>
       </p:nvGrpSpPr>
       <p:grpSpPr/>
+      <p:sp>
+        <p:nvSpPr>
+          <p:cNvPr id="2" name="Rectangle 1"/>
+          <p:cNvSpPr/>
+          <p:nvPr/>
+        </p:nvSpPr>
+        <p:spPr>
+          <a:xfrm>
+            <a:off x="0" y="0"/>
+            <a:ext cx="12191695" cy="777240"/>
+          </a:xfrm>
+          <a:prstGeom prst="rect">
+            <a:avLst/>
+          </a:prstGeom>
+          <a:solidFill>
+            <a:srgbClr val="F2E6CC"/>
+          </a:solidFill>
+          <a:ln>
+            <a:noFill/>
+          </a:ln>
+        </p:spPr>
+        <p:style>
+          <a:lnRef idx="1">
+            <a:schemeClr val="accent1"/>
+          </a:lnRef>
+          <a:fillRef idx="3">
+            <a:schemeClr val="accent1"/>
+          </a:fillRef>
+          <a:effectRef idx="2">
+            <a:schemeClr val="accent1"/>
+          </a:effectRef>
+          <a:fontRef idx="minor">
+            <a:schemeClr val="lt1"/>
+          </a:fontRef>
+        </p:style>
+        <p:txBody>
+          <a:bodyPr rtlCol="0" anchor="ctr"/>
+          <a:lstStyle/>
+          <a:p>
+            <a:pPr algn="ctr"/>
+          </a:p>
+        </p:txBody>
+      </p:sp>
       <p:pic>
         <p:nvPicPr>
-          <p:cNvPr id="2" name="Picture 1" descr="KCL.png"/>
+          <p:cNvPr id="3" name="Picture 2" descr="KCL.png"/>
           <p:cNvPicPr>
             <a:picLocks noChangeAspect="1"/>
           </p:cNvPicPr>
@@ -4463,8 +4740,8 @@
         </p:blipFill>
         <p:spPr>
           <a:xfrm>
-            <a:off x="9111763" y="201168"/>
-            <a:ext cx="831046" cy="411480"/>
+            <a:off x="8619356" y="137160"/>
+            <a:ext cx="1015723" cy="502920"/>
           </a:xfrm>
           <a:prstGeom prst="rect">
             <a:avLst/>
@@ -4473,7 +4750,7 @@
       </p:pic>
       <p:pic>
         <p:nvPicPr>
-          <p:cNvPr id="3" name="Picture 2" descr="KCLNLP.png"/>
+          <p:cNvPr id="4" name="Picture 3" descr="KCLNLP.png"/>
           <p:cNvPicPr>
             <a:picLocks noChangeAspect="1"/>
           </p:cNvPicPr>
@@ -4487,8 +4764,8 @@
         </p:blipFill>
         <p:spPr>
           <a:xfrm>
-            <a:off x="10125688" y="201168"/>
-            <a:ext cx="452782" cy="411480"/>
+            <a:off x="9836246" y="137160"/>
+            <a:ext cx="553400" cy="502920"/>
           </a:xfrm>
           <a:prstGeom prst="rect">
             <a:avLst/>
@@ -4497,7 +4774,7 @@
       </p:pic>
       <p:pic>
         <p:nvPicPr>
-          <p:cNvPr id="4" name="Picture 3" descr="Alan.png"/>
+          <p:cNvPr id="5" name="Picture 4" descr="Alan.png"/>
           <p:cNvPicPr>
             <a:picLocks noChangeAspect="1"/>
           </p:cNvPicPr>
@@ -4511,8 +4788,8 @@
         </p:blipFill>
         <p:spPr>
           <a:xfrm>
-            <a:off x="10761349" y="201168"/>
-            <a:ext cx="973146" cy="411480"/>
+            <a:off x="10590814" y="137160"/>
+            <a:ext cx="1189401" cy="502920"/>
           </a:xfrm>
           <a:prstGeom prst="rect">
             <a:avLst/>
@@ -4521,21 +4798,21 @@
       </p:pic>
       <p:cxnSp>
         <p:nvCxnSpPr>
-          <p:cNvPr id="5" name="Connector 4"/>
+          <p:cNvPr id="6" name="Connector 5"/>
           <p:cNvCxnSpPr/>
           <p:nvPr/>
         </p:nvCxnSpPr>
         <p:spPr>
           <a:xfrm>
-            <a:off x="457200" y="777240"/>
-            <a:ext cx="11277295" cy="0"/>
+            <a:off x="0" y="777240"/>
+            <a:ext cx="12191695" cy="0"/>
           </a:xfrm>
           <a:prstGeom prst="line">
             <a:avLst/>
           </a:prstGeom>
-          <a:ln w="9525">
+          <a:ln w="19050">
             <a:solidFill>
-              <a:srgbClr val="C8963E"/>
+              <a:srgbClr val="D94A1C"/>
             </a:solidFill>
           </a:ln>
         </p:spPr>
@@ -4556,20 +4833,20 @@
       </p:cxnSp>
       <p:sp>
         <p:nvSpPr>
-          <p:cNvPr id="6" name="Rectangle 5"/>
+          <p:cNvPr id="7" name="Rectangle 6"/>
           <p:cNvSpPr/>
           <p:nvPr/>
         </p:nvSpPr>
         <p:spPr>
           <a:xfrm>
-            <a:off x="640080" y="2880360"/>
+            <a:off x="594360" y="2880360"/>
             <a:ext cx="109728" cy="1463040"/>
           </a:xfrm>
           <a:prstGeom prst="rect">
             <a:avLst/>
           </a:prstGeom>
           <a:solidFill>
-            <a:srgbClr val="C8963E"/>
+            <a:srgbClr val="D94A1C"/>
           </a:solidFill>
           <a:ln>
             <a:noFill/>
@@ -4599,13 +4876,13 @@
       </p:sp>
       <p:sp>
         <p:nvSpPr>
-          <p:cNvPr id="7" name="TextBox 6"/>
+          <p:cNvPr id="8" name="TextBox 7"/>
           <p:cNvSpPr txBox="1"/>
           <p:nvPr/>
         </p:nvSpPr>
         <p:spPr>
           <a:xfrm>
-            <a:off x="960120" y="2743200"/>
+            <a:off x="914400" y="2743200"/>
             <a:ext cx="9144000" cy="1463040"/>
           </a:xfrm>
           <a:prstGeom prst="rect">
@@ -4634,13 +4911,13 @@
       </p:sp>
       <p:cxnSp>
         <p:nvCxnSpPr>
-          <p:cNvPr id="8" name="Connector 7"/>
+          <p:cNvPr id="9" name="Connector 8"/>
           <p:cNvCxnSpPr/>
           <p:nvPr/>
         </p:nvCxnSpPr>
         <p:spPr>
           <a:xfrm>
-            <a:off x="960120" y="4343400"/>
+            <a:off x="914400" y="4343400"/>
             <a:ext cx="1691640" cy="0"/>
           </a:xfrm>
           <a:prstGeom prst="line">
@@ -4648,7 +4925,7 @@
           </a:prstGeom>
           <a:ln w="19050">
             <a:solidFill>
-              <a:srgbClr val="C8963E"/>
+              <a:srgbClr val="D94A1C"/>
             </a:solidFill>
           </a:ln>
         </p:spPr>
@@ -4669,13 +4946,13 @@
       </p:cxnSp>
       <p:sp>
         <p:nvSpPr>
-          <p:cNvPr id="9" name="TextBox 8"/>
+          <p:cNvPr id="10" name="TextBox 9"/>
           <p:cNvSpPr txBox="1"/>
           <p:nvPr/>
         </p:nvSpPr>
         <p:spPr>
           <a:xfrm>
-            <a:off x="960120" y="4526280"/>
+            <a:off x="914400" y="4526280"/>
             <a:ext cx="9144000" cy="457200"/>
           </a:xfrm>
           <a:prstGeom prst="rect">
@@ -4704,13 +4981,13 @@
       </p:sp>
       <p:sp>
         <p:nvSpPr>
-          <p:cNvPr id="10" name="TextBox 9"/>
+          <p:cNvPr id="11" name="TextBox 10"/>
           <p:cNvSpPr txBox="1"/>
           <p:nvPr/>
         </p:nvSpPr>
         <p:spPr>
           <a:xfrm>
-            <a:off x="960120" y="5257800"/>
+            <a:off x="914400" y="5257800"/>
             <a:ext cx="9144000" cy="365760"/>
           </a:xfrm>
           <a:prstGeom prst="rect">

--- a/templates/tree_yellow_texture/KCLNLP_TreeYellow.pptx
+++ b/templates/tree_yellow_texture/KCLNLP_TreeYellow.pptx
@@ -3101,7 +3101,7 @@
         <p:spPr>
           <a:xfrm>
             <a:off x="0" y="0"/>
-            <a:ext cx="12191695" cy="777240"/>
+            <a:ext cx="12191695" cy="960120"/>
           </a:xfrm>
           <a:prstGeom prst="rect">
             <a:avLst/>
@@ -3151,8 +3151,8 @@
         </p:blipFill>
         <p:spPr>
           <a:xfrm>
-            <a:off x="8619356" y="137160"/>
-            <a:ext cx="1015723" cy="502920"/>
+            <a:off x="8368581" y="205740"/>
+            <a:ext cx="1108061" cy="548640"/>
           </a:xfrm>
           <a:prstGeom prst="rect">
             <a:avLst/>
@@ -3175,8 +3175,8 @@
         </p:blipFill>
         <p:spPr>
           <a:xfrm>
-            <a:off x="9836246" y="137160"/>
-            <a:ext cx="553400" cy="502920"/>
+            <a:off x="9677810" y="205740"/>
+            <a:ext cx="603709" cy="548640"/>
           </a:xfrm>
           <a:prstGeom prst="rect">
             <a:avLst/>
@@ -3199,8 +3199,8 @@
         </p:blipFill>
         <p:spPr>
           <a:xfrm>
-            <a:off x="10590814" y="137160"/>
-            <a:ext cx="1189401" cy="502920"/>
+            <a:off x="10482687" y="205740"/>
+            <a:ext cx="1297528" cy="548640"/>
           </a:xfrm>
           <a:prstGeom prst="rect">
             <a:avLst/>
@@ -3215,7 +3215,7 @@
         </p:nvCxnSpPr>
         <p:spPr>
           <a:xfrm>
-            <a:off x="0" y="777240"/>
+            <a:off x="0" y="960120"/>
             <a:ext cx="12191695" cy="0"/>
           </a:xfrm>
           <a:prstGeom prst="line">
@@ -3250,7 +3250,7 @@
         </p:nvSpPr>
         <p:spPr>
           <a:xfrm>
-            <a:off x="594360" y="2468880"/>
+            <a:off x="594360" y="2560320"/>
             <a:ext cx="109728" cy="1280160"/>
           </a:xfrm>
           <a:prstGeom prst="rect">
@@ -3293,7 +3293,7 @@
         </p:nvSpPr>
         <p:spPr>
           <a:xfrm>
-            <a:off x="914400" y="2377440"/>
+            <a:off x="914400" y="2468880"/>
             <a:ext cx="10058400" cy="1463040"/>
           </a:xfrm>
           <a:prstGeom prst="rect">
@@ -3309,11 +3309,11 @@
           <a:p>
             <a:pPr algn="l"/>
             <a:r>
-              <a:rPr sz="4000" b="1" i="0">
+              <a:rPr sz="4400" b="1" i="0">
                 <a:solidFill>
                   <a:srgbClr val="1F1F1F"/>
                 </a:solidFill>
-                <a:latin typeface="Calibri"/>
+                <a:latin typeface="Georgia"/>
               </a:rPr>
               <a:t>Talk Title Goes Here</a:t>
             </a:r>
@@ -3328,7 +3328,7 @@
         </p:nvSpPr>
         <p:spPr>
           <a:xfrm>
-            <a:off x="914400" y="3749040"/>
+            <a:off x="914400" y="3840480"/>
             <a:ext cx="10058400" cy="548640"/>
           </a:xfrm>
           <a:prstGeom prst="rect">
@@ -3344,11 +3344,11 @@
           <a:p>
             <a:pPr algn="l"/>
             <a:r>
-              <a:rPr sz="1800" b="0" i="1">
+              <a:rPr sz="2000" b="0" i="1">
                 <a:solidFill>
                   <a:srgbClr val="707070"/>
                 </a:solidFill>
-                <a:latin typeface="Calibri"/>
+                <a:latin typeface="Cambria"/>
               </a:rPr>
               <a:t>A concise subtitle or one-line abstract</a:t>
             </a:r>
@@ -3363,7 +3363,7 @@
         </p:nvCxnSpPr>
         <p:spPr>
           <a:xfrm>
-            <a:off x="914400" y="4480560"/>
+            <a:off x="914400" y="4572000"/>
             <a:ext cx="1691640" cy="0"/>
           </a:xfrm>
           <a:prstGeom prst="line">
@@ -3398,7 +3398,7 @@
         </p:nvSpPr>
         <p:spPr>
           <a:xfrm>
-            <a:off x="914400" y="4617720"/>
+            <a:off x="914400" y="4709160"/>
             <a:ext cx="10058400" cy="365760"/>
           </a:xfrm>
           <a:prstGeom prst="rect">
@@ -3418,7 +3418,7 @@
                 <a:solidFill>
                   <a:srgbClr val="1F1F1F"/>
                 </a:solidFill>
-                <a:latin typeface="Calibri"/>
+                <a:latin typeface="Cambria"/>
               </a:rPr>
               <a:t>Speaker Name  ·  Affiliation  ·  Month Year</a:t>
             </a:r>
@@ -3452,7 +3452,7 @@
         <p:spPr>
           <a:xfrm>
             <a:off x="0" y="0"/>
-            <a:ext cx="12191695" cy="777240"/>
+            <a:ext cx="12191695" cy="960120"/>
           </a:xfrm>
           <a:prstGeom prst="rect">
             <a:avLst/>
@@ -3502,8 +3502,8 @@
         </p:blipFill>
         <p:spPr>
           <a:xfrm>
-            <a:off x="8619356" y="137160"/>
-            <a:ext cx="1015723" cy="502920"/>
+            <a:off x="8368581" y="205740"/>
+            <a:ext cx="1108061" cy="548640"/>
           </a:xfrm>
           <a:prstGeom prst="rect">
             <a:avLst/>
@@ -3526,8 +3526,8 @@
         </p:blipFill>
         <p:spPr>
           <a:xfrm>
-            <a:off x="9836246" y="137160"/>
-            <a:ext cx="553400" cy="502920"/>
+            <a:off x="9677810" y="205740"/>
+            <a:ext cx="603709" cy="548640"/>
           </a:xfrm>
           <a:prstGeom prst="rect">
             <a:avLst/>
@@ -3550,8 +3550,8 @@
         </p:blipFill>
         <p:spPr>
           <a:xfrm>
-            <a:off x="10590814" y="137160"/>
-            <a:ext cx="1189401" cy="502920"/>
+            <a:off x="10482687" y="205740"/>
+            <a:ext cx="1297528" cy="548640"/>
           </a:xfrm>
           <a:prstGeom prst="rect">
             <a:avLst/>
@@ -3567,7 +3567,7 @@
         <p:spPr>
           <a:xfrm>
             <a:off x="411480" y="0"/>
-            <a:ext cx="7315200" cy="777240"/>
+            <a:ext cx="7682781" cy="960120"/>
           </a:xfrm>
           <a:prstGeom prst="rect">
             <a:avLst/>
@@ -3586,16 +3586,16 @@
                 <a:solidFill>
                   <a:srgbClr val="D94A1C"/>
                 </a:solidFill>
-                <a:latin typeface="Calibri"/>
+                <a:latin typeface="Georgia"/>
               </a:rPr>
-              <a:t>Now: </a:t>
-            </a:r>
-            <a:r>
-              <a:rPr sz="1600" i="1">
+              <a:t>Now:  </a:t>
+            </a:r>
+            <a:r>
+              <a:rPr sz="2600" b="1">
                 <a:solidFill>
                   <a:srgbClr val="1F1F1F"/>
                 </a:solidFill>
-                <a:latin typeface="Calibri"/>
+                <a:latin typeface="Georgia"/>
               </a:rPr>
               <a:t>Motivation</a:t>
             </a:r>
@@ -3610,7 +3610,7 @@
         </p:nvCxnSpPr>
         <p:spPr>
           <a:xfrm>
-            <a:off x="0" y="777240"/>
+            <a:off x="0" y="960120"/>
             <a:ext cx="12191695" cy="0"/>
           </a:xfrm>
           <a:prstGeom prst="line">
@@ -3645,7 +3645,7 @@
         </p:nvSpPr>
         <p:spPr>
           <a:xfrm>
-            <a:off x="868680" y="2743200"/>
+            <a:off x="868680" y="2926080"/>
             <a:ext cx="1645920" cy="1097280"/>
           </a:xfrm>
           <a:prstGeom prst="rect">
@@ -3665,7 +3665,7 @@
                 <a:solidFill>
                   <a:srgbClr val="D94A1C"/>
                 </a:solidFill>
-                <a:latin typeface="Calibri"/>
+                <a:latin typeface="Georgia"/>
               </a:rPr>
               <a:t>01</a:t>
             </a:r>
@@ -3680,7 +3680,7 @@
         </p:nvCxnSpPr>
         <p:spPr>
           <a:xfrm>
-            <a:off x="2606040" y="2971800"/>
+            <a:off x="2606040" y="3154680"/>
             <a:ext cx="0" cy="822960"/>
           </a:xfrm>
           <a:prstGeom prst="line">
@@ -3715,7 +3715,7 @@
         </p:nvSpPr>
         <p:spPr>
           <a:xfrm>
-            <a:off x="2880360" y="2926080"/>
+            <a:off x="2880360" y="3108960"/>
             <a:ext cx="7315200" cy="914400"/>
           </a:xfrm>
           <a:prstGeom prst="rect">
@@ -3731,11 +3731,11 @@
           <a:p>
             <a:pPr algn="l"/>
             <a:r>
-              <a:rPr sz="3400" b="1" i="0">
+              <a:rPr sz="3600" b="1" i="0">
                 <a:solidFill>
                   <a:srgbClr val="1F1F1F"/>
                 </a:solidFill>
-                <a:latin typeface="Calibri"/>
+                <a:latin typeface="Georgia"/>
               </a:rPr>
               <a:t>Motivation</a:t>
             </a:r>
@@ -3750,7 +3750,7 @@
         </p:nvSpPr>
         <p:spPr>
           <a:xfrm>
-            <a:off x="2880360" y="3703320"/>
+            <a:off x="2880360" y="3886200"/>
             <a:ext cx="7315200" cy="365760"/>
           </a:xfrm>
           <a:prstGeom prst="rect">
@@ -3770,7 +3770,7 @@
                 <a:solidFill>
                   <a:srgbClr val="707070"/>
                 </a:solidFill>
-                <a:latin typeface="Calibri"/>
+                <a:latin typeface="Cambria"/>
               </a:rPr>
               <a:t>An optional one-line summary of this section</a:t>
             </a:r>
@@ -3804,7 +3804,7 @@
         <p:spPr>
           <a:xfrm>
             <a:off x="0" y="0"/>
-            <a:ext cx="12191695" cy="777240"/>
+            <a:ext cx="12191695" cy="960120"/>
           </a:xfrm>
           <a:prstGeom prst="rect">
             <a:avLst/>
@@ -3854,8 +3854,8 @@
         </p:blipFill>
         <p:spPr>
           <a:xfrm>
-            <a:off x="8619356" y="137160"/>
-            <a:ext cx="1015723" cy="502920"/>
+            <a:off x="8368581" y="205740"/>
+            <a:ext cx="1108061" cy="548640"/>
           </a:xfrm>
           <a:prstGeom prst="rect">
             <a:avLst/>
@@ -3878,8 +3878,8 @@
         </p:blipFill>
         <p:spPr>
           <a:xfrm>
-            <a:off x="9836246" y="137160"/>
-            <a:ext cx="553400" cy="502920"/>
+            <a:off x="9677810" y="205740"/>
+            <a:ext cx="603709" cy="548640"/>
           </a:xfrm>
           <a:prstGeom prst="rect">
             <a:avLst/>
@@ -3902,8 +3902,8 @@
         </p:blipFill>
         <p:spPr>
           <a:xfrm>
-            <a:off x="10590814" y="137160"/>
-            <a:ext cx="1189401" cy="502920"/>
+            <a:off x="10482687" y="205740"/>
+            <a:ext cx="1297528" cy="548640"/>
           </a:xfrm>
           <a:prstGeom prst="rect">
             <a:avLst/>
@@ -3919,7 +3919,7 @@
         <p:spPr>
           <a:xfrm>
             <a:off x="411480" y="0"/>
-            <a:ext cx="7315200" cy="777240"/>
+            <a:ext cx="7682781" cy="960120"/>
           </a:xfrm>
           <a:prstGeom prst="rect">
             <a:avLst/>
@@ -3938,18 +3938,18 @@
                 <a:solidFill>
                   <a:srgbClr val="D94A1C"/>
                 </a:solidFill>
-                <a:latin typeface="Calibri"/>
+                <a:latin typeface="Georgia"/>
               </a:rPr>
-              <a:t>Now: </a:t>
-            </a:r>
-            <a:r>
-              <a:rPr sz="1600" i="1">
+              <a:t>Now:  </a:t>
+            </a:r>
+            <a:r>
+              <a:rPr sz="2600" b="1">
                 <a:solidFill>
                   <a:srgbClr val="1F1F1F"/>
                 </a:solidFill>
-                <a:latin typeface="Calibri"/>
+                <a:latin typeface="Georgia"/>
               </a:rPr>
-              <a:t>Motivation</a:t>
+              <a:t>Why retrieval is hard</a:t>
             </a:r>
           </a:p>
         </p:txBody>
@@ -3962,7 +3962,7 @@
         </p:nvCxnSpPr>
         <p:spPr>
           <a:xfrm>
-            <a:off x="0" y="777240"/>
+            <a:off x="0" y="960120"/>
             <a:ext cx="12191695" cy="0"/>
           </a:xfrm>
           <a:prstGeom prst="line">
@@ -3991,57 +3991,14 @@
       </p:cxnSp>
       <p:sp>
         <p:nvSpPr>
-          <p:cNvPr id="8" name="Rectangle 7"/>
-          <p:cNvSpPr/>
-          <p:nvPr/>
-        </p:nvSpPr>
-        <p:spPr>
-          <a:xfrm>
-            <a:off x="502920" y="1261872"/>
-            <a:ext cx="109728" cy="640080"/>
-          </a:xfrm>
-          <a:prstGeom prst="rect">
-            <a:avLst/>
-          </a:prstGeom>
-          <a:solidFill>
-            <a:srgbClr val="D94A1C"/>
-          </a:solidFill>
-          <a:ln>
-            <a:noFill/>
-          </a:ln>
-        </p:spPr>
-        <p:style>
-          <a:lnRef idx="1">
-            <a:schemeClr val="accent1"/>
-          </a:lnRef>
-          <a:fillRef idx="3">
-            <a:schemeClr val="accent1"/>
-          </a:fillRef>
-          <a:effectRef idx="2">
-            <a:schemeClr val="accent1"/>
-          </a:effectRef>
-          <a:fontRef idx="minor">
-            <a:schemeClr val="lt1"/>
-          </a:fontRef>
-        </p:style>
-        <p:txBody>
-          <a:bodyPr rtlCol="0" anchor="ctr"/>
-          <a:lstStyle/>
-          <a:p>
-            <a:pPr algn="ctr"/>
-          </a:p>
-        </p:txBody>
-      </p:sp>
-      <p:sp>
-        <p:nvSpPr>
-          <p:cNvPr id="9" name="TextBox 8"/>
+          <p:cNvPr id="8" name="TextBox 7"/>
           <p:cNvSpPr txBox="1"/>
           <p:nvPr/>
         </p:nvSpPr>
         <p:spPr>
           <a:xfrm>
-            <a:off x="777240" y="1188720"/>
-            <a:ext cx="10058400" cy="822960"/>
+            <a:off x="594360" y="1280160"/>
+            <a:ext cx="11185855" cy="5074920"/>
           </a:xfrm>
           <a:prstGeom prst="rect">
             <a:avLst/>
@@ -4049,34 +4006,102 @@
           <a:noFill/>
         </p:spPr>
         <p:txBody>
-          <a:bodyPr wrap="square" lIns="0" rIns="0" tIns="0" bIns="0" anchor="t">
+          <a:bodyPr wrap="square" lIns="0" rIns="0" tIns="0" bIns="0">
             <a:spAutoFit/>
           </a:bodyPr>
           <a:lstStyle/>
           <a:p>
-            <a:pPr algn="l"/>
-            <a:r>
-              <a:rPr sz="2600" b="1" i="0">
+            <a:pPr algn="l">
+              <a:spcAft>
+                <a:spcPts val="1000"/>
+              </a:spcAft>
+            </a:pPr>
+            <a:r>
+              <a:rPr sz="2000">
                 <a:solidFill>
                   <a:srgbClr val="1F1F1F"/>
                 </a:solidFill>
-                <a:latin typeface="Calibri"/>
+                <a:latin typeface="Cambria"/>
               </a:rPr>
-              <a:t>Slide title</a:t>
-            </a:r>
-          </a:p>
-        </p:txBody>
-      </p:sp>
-      <p:sp>
-        <p:nvSpPr>
-          <p:cNvPr id="10" name="TextBox 9"/>
+              <a:t>•  Lead with the main claim — what the reader should take away</a:t>
+            </a:r>
+          </a:p>
+          <a:p>
+            <a:pPr algn="l">
+              <a:spcAft>
+                <a:spcPts val="1000"/>
+              </a:spcAft>
+            </a:pPr>
+            <a:r>
+              <a:rPr sz="2000">
+                <a:solidFill>
+                  <a:srgbClr val="1F1F1F"/>
+                </a:solidFill>
+                <a:latin typeface="Cambria"/>
+              </a:rPr>
+              <a:t>•  Supporting detail, ideally a number or concrete example</a:t>
+            </a:r>
+          </a:p>
+          <a:p>
+            <a:pPr algn="l">
+              <a:spcAft>
+                <a:spcPts val="1000"/>
+              </a:spcAft>
+            </a:pPr>
+            <a:r>
+              <a:rPr sz="2000">
+                <a:solidFill>
+                  <a:srgbClr val="1F1F1F"/>
+                </a:solidFill>
+                <a:latin typeface="Cambria"/>
+              </a:rPr>
+              <a:t>•  A second supporting point that extends the first</a:t>
+            </a:r>
+          </a:p>
+          <a:p>
+            <a:pPr algn="l">
+              <a:spcAft>
+                <a:spcPts val="1000"/>
+              </a:spcAft>
+            </a:pPr>
+            <a:r>
+              <a:rPr sz="2000">
+                <a:solidFill>
+                  <a:srgbClr val="1F1F1F"/>
+                </a:solidFill>
+                <a:latin typeface="Cambria"/>
+              </a:rPr>
+              <a:t>•  A fourth line of room — titles live in the header, so the body breathes</a:t>
+            </a:r>
+          </a:p>
+          <a:p>
+            <a:pPr algn="l">
+              <a:spcAft>
+                <a:spcPts val="1000"/>
+              </a:spcAft>
+            </a:pPr>
+            <a:r>
+              <a:rPr sz="2000">
+                <a:solidFill>
+                  <a:srgbClr val="1F1F1F"/>
+                </a:solidFill>
+                <a:latin typeface="Cambria"/>
+              </a:rPr>
+              <a:t>•  Edge case, caveat, or the one thing not to forget</a:t>
+            </a:r>
+          </a:p>
+        </p:txBody>
+      </p:sp>
+      <p:sp>
+        <p:nvSpPr>
+          <p:cNvPr id="9" name="TextBox 8"/>
           <p:cNvSpPr txBox="1"/>
           <p:nvPr/>
         </p:nvSpPr>
         <p:spPr>
           <a:xfrm>
-            <a:off x="777240" y="2194560"/>
-            <a:ext cx="10972800" cy="4023360"/>
+            <a:off x="594360" y="6492240"/>
+            <a:ext cx="11185855" cy="274320"/>
           </a:xfrm>
           <a:prstGeom prst="rect">
             <a:avLst/>
@@ -4084,93 +4109,6 @@
           <a:noFill/>
         </p:spPr>
         <p:txBody>
-          <a:bodyPr wrap="square" lIns="0" rIns="0" tIns="0" bIns="0">
-            <a:spAutoFit/>
-          </a:bodyPr>
-          <a:lstStyle/>
-          <a:p>
-            <a:pPr algn="l">
-              <a:spcAft>
-                <a:spcPts val="800"/>
-              </a:spcAft>
-            </a:pPr>
-            <a:r>
-              <a:rPr sz="1800">
-                <a:solidFill>
-                  <a:srgbClr val="1F1F1F"/>
-                </a:solidFill>
-                <a:latin typeface="Calibri"/>
-              </a:rPr>
-              <a:t>•  Lead with the main claim — what the reader should take away</a:t>
-            </a:r>
-          </a:p>
-          <a:p>
-            <a:pPr algn="l">
-              <a:spcAft>
-                <a:spcPts val="800"/>
-              </a:spcAft>
-            </a:pPr>
-            <a:r>
-              <a:rPr sz="1800">
-                <a:solidFill>
-                  <a:srgbClr val="1F1F1F"/>
-                </a:solidFill>
-                <a:latin typeface="Calibri"/>
-              </a:rPr>
-              <a:t>•  Supporting detail, ideally a number or concrete example</a:t>
-            </a:r>
-          </a:p>
-          <a:p>
-            <a:pPr algn="l">
-              <a:spcAft>
-                <a:spcPts val="800"/>
-              </a:spcAft>
-            </a:pPr>
-            <a:r>
-              <a:rPr sz="1800">
-                <a:solidFill>
-                  <a:srgbClr val="1F1F1F"/>
-                </a:solidFill>
-                <a:latin typeface="Calibri"/>
-              </a:rPr>
-              <a:t>•  A second supporting point that extends the first</a:t>
-            </a:r>
-          </a:p>
-          <a:p>
-            <a:pPr algn="l">
-              <a:spcAft>
-                <a:spcPts val="800"/>
-              </a:spcAft>
-            </a:pPr>
-            <a:r>
-              <a:rPr sz="1800">
-                <a:solidFill>
-                  <a:srgbClr val="1F1F1F"/>
-                </a:solidFill>
-                <a:latin typeface="Calibri"/>
-              </a:rPr>
-              <a:t>•  Edge case, caveat, or the one thing not to forget</a:t>
-            </a:r>
-          </a:p>
-        </p:txBody>
-      </p:sp>
-      <p:sp>
-        <p:nvSpPr>
-          <p:cNvPr id="11" name="TextBox 10"/>
-          <p:cNvSpPr txBox="1"/>
-          <p:nvPr/>
-        </p:nvSpPr>
-        <p:spPr>
-          <a:xfrm>
-            <a:off x="777240" y="6492240"/>
-            <a:ext cx="10972800" cy="274320"/>
-          </a:xfrm>
-          <a:prstGeom prst="rect">
-            <a:avLst/>
-          </a:prstGeom>
-          <a:noFill/>
-        </p:spPr>
-        <p:txBody>
           <a:bodyPr wrap="square" lIns="0" rIns="0" tIns="0" bIns="0" anchor="t">
             <a:spAutoFit/>
           </a:bodyPr>
@@ -4182,7 +4120,7 @@
                 <a:solidFill>
                   <a:srgbClr val="707070"/>
                 </a:solidFill>
-                <a:latin typeface="Calibri"/>
+                <a:latin typeface="Cambria"/>
               </a:rPr>
               <a:t>Footer / citation / page note</a:t>
             </a:r>
@@ -4216,7 +4154,7 @@
         <p:spPr>
           <a:xfrm>
             <a:off x="0" y="0"/>
-            <a:ext cx="12191695" cy="777240"/>
+            <a:ext cx="12191695" cy="960120"/>
           </a:xfrm>
           <a:prstGeom prst="rect">
             <a:avLst/>
@@ -4266,8 +4204,8 @@
         </p:blipFill>
         <p:spPr>
           <a:xfrm>
-            <a:off x="8619356" y="137160"/>
-            <a:ext cx="1015723" cy="502920"/>
+            <a:off x="8368581" y="205740"/>
+            <a:ext cx="1108061" cy="548640"/>
           </a:xfrm>
           <a:prstGeom prst="rect">
             <a:avLst/>
@@ -4290,8 +4228,8 @@
         </p:blipFill>
         <p:spPr>
           <a:xfrm>
-            <a:off x="9836246" y="137160"/>
-            <a:ext cx="553400" cy="502920"/>
+            <a:off x="9677810" y="205740"/>
+            <a:ext cx="603709" cy="548640"/>
           </a:xfrm>
           <a:prstGeom prst="rect">
             <a:avLst/>
@@ -4314,8 +4252,8 @@
         </p:blipFill>
         <p:spPr>
           <a:xfrm>
-            <a:off x="10590814" y="137160"/>
-            <a:ext cx="1189401" cy="502920"/>
+            <a:off x="10482687" y="205740"/>
+            <a:ext cx="1297528" cy="548640"/>
           </a:xfrm>
           <a:prstGeom prst="rect">
             <a:avLst/>
@@ -4331,7 +4269,7 @@
         <p:spPr>
           <a:xfrm>
             <a:off x="411480" y="0"/>
-            <a:ext cx="7315200" cy="777240"/>
+            <a:ext cx="7682781" cy="960120"/>
           </a:xfrm>
           <a:prstGeom prst="rect">
             <a:avLst/>
@@ -4350,18 +4288,18 @@
                 <a:solidFill>
                   <a:srgbClr val="D94A1C"/>
                 </a:solidFill>
-                <a:latin typeface="Calibri"/>
+                <a:latin typeface="Georgia"/>
               </a:rPr>
-              <a:t>Now: </a:t>
-            </a:r>
-            <a:r>
-              <a:rPr sz="1600" i="1">
+              <a:t>Now:  </a:t>
+            </a:r>
+            <a:r>
+              <a:rPr sz="2600" b="1">
                 <a:solidFill>
                   <a:srgbClr val="1F1F1F"/>
                 </a:solidFill>
-                <a:latin typeface="Calibri"/>
+                <a:latin typeface="Georgia"/>
               </a:rPr>
-              <a:t>Motivation</a:t>
+              <a:t>Model architecture</a:t>
             </a:r>
           </a:p>
         </p:txBody>
@@ -4374,7 +4312,7 @@
         </p:nvCxnSpPr>
         <p:spPr>
           <a:xfrm>
-            <a:off x="0" y="777240"/>
+            <a:off x="0" y="960120"/>
             <a:ext cx="12191695" cy="0"/>
           </a:xfrm>
           <a:prstGeom prst="line">
@@ -4409,17 +4347,17 @@
         </p:nvSpPr>
         <p:spPr>
           <a:xfrm>
-            <a:off x="502920" y="1261872"/>
-            <a:ext cx="109728" cy="640080"/>
+            <a:off x="594360" y="1280160"/>
+            <a:ext cx="5486400" cy="5120640"/>
           </a:xfrm>
           <a:prstGeom prst="rect">
             <a:avLst/>
           </a:prstGeom>
-          <a:solidFill>
-            <a:srgbClr val="D94A1C"/>
-          </a:solidFill>
-          <a:ln>
-            <a:noFill/>
+          <a:noFill/>
+          <a:ln w="6350">
+            <a:solidFill>
+              <a:srgbClr val="707070"/>
+            </a:solidFill>
           </a:ln>
         </p:spPr>
         <p:style>
@@ -4452,8 +4390,8 @@
         </p:nvSpPr>
         <p:spPr>
           <a:xfrm>
-            <a:off x="777240" y="1188720"/>
-            <a:ext cx="10058400" cy="822960"/>
+            <a:off x="594360" y="1280160"/>
+            <a:ext cx="5486400" cy="5120640"/>
           </a:xfrm>
           <a:prstGeom prst="rect">
             <a:avLst/>
@@ -4461,64 +4399,56 @@
           <a:noFill/>
         </p:spPr>
         <p:txBody>
-          <a:bodyPr wrap="square" lIns="0" rIns="0" tIns="0" bIns="0" anchor="t">
+          <a:bodyPr wrap="square" lIns="0" rIns="0" tIns="0" bIns="0" anchor="ctr">
             <a:spAutoFit/>
           </a:bodyPr>
           <a:lstStyle/>
           <a:p>
-            <a:pPr algn="l"/>
-            <a:r>
-              <a:rPr sz="2600" b="1" i="0">
+            <a:pPr algn="ctr"/>
+            <a:r>
+              <a:rPr sz="1400" b="0" i="1">
                 <a:solidFill>
-                  <a:srgbClr val="1F1F1F"/>
+                  <a:srgbClr val="707070"/>
                 </a:solidFill>
-                <a:latin typeface="Calibri"/>
+                <a:latin typeface="Cambria"/>
               </a:rPr>
-              <a:t>Figure or image + text</a:t>
-            </a:r>
-          </a:p>
-        </p:txBody>
-      </p:sp>
-      <p:sp>
-        <p:nvSpPr>
-          <p:cNvPr id="10" name="Rectangle 9"/>
-          <p:cNvSpPr/>
+              <a:t>[ figure / diagram ]</a:t>
+            </a:r>
+          </a:p>
+        </p:txBody>
+      </p:sp>
+      <p:sp>
+        <p:nvSpPr>
+          <p:cNvPr id="10" name="TextBox 9"/>
+          <p:cNvSpPr txBox="1"/>
           <p:nvPr/>
         </p:nvSpPr>
         <p:spPr>
           <a:xfrm>
-            <a:off x="777240" y="2194560"/>
-            <a:ext cx="5303520" cy="3931920"/>
+            <a:off x="6537960" y="1280160"/>
+            <a:ext cx="5242255" cy="457200"/>
           </a:xfrm>
           <a:prstGeom prst="rect">
             <a:avLst/>
           </a:prstGeom>
           <a:noFill/>
-          <a:ln w="6350">
-            <a:solidFill>
-              <a:srgbClr val="707070"/>
-            </a:solidFill>
-          </a:ln>
-        </p:spPr>
-        <p:style>
-          <a:lnRef idx="1">
-            <a:schemeClr val="accent1"/>
-          </a:lnRef>
-          <a:fillRef idx="3">
-            <a:schemeClr val="accent1"/>
-          </a:fillRef>
-          <a:effectRef idx="2">
-            <a:schemeClr val="accent1"/>
-          </a:effectRef>
-          <a:fontRef idx="minor">
-            <a:schemeClr val="lt1"/>
-          </a:fontRef>
-        </p:style>
-        <p:txBody>
-          <a:bodyPr rtlCol="0" anchor="ctr"/>
-          <a:lstStyle/>
-          <a:p>
-            <a:pPr algn="ctr"/>
+        </p:spPr>
+        <p:txBody>
+          <a:bodyPr wrap="square" lIns="0" rIns="0" tIns="0" bIns="0" anchor="t">
+            <a:spAutoFit/>
+          </a:bodyPr>
+          <a:lstStyle/>
+          <a:p>
+            <a:pPr algn="l"/>
+            <a:r>
+              <a:rPr sz="2200" b="1" i="0">
+                <a:solidFill>
+                  <a:srgbClr val="1F1F1F"/>
+                </a:solidFill>
+                <a:latin typeface="Georgia"/>
+              </a:rPr>
+              <a:t>Caption or claim</a:t>
+            </a:r>
           </a:p>
         </p:txBody>
       </p:sp>
@@ -4530,8 +4460,8 @@
         </p:nvSpPr>
         <p:spPr>
           <a:xfrm>
-            <a:off x="777240" y="2194560"/>
-            <a:ext cx="5303520" cy="3931920"/>
+            <a:off x="6537960" y="2011680"/>
+            <a:ext cx="5242255" cy="4389120"/>
           </a:xfrm>
           <a:prstGeom prst="rect">
             <a:avLst/>
@@ -4539,124 +4469,54 @@
           <a:noFill/>
         </p:spPr>
         <p:txBody>
-          <a:bodyPr wrap="square" lIns="0" rIns="0" tIns="0" bIns="0" anchor="ctr">
+          <a:bodyPr wrap="square" lIns="0" rIns="0" tIns="0" bIns="0">
             <a:spAutoFit/>
           </a:bodyPr>
           <a:lstStyle/>
           <a:p>
-            <a:pPr algn="ctr"/>
-            <a:r>
-              <a:rPr sz="1400" b="0" i="1">
-                <a:solidFill>
-                  <a:srgbClr val="707070"/>
-                </a:solidFill>
-                <a:latin typeface="Calibri"/>
-              </a:rPr>
-              <a:t>[ figure / diagram ]</a:t>
-            </a:r>
-          </a:p>
-        </p:txBody>
-      </p:sp>
-      <p:sp>
-        <p:nvSpPr>
-          <p:cNvPr id="12" name="TextBox 11"/>
-          <p:cNvSpPr txBox="1"/>
-          <p:nvPr/>
-        </p:nvSpPr>
-        <p:spPr>
-          <a:xfrm>
-            <a:off x="6537960" y="2194560"/>
-            <a:ext cx="5242255" cy="457200"/>
-          </a:xfrm>
-          <a:prstGeom prst="rect">
-            <a:avLst/>
-          </a:prstGeom>
-          <a:noFill/>
-        </p:spPr>
-        <p:txBody>
-          <a:bodyPr wrap="square" lIns="0" rIns="0" tIns="0" bIns="0" anchor="t">
-            <a:spAutoFit/>
-          </a:bodyPr>
-          <a:lstStyle/>
-          <a:p>
-            <a:pPr algn="l"/>
-            <a:r>
-              <a:rPr sz="2000" b="1" i="0">
+            <a:pPr algn="l">
+              <a:spcAft>
+                <a:spcPts val="1000"/>
+              </a:spcAft>
+            </a:pPr>
+            <a:r>
+              <a:rPr sz="1700">
                 <a:solidFill>
                   <a:srgbClr val="1F1F1F"/>
                 </a:solidFill>
-                <a:latin typeface="Calibri"/>
+                <a:latin typeface="Cambria"/>
               </a:rPr>
-              <a:t>Caption or claim</a:t>
-            </a:r>
-          </a:p>
-        </p:txBody>
-      </p:sp>
-      <p:sp>
-        <p:nvSpPr>
-          <p:cNvPr id="13" name="TextBox 12"/>
-          <p:cNvSpPr txBox="1"/>
-          <p:nvPr/>
-        </p:nvSpPr>
-        <p:spPr>
-          <a:xfrm>
-            <a:off x="6537960" y="2834640"/>
-            <a:ext cx="5242255" cy="3291840"/>
-          </a:xfrm>
-          <a:prstGeom prst="rect">
-            <a:avLst/>
-          </a:prstGeom>
-          <a:noFill/>
-        </p:spPr>
-        <p:txBody>
-          <a:bodyPr wrap="square" lIns="0" rIns="0" tIns="0" bIns="0">
-            <a:spAutoFit/>
-          </a:bodyPr>
-          <a:lstStyle/>
+              <a:t>•  Explain what the figure shows</a:t>
+            </a:r>
+          </a:p>
           <a:p>
             <a:pPr algn="l">
               <a:spcAft>
-                <a:spcPts val="800"/>
+                <a:spcPts val="1000"/>
               </a:spcAft>
             </a:pPr>
             <a:r>
-              <a:rPr sz="1500">
+              <a:rPr sz="1700">
                 <a:solidFill>
                   <a:srgbClr val="1F1F1F"/>
                 </a:solidFill>
-                <a:latin typeface="Calibri"/>
+                <a:latin typeface="Cambria"/>
               </a:rPr>
-              <a:t>•  Explain what the figure shows</a:t>
+              <a:t>•  Call out the one feature worth noting</a:t>
             </a:r>
           </a:p>
           <a:p>
             <a:pPr algn="l">
               <a:spcAft>
-                <a:spcPts val="800"/>
+                <a:spcPts val="1000"/>
               </a:spcAft>
             </a:pPr>
             <a:r>
-              <a:rPr sz="1500">
+              <a:rPr sz="1700">
                 <a:solidFill>
                   <a:srgbClr val="1F1F1F"/>
                 </a:solidFill>
-                <a:latin typeface="Calibri"/>
-              </a:rPr>
-              <a:t>•  Call out the one feature worth noting</a:t>
-            </a:r>
-          </a:p>
-          <a:p>
-            <a:pPr algn="l">
-              <a:spcAft>
-                <a:spcPts val="800"/>
-              </a:spcAft>
-            </a:pPr>
-            <a:r>
-              <a:rPr sz="1500">
-                <a:solidFill>
-                  <a:srgbClr val="1F1F1F"/>
-                </a:solidFill>
-                <a:latin typeface="Calibri"/>
+                <a:latin typeface="Cambria"/>
               </a:rPr>
               <a:t>•  Relate it back to the slide's main point</a:t>
             </a:r>
@@ -4690,7 +4550,7 @@
         <p:spPr>
           <a:xfrm>
             <a:off x="0" y="0"/>
-            <a:ext cx="12191695" cy="777240"/>
+            <a:ext cx="12191695" cy="960120"/>
           </a:xfrm>
           <a:prstGeom prst="rect">
             <a:avLst/>
@@ -4740,8 +4600,8 @@
         </p:blipFill>
         <p:spPr>
           <a:xfrm>
-            <a:off x="8619356" y="137160"/>
-            <a:ext cx="1015723" cy="502920"/>
+            <a:off x="8368581" y="205740"/>
+            <a:ext cx="1108061" cy="548640"/>
           </a:xfrm>
           <a:prstGeom prst="rect">
             <a:avLst/>
@@ -4764,8 +4624,8 @@
         </p:blipFill>
         <p:spPr>
           <a:xfrm>
-            <a:off x="9836246" y="137160"/>
-            <a:ext cx="553400" cy="502920"/>
+            <a:off x="9677810" y="205740"/>
+            <a:ext cx="603709" cy="548640"/>
           </a:xfrm>
           <a:prstGeom prst="rect">
             <a:avLst/>
@@ -4788,8 +4648,8 @@
         </p:blipFill>
         <p:spPr>
           <a:xfrm>
-            <a:off x="10590814" y="137160"/>
-            <a:ext cx="1189401" cy="502920"/>
+            <a:off x="10482687" y="205740"/>
+            <a:ext cx="1297528" cy="548640"/>
           </a:xfrm>
           <a:prstGeom prst="rect">
             <a:avLst/>
@@ -4804,7 +4664,7 @@
         </p:nvCxnSpPr>
         <p:spPr>
           <a:xfrm>
-            <a:off x="0" y="777240"/>
+            <a:off x="0" y="960120"/>
             <a:ext cx="12191695" cy="0"/>
           </a:xfrm>
           <a:prstGeom prst="line">
@@ -4902,7 +4762,7 @@
                 <a:solidFill>
                   <a:srgbClr val="1F1F1F"/>
                 </a:solidFill>
-                <a:latin typeface="Calibri"/>
+                <a:latin typeface="Georgia"/>
               </a:rPr>
               <a:t>Thank you</a:t>
             </a:r>
@@ -4972,7 +4832,7 @@
                 <a:solidFill>
                   <a:srgbClr val="707070"/>
                 </a:solidFill>
-                <a:latin typeface="Calibri"/>
+                <a:latin typeface="Cambria"/>
               </a:rPr>
               <a:t>Questions &amp; discussion</a:t>
             </a:r>
@@ -5007,7 +4867,7 @@
                 <a:solidFill>
                   <a:srgbClr val="1F1F1F"/>
                 </a:solidFill>
-                <a:latin typeface="Calibri"/>
+                <a:latin typeface="Cambria"/>
               </a:rPr>
               <a:t>speaker@kcl.ac.uk  ·  kclnlp.github.io</a:t>
             </a:r>

--- a/templates/tree_yellow_texture/KCLNLP_TreeYellow.pptx
+++ b/templates/tree_yellow_texture/KCLNLP_TreeYellow.pptx
@@ -3597,7 +3597,7 @@
                 </a:solidFill>
                 <a:latin typeface="Georgia"/>
               </a:rPr>
-              <a:t>Motivation</a:t>
+              <a:t>Section heading</a:t>
             </a:r>
           </a:p>
         </p:txBody>
@@ -3737,7 +3737,7 @@
                 </a:solidFill>
                 <a:latin typeface="Georgia"/>
               </a:rPr>
-              <a:t>Motivation</a:t>
+              <a:t>Section heading</a:t>
             </a:r>
           </a:p>
         </p:txBody>
@@ -3949,7 +3949,7 @@
                 </a:solidFill>
                 <a:latin typeface="Georgia"/>
               </a:rPr>
-              <a:t>Why retrieval is hard</a:t>
+              <a:t>Slide title</a:t>
             </a:r>
           </a:p>
         </p:txBody>
@@ -4299,7 +4299,7 @@
                 </a:solidFill>
                 <a:latin typeface="Georgia"/>
               </a:rPr>
-              <a:t>Model architecture</a:t>
+              <a:t>Slide title</a:t>
             </a:r>
           </a:p>
         </p:txBody>

--- a/templates/tree_yellow_texture/KCLNLP_TreeYellow.pptx
+++ b/templates/tree_yellow_texture/KCLNLP_TreeYellow.pptx
@@ -3645,8 +3645,8 @@
         </p:nvSpPr>
         <p:spPr>
           <a:xfrm>
-            <a:off x="868680" y="2926080"/>
-            <a:ext cx="1645920" cy="1097280"/>
+            <a:off x="868680" y="2880360"/>
+            <a:ext cx="1645920" cy="1280160"/>
           </a:xfrm>
           <a:prstGeom prst="rect">
             <a:avLst/>
@@ -3654,7 +3654,7 @@
           <a:noFill/>
         </p:spPr>
         <p:txBody>
-          <a:bodyPr wrap="square" lIns="0" rIns="0" tIns="0" bIns="0" anchor="t">
+          <a:bodyPr wrap="square" lIns="0" rIns="0" tIns="0" bIns="0" anchor="ctr">
             <a:spAutoFit/>
           </a:bodyPr>
           <a:lstStyle/>
@@ -3680,7 +3680,7 @@
         </p:nvCxnSpPr>
         <p:spPr>
           <a:xfrm>
-            <a:off x="2606040" y="3154680"/>
+            <a:off x="2606040" y="3108960"/>
             <a:ext cx="0" cy="822960"/>
           </a:xfrm>
           <a:prstGeom prst="line">
@@ -3715,8 +3715,8 @@
         </p:nvSpPr>
         <p:spPr>
           <a:xfrm>
-            <a:off x="2880360" y="3108960"/>
-            <a:ext cx="7315200" cy="914400"/>
+            <a:off x="2880360" y="2880360"/>
+            <a:ext cx="7315200" cy="1280160"/>
           </a:xfrm>
           <a:prstGeom prst="rect">
             <a:avLst/>
@@ -3724,7 +3724,7 @@
           <a:noFill/>
         </p:spPr>
         <p:txBody>
-          <a:bodyPr wrap="square" lIns="0" rIns="0" tIns="0" bIns="0" anchor="t">
+          <a:bodyPr wrap="square" lIns="0" rIns="0" tIns="0" bIns="0" anchor="ctr">
             <a:spAutoFit/>
           </a:bodyPr>
           <a:lstStyle/>
@@ -3750,7 +3750,7 @@
         </p:nvSpPr>
         <p:spPr>
           <a:xfrm>
-            <a:off x="2880360" y="3886200"/>
+            <a:off x="2880360" y="4206240"/>
             <a:ext cx="7315200" cy="365760"/>
           </a:xfrm>
           <a:prstGeom prst="rect">

--- a/templates/tree_yellow_texture/KCLNLP_TreeYellow.pptx
+++ b/templates/tree_yellow_texture/KCLNLP_TreeYellow.pptx
@@ -3344,9 +3344,9 @@
           <a:p>
             <a:pPr algn="l"/>
             <a:r>
-              <a:rPr sz="2000" b="0" i="1">
+              <a:rPr sz="2200" b="0" i="1">
                 <a:solidFill>
-                  <a:srgbClr val="707070"/>
+                  <a:srgbClr val="555555"/>
                 </a:solidFill>
                 <a:latin typeface="Cambria"/>
               </a:rPr>
@@ -3414,7 +3414,7 @@
           <a:p>
             <a:pPr algn="l"/>
             <a:r>
-              <a:rPr sz="1400" b="0" i="0">
+              <a:rPr sz="1600" b="0" i="0">
                 <a:solidFill>
                   <a:srgbClr val="1F1F1F"/>
                 </a:solidFill>
@@ -3751,7 +3751,7 @@
         <p:spPr>
           <a:xfrm>
             <a:off x="2880360" y="4206240"/>
-            <a:ext cx="7315200" cy="365760"/>
+            <a:ext cx="7315200" cy="457200"/>
           </a:xfrm>
           <a:prstGeom prst="rect">
             <a:avLst/>
@@ -3766,9 +3766,9 @@
           <a:p>
             <a:pPr algn="l"/>
             <a:r>
-              <a:rPr sz="1400" b="0" i="1">
+              <a:rPr sz="1800" b="0" i="1">
                 <a:solidFill>
-                  <a:srgbClr val="707070"/>
+                  <a:srgbClr val="555555"/>
                 </a:solidFill>
                 <a:latin typeface="Cambria"/>
               </a:rPr>
@@ -4100,8 +4100,8 @@
         </p:nvSpPr>
         <p:spPr>
           <a:xfrm>
-            <a:off x="594360" y="6492240"/>
-            <a:ext cx="11185855" cy="274320"/>
+            <a:off x="594360" y="6446520"/>
+            <a:ext cx="11185855" cy="320040"/>
           </a:xfrm>
           <a:prstGeom prst="rect">
             <a:avLst/>
@@ -4116,9 +4116,9 @@
           <a:p>
             <a:pPr algn="l"/>
             <a:r>
-              <a:rPr sz="1100" b="0" i="1">
+              <a:rPr sz="1400" b="0" i="1">
                 <a:solidFill>
-                  <a:srgbClr val="707070"/>
+                  <a:srgbClr val="555555"/>
                 </a:solidFill>
                 <a:latin typeface="Cambria"/>
               </a:rPr>
@@ -4356,7 +4356,7 @@
           <a:noFill/>
           <a:ln w="6350">
             <a:solidFill>
-              <a:srgbClr val="707070"/>
+              <a:srgbClr val="555555"/>
             </a:solidFill>
           </a:ln>
         </p:spPr>
@@ -4406,9 +4406,9 @@
           <a:p>
             <a:pPr algn="ctr"/>
             <a:r>
-              <a:rPr sz="1400" b="0" i="1">
+              <a:rPr sz="1800" b="0" i="1">
                 <a:solidFill>
-                  <a:srgbClr val="707070"/>
+                  <a:srgbClr val="555555"/>
                 </a:solidFill>
                 <a:latin typeface="Cambria"/>
               </a:rPr>
@@ -4480,7 +4480,7 @@
               </a:spcAft>
             </a:pPr>
             <a:r>
-              <a:rPr sz="1700">
+              <a:rPr sz="1800">
                 <a:solidFill>
                   <a:srgbClr val="1F1F1F"/>
                 </a:solidFill>
@@ -4496,7 +4496,7 @@
               </a:spcAft>
             </a:pPr>
             <a:r>
-              <a:rPr sz="1700">
+              <a:rPr sz="1800">
                 <a:solidFill>
                   <a:srgbClr val="1F1F1F"/>
                 </a:solidFill>
@@ -4512,7 +4512,7 @@
               </a:spcAft>
             </a:pPr>
             <a:r>
-              <a:rPr sz="1700">
+              <a:rPr sz="1800">
                 <a:solidFill>
                   <a:srgbClr val="1F1F1F"/>
                 </a:solidFill>
@@ -4813,7 +4813,7 @@
         <p:spPr>
           <a:xfrm>
             <a:off x="914400" y="4526280"/>
-            <a:ext cx="9144000" cy="457200"/>
+            <a:ext cx="9144000" cy="548640"/>
           </a:xfrm>
           <a:prstGeom prst="rect">
             <a:avLst/>
@@ -4828,9 +4828,9 @@
           <a:p>
             <a:pPr algn="l"/>
             <a:r>
-              <a:rPr sz="2000" b="0" i="1">
+              <a:rPr sz="2200" b="0" i="1">
                 <a:solidFill>
-                  <a:srgbClr val="707070"/>
+                  <a:srgbClr val="555555"/>
                 </a:solidFill>
                 <a:latin typeface="Cambria"/>
               </a:rPr>
@@ -4847,8 +4847,8 @@
         </p:nvSpPr>
         <p:spPr>
           <a:xfrm>
-            <a:off x="914400" y="5257800"/>
-            <a:ext cx="9144000" cy="365760"/>
+            <a:off x="914400" y="5349240"/>
+            <a:ext cx="9144000" cy="411480"/>
           </a:xfrm>
           <a:prstGeom prst="rect">
             <a:avLst/>
@@ -4863,7 +4863,7 @@
           <a:p>
             <a:pPr algn="l"/>
             <a:r>
-              <a:rPr sz="1400" b="0" i="0">
+              <a:rPr sz="1600" b="0" i="0">
                 <a:solidFill>
                   <a:srgbClr val="1F1F1F"/>
                 </a:solidFill>

--- a/templates/tree_yellow_texture/KCLNLP_TreeYellow.pptx
+++ b/templates/tree_yellow_texture/KCLNLP_TreeYellow.pptx
@@ -3591,7 +3591,7 @@
               <a:t>Now:  </a:t>
             </a:r>
             <a:r>
-              <a:rPr sz="2600" b="1">
+              <a:rPr sz="2600" b="1" i="1">
                 <a:solidFill>
                   <a:srgbClr val="1F1F1F"/>
                 </a:solidFill>
@@ -3943,7 +3943,7 @@
               <a:t>Now:  </a:t>
             </a:r>
             <a:r>
-              <a:rPr sz="2600" b="1">
+              <a:rPr sz="2600" b="1" i="1">
                 <a:solidFill>
                   <a:srgbClr val="1F1F1F"/>
                 </a:solidFill>
@@ -4293,7 +4293,7 @@
               <a:t>Now:  </a:t>
             </a:r>
             <a:r>
-              <a:rPr sz="2600" b="1">
+              <a:rPr sz="2600" b="1" i="1">
                 <a:solidFill>
                   <a:srgbClr val="1F1F1F"/>
                 </a:solidFill>

--- a/templates/tree_yellow_texture/KCLNLP_TreeYellow.pptx
+++ b/templates/tree_yellow_texture/KCLNLP_TreeYellow.pptx
@@ -3313,7 +3313,7 @@
                 <a:solidFill>
                   <a:srgbClr val="1F1F1F"/>
                 </a:solidFill>
-                <a:latin typeface="Georgia"/>
+                <a:latin typeface="Calibri"/>
               </a:rPr>
               <a:t>Talk Title Goes Here</a:t>
             </a:r>
@@ -3348,7 +3348,7 @@
                 <a:solidFill>
                   <a:srgbClr val="555555"/>
                 </a:solidFill>
-                <a:latin typeface="Cambria"/>
+                <a:latin typeface="Calibri"/>
               </a:rPr>
               <a:t>A concise subtitle or one-line abstract</a:t>
             </a:r>
@@ -3418,7 +3418,7 @@
                 <a:solidFill>
                   <a:srgbClr val="1F1F1F"/>
                 </a:solidFill>
-                <a:latin typeface="Cambria"/>
+                <a:latin typeface="Calibri"/>
               </a:rPr>
               <a:t>Speaker Name  ·  Affiliation  ·  Month Year</a:t>
             </a:r>
@@ -3586,7 +3586,7 @@
                 <a:solidFill>
                   <a:srgbClr val="D94A1C"/>
                 </a:solidFill>
-                <a:latin typeface="Georgia"/>
+                <a:latin typeface="Calibri"/>
               </a:rPr>
               <a:t>Now:  </a:t>
             </a:r>
@@ -3595,7 +3595,7 @@
                 <a:solidFill>
                   <a:srgbClr val="1F1F1F"/>
                 </a:solidFill>
-                <a:latin typeface="Georgia"/>
+                <a:latin typeface="Calibri"/>
               </a:rPr>
               <a:t>Section heading</a:t>
             </a:r>
@@ -3665,7 +3665,7 @@
                 <a:solidFill>
                   <a:srgbClr val="D94A1C"/>
                 </a:solidFill>
-                <a:latin typeface="Georgia"/>
+                <a:latin typeface="Calibri"/>
               </a:rPr>
               <a:t>01</a:t>
             </a:r>
@@ -3735,7 +3735,7 @@
                 <a:solidFill>
                   <a:srgbClr val="1F1F1F"/>
                 </a:solidFill>
-                <a:latin typeface="Georgia"/>
+                <a:latin typeface="Calibri"/>
               </a:rPr>
               <a:t>Section heading</a:t>
             </a:r>
@@ -3770,7 +3770,7 @@
                 <a:solidFill>
                   <a:srgbClr val="555555"/>
                 </a:solidFill>
-                <a:latin typeface="Cambria"/>
+                <a:latin typeface="Calibri"/>
               </a:rPr>
               <a:t>An optional one-line summary of this section</a:t>
             </a:r>
@@ -3938,7 +3938,7 @@
                 <a:solidFill>
                   <a:srgbClr val="D94A1C"/>
                 </a:solidFill>
-                <a:latin typeface="Georgia"/>
+                <a:latin typeface="Calibri"/>
               </a:rPr>
               <a:t>Now:  </a:t>
             </a:r>
@@ -3947,7 +3947,7 @@
                 <a:solidFill>
                   <a:srgbClr val="1F1F1F"/>
                 </a:solidFill>
-                <a:latin typeface="Georgia"/>
+                <a:latin typeface="Calibri"/>
               </a:rPr>
               <a:t>Slide title</a:t>
             </a:r>
@@ -4021,7 +4021,7 @@
                 <a:solidFill>
                   <a:srgbClr val="1F1F1F"/>
                 </a:solidFill>
-                <a:latin typeface="Cambria"/>
+                <a:latin typeface="Calibri"/>
               </a:rPr>
               <a:t>•  Lead with the main claim — what the reader should take away</a:t>
             </a:r>
@@ -4037,7 +4037,7 @@
                 <a:solidFill>
                   <a:srgbClr val="1F1F1F"/>
                 </a:solidFill>
-                <a:latin typeface="Cambria"/>
+                <a:latin typeface="Calibri"/>
               </a:rPr>
               <a:t>•  Supporting detail, ideally a number or concrete example</a:t>
             </a:r>
@@ -4053,7 +4053,7 @@
                 <a:solidFill>
                   <a:srgbClr val="1F1F1F"/>
                 </a:solidFill>
-                <a:latin typeface="Cambria"/>
+                <a:latin typeface="Calibri"/>
               </a:rPr>
               <a:t>•  A second supporting point that extends the first</a:t>
             </a:r>
@@ -4069,7 +4069,7 @@
                 <a:solidFill>
                   <a:srgbClr val="1F1F1F"/>
                 </a:solidFill>
-                <a:latin typeface="Cambria"/>
+                <a:latin typeface="Calibri"/>
               </a:rPr>
               <a:t>•  A fourth line of room — titles live in the header, so the body breathes</a:t>
             </a:r>
@@ -4085,7 +4085,7 @@
                 <a:solidFill>
                   <a:srgbClr val="1F1F1F"/>
                 </a:solidFill>
-                <a:latin typeface="Cambria"/>
+                <a:latin typeface="Calibri"/>
               </a:rPr>
               <a:t>•  Edge case, caveat, or the one thing not to forget</a:t>
             </a:r>
@@ -4120,7 +4120,7 @@
                 <a:solidFill>
                   <a:srgbClr val="555555"/>
                 </a:solidFill>
-                <a:latin typeface="Cambria"/>
+                <a:latin typeface="Calibri"/>
               </a:rPr>
               <a:t>Footer / citation / page note</a:t>
             </a:r>
@@ -4288,7 +4288,7 @@
                 <a:solidFill>
                   <a:srgbClr val="D94A1C"/>
                 </a:solidFill>
-                <a:latin typeface="Georgia"/>
+                <a:latin typeface="Calibri"/>
               </a:rPr>
               <a:t>Now:  </a:t>
             </a:r>
@@ -4297,7 +4297,7 @@
                 <a:solidFill>
                   <a:srgbClr val="1F1F1F"/>
                 </a:solidFill>
-                <a:latin typeface="Georgia"/>
+                <a:latin typeface="Calibri"/>
               </a:rPr>
               <a:t>Slide title</a:t>
             </a:r>
@@ -4410,7 +4410,7 @@
                 <a:solidFill>
                   <a:srgbClr val="555555"/>
                 </a:solidFill>
-                <a:latin typeface="Cambria"/>
+                <a:latin typeface="Calibri"/>
               </a:rPr>
               <a:t>[ figure / diagram ]</a:t>
             </a:r>
@@ -4445,7 +4445,7 @@
                 <a:solidFill>
                   <a:srgbClr val="1F1F1F"/>
                 </a:solidFill>
-                <a:latin typeface="Georgia"/>
+                <a:latin typeface="Calibri"/>
               </a:rPr>
               <a:t>Caption or claim</a:t>
             </a:r>
@@ -4484,7 +4484,7 @@
                 <a:solidFill>
                   <a:srgbClr val="1F1F1F"/>
                 </a:solidFill>
-                <a:latin typeface="Cambria"/>
+                <a:latin typeface="Calibri"/>
               </a:rPr>
               <a:t>•  Explain what the figure shows</a:t>
             </a:r>
@@ -4500,7 +4500,7 @@
                 <a:solidFill>
                   <a:srgbClr val="1F1F1F"/>
                 </a:solidFill>
-                <a:latin typeface="Cambria"/>
+                <a:latin typeface="Calibri"/>
               </a:rPr>
               <a:t>•  Call out the one feature worth noting</a:t>
             </a:r>
@@ -4516,7 +4516,7 @@
                 <a:solidFill>
                   <a:srgbClr val="1F1F1F"/>
                 </a:solidFill>
-                <a:latin typeface="Cambria"/>
+                <a:latin typeface="Calibri"/>
               </a:rPr>
               <a:t>•  Relate it back to the slide's main point</a:t>
             </a:r>
@@ -4762,7 +4762,7 @@
                 <a:solidFill>
                   <a:srgbClr val="1F1F1F"/>
                 </a:solidFill>
-                <a:latin typeface="Georgia"/>
+                <a:latin typeface="Calibri"/>
               </a:rPr>
               <a:t>Thank you</a:t>
             </a:r>
@@ -4832,7 +4832,7 @@
                 <a:solidFill>
                   <a:srgbClr val="555555"/>
                 </a:solidFill>
-                <a:latin typeface="Cambria"/>
+                <a:latin typeface="Calibri"/>
               </a:rPr>
               <a:t>Questions &amp; discussion</a:t>
             </a:r>
@@ -4867,7 +4867,7 @@
                 <a:solidFill>
                   <a:srgbClr val="1F1F1F"/>
                 </a:solidFill>
-                <a:latin typeface="Cambria"/>
+                <a:latin typeface="Calibri"/>
               </a:rPr>
               <a:t>speaker@kcl.ac.uk  ·  kclnlp.github.io</a:t>
             </a:r>

--- a/templates/tree_yellow_texture/KCLNLP_TreeYellow.pptx
+++ b/templates/tree_yellow_texture/KCLNLP_TreeYellow.pptx
@@ -10,6 +10,8 @@
     <p:sldId id="258" r:id="rId9"/>
     <p:sldId id="259" r:id="rId10"/>
     <p:sldId id="260" r:id="rId11"/>
+    <p:sldId id="261" r:id="rId12"/>
+    <p:sldId id="262" r:id="rId13"/>
   </p:sldIdLst>
   <p:sldSz cx="12191695" cy="6858000" type="screen4x3"/>
   <p:notesSz cx="6858000" cy="9144000"/>
@@ -3558,53 +3560,9 @@
           </a:prstGeom>
         </p:spPr>
       </p:pic>
-      <p:sp>
-        <p:nvSpPr>
-          <p:cNvPr id="6" name="TextBox 5"/>
-          <p:cNvSpPr txBox="1"/>
-          <p:nvPr/>
-        </p:nvSpPr>
-        <p:spPr>
-          <a:xfrm>
-            <a:off x="411480" y="0"/>
-            <a:ext cx="7682781" cy="960120"/>
-          </a:xfrm>
-          <a:prstGeom prst="rect">
-            <a:avLst/>
-          </a:prstGeom>
-          <a:noFill/>
-        </p:spPr>
-        <p:txBody>
-          <a:bodyPr wrap="square" lIns="0" rIns="0" tIns="0" bIns="0" anchor="ctr">
-            <a:spAutoFit/>
-          </a:bodyPr>
-          <a:lstStyle/>
-          <a:p>
-            <a:pPr algn="l"/>
-            <a:r>
-              <a:rPr sz="1600" b="1" i="1">
-                <a:solidFill>
-                  <a:srgbClr val="D94A1C"/>
-                </a:solidFill>
-                <a:latin typeface="Calibri"/>
-              </a:rPr>
-              <a:t>Now:  </a:t>
-            </a:r>
-            <a:r>
-              <a:rPr sz="2600" b="1" i="1">
-                <a:solidFill>
-                  <a:srgbClr val="1F1F1F"/>
-                </a:solidFill>
-                <a:latin typeface="Calibri"/>
-              </a:rPr>
-              <a:t>Section heading</a:t>
-            </a:r>
-          </a:p>
-        </p:txBody>
-      </p:sp>
       <p:cxnSp>
         <p:nvCxnSpPr>
-          <p:cNvPr id="7" name="Connector 6"/>
+          <p:cNvPr id="6" name="Connector 5"/>
           <p:cNvCxnSpPr/>
           <p:nvPr/>
         </p:nvCxnSpPr>
@@ -3639,14 +3597,57 @@
       </p:cxnSp>
       <p:sp>
         <p:nvSpPr>
+          <p:cNvPr id="7" name="Rectangle 6"/>
+          <p:cNvSpPr/>
+          <p:nvPr/>
+        </p:nvSpPr>
+        <p:spPr>
+          <a:xfrm>
+            <a:off x="5364327" y="2263140"/>
+            <a:ext cx="1463040" cy="54864"/>
+          </a:xfrm>
+          <a:prstGeom prst="rect">
+            <a:avLst/>
+          </a:prstGeom>
+          <a:solidFill>
+            <a:srgbClr val="D94A1C"/>
+          </a:solidFill>
+          <a:ln>
+            <a:noFill/>
+          </a:ln>
+        </p:spPr>
+        <p:style>
+          <a:lnRef idx="1">
+            <a:schemeClr val="accent1"/>
+          </a:lnRef>
+          <a:fillRef idx="3">
+            <a:schemeClr val="accent1"/>
+          </a:fillRef>
+          <a:effectRef idx="2">
+            <a:schemeClr val="accent1"/>
+          </a:effectRef>
+          <a:fontRef idx="minor">
+            <a:schemeClr val="lt1"/>
+          </a:fontRef>
+        </p:style>
+        <p:txBody>
+          <a:bodyPr rtlCol="0" anchor="ctr"/>
+          <a:lstStyle/>
+          <a:p>
+            <a:pPr algn="ctr"/>
+          </a:p>
+        </p:txBody>
+      </p:sp>
+      <p:sp>
+        <p:nvSpPr>
           <p:cNvPr id="8" name="TextBox 7"/>
           <p:cNvSpPr txBox="1"/>
           <p:nvPr/>
         </p:nvSpPr>
         <p:spPr>
           <a:xfrm>
-            <a:off x="868680" y="2880360"/>
-            <a:ext cx="1645920" cy="1280160"/>
+            <a:off x="0" y="2583180"/>
+            <a:ext cx="12191695" cy="1280160"/>
           </a:xfrm>
           <a:prstGeom prst="rect">
             <a:avLst/>
@@ -3659,34 +3660,69 @@
           </a:bodyPr>
           <a:lstStyle/>
           <a:p>
-            <a:pPr algn="l"/>
-            <a:r>
-              <a:rPr sz="5600" b="1" i="0">
+            <a:pPr algn="ctr"/>
+            <a:r>
+              <a:rPr sz="4400" b="1" i="0">
                 <a:solidFill>
-                  <a:srgbClr val="D94A1C"/>
+                  <a:srgbClr val="1F1F1F"/>
                 </a:solidFill>
                 <a:latin typeface="Calibri"/>
               </a:rPr>
-              <a:t>01</a:t>
+              <a:t>Talk Title Goes Here</a:t>
+            </a:r>
+          </a:p>
+        </p:txBody>
+      </p:sp>
+      <p:sp>
+        <p:nvSpPr>
+          <p:cNvPr id="9" name="TextBox 8"/>
+          <p:cNvSpPr txBox="1"/>
+          <p:nvPr/>
+        </p:nvSpPr>
+        <p:spPr>
+          <a:xfrm>
+            <a:off x="0" y="3954780"/>
+            <a:ext cx="12191695" cy="640080"/>
+          </a:xfrm>
+          <a:prstGeom prst="rect">
+            <a:avLst/>
+          </a:prstGeom>
+          <a:noFill/>
+        </p:spPr>
+        <p:txBody>
+          <a:bodyPr wrap="square" lIns="0" rIns="0" tIns="0" bIns="0" anchor="ctr">
+            <a:spAutoFit/>
+          </a:bodyPr>
+          <a:lstStyle/>
+          <a:p>
+            <a:pPr algn="ctr"/>
+            <a:r>
+              <a:rPr sz="2200" b="0" i="1">
+                <a:solidFill>
+                  <a:srgbClr val="555555"/>
+                </a:solidFill>
+                <a:latin typeface="Calibri"/>
+              </a:rPr>
+              <a:t>A concise subtitle or one-line abstract</a:t>
             </a:r>
           </a:p>
         </p:txBody>
       </p:sp>
       <p:cxnSp>
         <p:nvCxnSpPr>
-          <p:cNvPr id="9" name="Connector 8"/>
+          <p:cNvPr id="10" name="Connector 9"/>
           <p:cNvCxnSpPr/>
           <p:nvPr/>
         </p:nvCxnSpPr>
         <p:spPr>
           <a:xfrm>
-            <a:off x="2606040" y="3108960"/>
-            <a:ext cx="0" cy="822960"/>
+            <a:off x="5090007" y="4777740"/>
+            <a:ext cx="2011680" cy="0"/>
           </a:xfrm>
           <a:prstGeom prst="line">
             <a:avLst/>
           </a:prstGeom>
-          <a:ln w="12700">
+          <a:ln w="19050">
             <a:solidFill>
               <a:srgbClr val="D94A1C"/>
             </a:solidFill>
@@ -3709,14 +3745,14 @@
       </p:cxnSp>
       <p:sp>
         <p:nvSpPr>
-          <p:cNvPr id="10" name="TextBox 9"/>
+          <p:cNvPr id="11" name="TextBox 10"/>
           <p:cNvSpPr txBox="1"/>
           <p:nvPr/>
         </p:nvSpPr>
         <p:spPr>
           <a:xfrm>
-            <a:off x="2880360" y="2880360"/>
-            <a:ext cx="7315200" cy="1280160"/>
+            <a:off x="0" y="4960620"/>
+            <a:ext cx="12191695" cy="457200"/>
           </a:xfrm>
           <a:prstGeom prst="rect">
             <a:avLst/>
@@ -3724,55 +3760,20 @@
           <a:noFill/>
         </p:spPr>
         <p:txBody>
-          <a:bodyPr wrap="square" lIns="0" rIns="0" tIns="0" bIns="0" anchor="ctr">
+          <a:bodyPr wrap="square" lIns="0" rIns="0" tIns="0" bIns="0" anchor="t">
             <a:spAutoFit/>
           </a:bodyPr>
           <a:lstStyle/>
           <a:p>
-            <a:pPr algn="l"/>
-            <a:r>
-              <a:rPr sz="3600" b="1" i="0">
+            <a:pPr algn="ctr"/>
+            <a:r>
+              <a:rPr sz="1600" b="0" i="0">
                 <a:solidFill>
                   <a:srgbClr val="1F1F1F"/>
                 </a:solidFill>
                 <a:latin typeface="Calibri"/>
               </a:rPr>
-              <a:t>Section heading</a:t>
-            </a:r>
-          </a:p>
-        </p:txBody>
-      </p:sp>
-      <p:sp>
-        <p:nvSpPr>
-          <p:cNvPr id="11" name="TextBox 10"/>
-          <p:cNvSpPr txBox="1"/>
-          <p:nvPr/>
-        </p:nvSpPr>
-        <p:spPr>
-          <a:xfrm>
-            <a:off x="2880360" y="4206240"/>
-            <a:ext cx="7315200" cy="457200"/>
-          </a:xfrm>
-          <a:prstGeom prst="rect">
-            <a:avLst/>
-          </a:prstGeom>
-          <a:noFill/>
-        </p:spPr>
-        <p:txBody>
-          <a:bodyPr wrap="square" lIns="0" rIns="0" tIns="0" bIns="0" anchor="t">
-            <a:spAutoFit/>
-          </a:bodyPr>
-          <a:lstStyle/>
-          <a:p>
-            <a:pPr algn="l"/>
-            <a:r>
-              <a:rPr sz="1800" b="0" i="1">
-                <a:solidFill>
-                  <a:srgbClr val="555555"/>
-                </a:solidFill>
-                <a:latin typeface="Calibri"/>
-              </a:rPr>
-              <a:t>An optional one-line summary of this section</a:t>
+              <a:t>Speaker Name  ·  Affiliation  ·  Month Year</a:t>
             </a:r>
           </a:p>
         </p:txBody>
@@ -3949,7 +3950,7 @@
                 </a:solidFill>
                 <a:latin typeface="Calibri"/>
               </a:rPr>
-              <a:t>Slide title</a:t>
+              <a:t>Section heading</a:t>
             </a:r>
           </a:p>
         </p:txBody>
@@ -3997,8 +3998,8 @@
         </p:nvSpPr>
         <p:spPr>
           <a:xfrm>
-            <a:off x="594360" y="1280160"/>
-            <a:ext cx="11185855" cy="5074920"/>
+            <a:off x="868680" y="2880360"/>
+            <a:ext cx="1645920" cy="1280160"/>
           </a:xfrm>
           <a:prstGeom prst="rect">
             <a:avLst/>
@@ -4006,102 +4007,104 @@
           <a:noFill/>
         </p:spPr>
         <p:txBody>
-          <a:bodyPr wrap="square" lIns="0" rIns="0" tIns="0" bIns="0">
+          <a:bodyPr wrap="square" lIns="0" rIns="0" tIns="0" bIns="0" anchor="ctr">
             <a:spAutoFit/>
           </a:bodyPr>
           <a:lstStyle/>
           <a:p>
-            <a:pPr algn="l">
-              <a:spcAft>
-                <a:spcPts val="1000"/>
-              </a:spcAft>
-            </a:pPr>
-            <a:r>
-              <a:rPr sz="2000">
+            <a:pPr algn="l"/>
+            <a:r>
+              <a:rPr sz="5600" b="1" i="0">
+                <a:solidFill>
+                  <a:srgbClr val="D94A1C"/>
+                </a:solidFill>
+                <a:latin typeface="Calibri"/>
+              </a:rPr>
+              <a:t>01</a:t>
+            </a:r>
+          </a:p>
+        </p:txBody>
+      </p:sp>
+      <p:cxnSp>
+        <p:nvCxnSpPr>
+          <p:cNvPr id="9" name="Connector 8"/>
+          <p:cNvCxnSpPr/>
+          <p:nvPr/>
+        </p:nvCxnSpPr>
+        <p:spPr>
+          <a:xfrm>
+            <a:off x="2606040" y="3108960"/>
+            <a:ext cx="0" cy="822960"/>
+          </a:xfrm>
+          <a:prstGeom prst="line">
+            <a:avLst/>
+          </a:prstGeom>
+          <a:ln w="12700">
+            <a:solidFill>
+              <a:srgbClr val="D94A1C"/>
+            </a:solidFill>
+          </a:ln>
+        </p:spPr>
+        <p:style>
+          <a:lnRef idx="2">
+            <a:schemeClr val="accent1"/>
+          </a:lnRef>
+          <a:fillRef idx="0">
+            <a:schemeClr val="accent1"/>
+          </a:fillRef>
+          <a:effectRef idx="1">
+            <a:schemeClr val="accent1"/>
+          </a:effectRef>
+          <a:fontRef idx="minor">
+            <a:schemeClr val="tx1"/>
+          </a:fontRef>
+        </p:style>
+      </p:cxnSp>
+      <p:sp>
+        <p:nvSpPr>
+          <p:cNvPr id="10" name="TextBox 9"/>
+          <p:cNvSpPr txBox="1"/>
+          <p:nvPr/>
+        </p:nvSpPr>
+        <p:spPr>
+          <a:xfrm>
+            <a:off x="2880360" y="2880360"/>
+            <a:ext cx="7315200" cy="1280160"/>
+          </a:xfrm>
+          <a:prstGeom prst="rect">
+            <a:avLst/>
+          </a:prstGeom>
+          <a:noFill/>
+        </p:spPr>
+        <p:txBody>
+          <a:bodyPr wrap="square" lIns="0" rIns="0" tIns="0" bIns="0" anchor="ctr">
+            <a:spAutoFit/>
+          </a:bodyPr>
+          <a:lstStyle/>
+          <a:p>
+            <a:pPr algn="l"/>
+            <a:r>
+              <a:rPr sz="3600" b="1" i="0">
                 <a:solidFill>
                   <a:srgbClr val="1F1F1F"/>
                 </a:solidFill>
                 <a:latin typeface="Calibri"/>
               </a:rPr>
-              <a:t>•  Lead with the main claim — what the reader should take away</a:t>
-            </a:r>
-          </a:p>
-          <a:p>
-            <a:pPr algn="l">
-              <a:spcAft>
-                <a:spcPts val="1000"/>
-              </a:spcAft>
-            </a:pPr>
-            <a:r>
-              <a:rPr sz="2000">
-                <a:solidFill>
-                  <a:srgbClr val="1F1F1F"/>
-                </a:solidFill>
-                <a:latin typeface="Calibri"/>
-              </a:rPr>
-              <a:t>•  Supporting detail, ideally a number or concrete example</a:t>
-            </a:r>
-          </a:p>
-          <a:p>
-            <a:pPr algn="l">
-              <a:spcAft>
-                <a:spcPts val="1000"/>
-              </a:spcAft>
-            </a:pPr>
-            <a:r>
-              <a:rPr sz="2000">
-                <a:solidFill>
-                  <a:srgbClr val="1F1F1F"/>
-                </a:solidFill>
-                <a:latin typeface="Calibri"/>
-              </a:rPr>
-              <a:t>•  A second supporting point that extends the first</a:t>
-            </a:r>
-          </a:p>
-          <a:p>
-            <a:pPr algn="l">
-              <a:spcAft>
-                <a:spcPts val="1000"/>
-              </a:spcAft>
-            </a:pPr>
-            <a:r>
-              <a:rPr sz="2000">
-                <a:solidFill>
-                  <a:srgbClr val="1F1F1F"/>
-                </a:solidFill>
-                <a:latin typeface="Calibri"/>
-              </a:rPr>
-              <a:t>•  A fourth line of room — titles live in the header, so the body breathes</a:t>
-            </a:r>
-          </a:p>
-          <a:p>
-            <a:pPr algn="l">
-              <a:spcAft>
-                <a:spcPts val="1000"/>
-              </a:spcAft>
-            </a:pPr>
-            <a:r>
-              <a:rPr sz="2000">
-                <a:solidFill>
-                  <a:srgbClr val="1F1F1F"/>
-                </a:solidFill>
-                <a:latin typeface="Calibri"/>
-              </a:rPr>
-              <a:t>•  Edge case, caveat, or the one thing not to forget</a:t>
-            </a:r>
-          </a:p>
-        </p:txBody>
-      </p:sp>
-      <p:sp>
-        <p:nvSpPr>
-          <p:cNvPr id="9" name="TextBox 8"/>
+              <a:t>Section heading</a:t>
+            </a:r>
+          </a:p>
+        </p:txBody>
+      </p:sp>
+      <p:sp>
+        <p:nvSpPr>
+          <p:cNvPr id="11" name="TextBox 10"/>
           <p:cNvSpPr txBox="1"/>
           <p:nvPr/>
         </p:nvSpPr>
         <p:spPr>
           <a:xfrm>
-            <a:off x="594360" y="6446520"/>
-            <a:ext cx="11185855" cy="320040"/>
+            <a:off x="2880360" y="4206240"/>
+            <a:ext cx="7315200" cy="457200"/>
           </a:xfrm>
           <a:prstGeom prst="rect">
             <a:avLst/>
@@ -4116,13 +4119,13 @@
           <a:p>
             <a:pPr algn="l"/>
             <a:r>
-              <a:rPr sz="1400" b="0" i="1">
+              <a:rPr sz="1800" b="0" i="1">
                 <a:solidFill>
                   <a:srgbClr val="555555"/>
                 </a:solidFill>
                 <a:latin typeface="Calibri"/>
               </a:rPr>
-              <a:t>Footer / citation / page note</a:t>
+              <a:t>An optional one-line summary of this section</a:t>
             </a:r>
           </a:p>
         </p:txBody>
@@ -4341,44 +4344,104 @@
       </p:cxnSp>
       <p:sp>
         <p:nvSpPr>
-          <p:cNvPr id="8" name="Rectangle 7"/>
-          <p:cNvSpPr/>
+          <p:cNvPr id="8" name="TextBox 7"/>
+          <p:cNvSpPr txBox="1"/>
           <p:nvPr/>
         </p:nvSpPr>
         <p:spPr>
           <a:xfrm>
             <a:off x="594360" y="1280160"/>
-            <a:ext cx="5486400" cy="5120640"/>
+            <a:ext cx="11185855" cy="5074920"/>
           </a:xfrm>
           <a:prstGeom prst="rect">
             <a:avLst/>
           </a:prstGeom>
           <a:noFill/>
-          <a:ln w="6350">
-            <a:solidFill>
-              <a:srgbClr val="555555"/>
-            </a:solidFill>
-          </a:ln>
-        </p:spPr>
-        <p:style>
-          <a:lnRef idx="1">
-            <a:schemeClr val="accent1"/>
-          </a:lnRef>
-          <a:fillRef idx="3">
-            <a:schemeClr val="accent1"/>
-          </a:fillRef>
-          <a:effectRef idx="2">
-            <a:schemeClr val="accent1"/>
-          </a:effectRef>
-          <a:fontRef idx="minor">
-            <a:schemeClr val="lt1"/>
-          </a:fontRef>
-        </p:style>
-        <p:txBody>
-          <a:bodyPr rtlCol="0" anchor="ctr"/>
-          <a:lstStyle/>
-          <a:p>
-            <a:pPr algn="ctr"/>
+        </p:spPr>
+        <p:txBody>
+          <a:bodyPr wrap="square" lIns="0" rIns="0" tIns="0" bIns="0">
+            <a:spAutoFit/>
+          </a:bodyPr>
+          <a:lstStyle/>
+          <a:p>
+            <a:pPr algn="l">
+              <a:spcAft>
+                <a:spcPts val="1000"/>
+              </a:spcAft>
+            </a:pPr>
+            <a:r>
+              <a:rPr sz="2000">
+                <a:solidFill>
+                  <a:srgbClr val="1F1F1F"/>
+                </a:solidFill>
+                <a:latin typeface="Calibri"/>
+              </a:rPr>
+              <a:t>•  Lead with the main claim — what the reader should take away</a:t>
+            </a:r>
+          </a:p>
+          <a:p>
+            <a:pPr algn="l">
+              <a:spcAft>
+                <a:spcPts val="1000"/>
+              </a:spcAft>
+            </a:pPr>
+            <a:r>
+              <a:rPr sz="2000">
+                <a:solidFill>
+                  <a:srgbClr val="1F1F1F"/>
+                </a:solidFill>
+                <a:latin typeface="Calibri"/>
+              </a:rPr>
+              <a:t>•  Supporting detail, ideally a number or concrete example</a:t>
+            </a:r>
+          </a:p>
+          <a:p>
+            <a:pPr algn="l">
+              <a:spcAft>
+                <a:spcPts val="1000"/>
+              </a:spcAft>
+            </a:pPr>
+            <a:r>
+              <a:rPr sz="2000">
+                <a:solidFill>
+                  <a:srgbClr val="1F1F1F"/>
+                </a:solidFill>
+                <a:latin typeface="Calibri"/>
+              </a:rPr>
+              <a:t>•  A second supporting point that extends the first</a:t>
+            </a:r>
+          </a:p>
+          <a:p>
+            <a:pPr algn="l">
+              <a:spcAft>
+                <a:spcPts val="1000"/>
+              </a:spcAft>
+            </a:pPr>
+            <a:r>
+              <a:rPr sz="2000">
+                <a:solidFill>
+                  <a:srgbClr val="1F1F1F"/>
+                </a:solidFill>
+                <a:latin typeface="Calibri"/>
+              </a:rPr>
+              <a:t>•  A fourth line of room — titles live in the header, so the body breathes</a:t>
+            </a:r>
+          </a:p>
+          <a:p>
+            <a:pPr algn="l">
+              <a:spcAft>
+                <a:spcPts val="1000"/>
+              </a:spcAft>
+            </a:pPr>
+            <a:r>
+              <a:rPr sz="2000">
+                <a:solidFill>
+                  <a:srgbClr val="1F1F1F"/>
+                </a:solidFill>
+                <a:latin typeface="Calibri"/>
+              </a:rPr>
+              <a:t>•  Edge case, caveat, or the one thing not to forget</a:t>
+            </a:r>
           </a:p>
         </p:txBody>
       </p:sp>
@@ -4390,8 +4453,8 @@
         </p:nvSpPr>
         <p:spPr>
           <a:xfrm>
-            <a:off x="594360" y="1280160"/>
-            <a:ext cx="5486400" cy="5120640"/>
+            <a:off x="594360" y="6446520"/>
+            <a:ext cx="11185855" cy="320040"/>
           </a:xfrm>
           <a:prstGeom prst="rect">
             <a:avLst/>
@@ -4399,126 +4462,20 @@
           <a:noFill/>
         </p:spPr>
         <p:txBody>
-          <a:bodyPr wrap="square" lIns="0" rIns="0" tIns="0" bIns="0" anchor="ctr">
+          <a:bodyPr wrap="square" lIns="0" rIns="0" tIns="0" bIns="0" anchor="t">
             <a:spAutoFit/>
           </a:bodyPr>
           <a:lstStyle/>
           <a:p>
-            <a:pPr algn="ctr"/>
-            <a:r>
-              <a:rPr sz="1800" b="0" i="1">
+            <a:pPr algn="l"/>
+            <a:r>
+              <a:rPr sz="1400" b="0" i="1">
                 <a:solidFill>
                   <a:srgbClr val="555555"/>
                 </a:solidFill>
                 <a:latin typeface="Calibri"/>
               </a:rPr>
-              <a:t>[ figure / diagram ]</a:t>
-            </a:r>
-          </a:p>
-        </p:txBody>
-      </p:sp>
-      <p:sp>
-        <p:nvSpPr>
-          <p:cNvPr id="10" name="TextBox 9"/>
-          <p:cNvSpPr txBox="1"/>
-          <p:nvPr/>
-        </p:nvSpPr>
-        <p:spPr>
-          <a:xfrm>
-            <a:off x="6537960" y="1280160"/>
-            <a:ext cx="5242255" cy="457200"/>
-          </a:xfrm>
-          <a:prstGeom prst="rect">
-            <a:avLst/>
-          </a:prstGeom>
-          <a:noFill/>
-        </p:spPr>
-        <p:txBody>
-          <a:bodyPr wrap="square" lIns="0" rIns="0" tIns="0" bIns="0" anchor="t">
-            <a:spAutoFit/>
-          </a:bodyPr>
-          <a:lstStyle/>
-          <a:p>
-            <a:pPr algn="l"/>
-            <a:r>
-              <a:rPr sz="2200" b="1" i="0">
-                <a:solidFill>
-                  <a:srgbClr val="1F1F1F"/>
-                </a:solidFill>
-                <a:latin typeface="Calibri"/>
-              </a:rPr>
-              <a:t>Caption or claim</a:t>
-            </a:r>
-          </a:p>
-        </p:txBody>
-      </p:sp>
-      <p:sp>
-        <p:nvSpPr>
-          <p:cNvPr id="11" name="TextBox 10"/>
-          <p:cNvSpPr txBox="1"/>
-          <p:nvPr/>
-        </p:nvSpPr>
-        <p:spPr>
-          <a:xfrm>
-            <a:off x="6537960" y="2011680"/>
-            <a:ext cx="5242255" cy="4389120"/>
-          </a:xfrm>
-          <a:prstGeom prst="rect">
-            <a:avLst/>
-          </a:prstGeom>
-          <a:noFill/>
-        </p:spPr>
-        <p:txBody>
-          <a:bodyPr wrap="square" lIns="0" rIns="0" tIns="0" bIns="0">
-            <a:spAutoFit/>
-          </a:bodyPr>
-          <a:lstStyle/>
-          <a:p>
-            <a:pPr algn="l">
-              <a:spcAft>
-                <a:spcPts val="1000"/>
-              </a:spcAft>
-            </a:pPr>
-            <a:r>
-              <a:rPr sz="1800">
-                <a:solidFill>
-                  <a:srgbClr val="1F1F1F"/>
-                </a:solidFill>
-                <a:latin typeface="Calibri"/>
-              </a:rPr>
-              <a:t>•  Explain what the figure shows</a:t>
-            </a:r>
-          </a:p>
-          <a:p>
-            <a:pPr algn="l">
-              <a:spcAft>
-                <a:spcPts val="1000"/>
-              </a:spcAft>
-            </a:pPr>
-            <a:r>
-              <a:rPr sz="1800">
-                <a:solidFill>
-                  <a:srgbClr val="1F1F1F"/>
-                </a:solidFill>
-                <a:latin typeface="Calibri"/>
-              </a:rPr>
-              <a:t>•  Call out the one feature worth noting</a:t>
-            </a:r>
-          </a:p>
-          <a:p>
-            <a:pPr algn="l">
-              <a:spcAft>
-                <a:spcPts val="1000"/>
-              </a:spcAft>
-            </a:pPr>
-            <a:r>
-              <a:rPr sz="1800">
-                <a:solidFill>
-                  <a:srgbClr val="1F1F1F"/>
-                </a:solidFill>
-                <a:latin typeface="Calibri"/>
-              </a:rPr>
-              <a:t>•  Relate it back to the slide's main point</a:t>
+              <a:t>Footer / citation / page note</a:t>
             </a:r>
           </a:p>
         </p:txBody>
@@ -4656,6 +4613,402 @@
           </a:prstGeom>
         </p:spPr>
       </p:pic>
+      <p:sp>
+        <p:nvSpPr>
+          <p:cNvPr id="6" name="TextBox 5"/>
+          <p:cNvSpPr txBox="1"/>
+          <p:nvPr/>
+        </p:nvSpPr>
+        <p:spPr>
+          <a:xfrm>
+            <a:off x="411480" y="0"/>
+            <a:ext cx="7682781" cy="960120"/>
+          </a:xfrm>
+          <a:prstGeom prst="rect">
+            <a:avLst/>
+          </a:prstGeom>
+          <a:noFill/>
+        </p:spPr>
+        <p:txBody>
+          <a:bodyPr wrap="square" lIns="0" rIns="0" tIns="0" bIns="0" anchor="ctr">
+            <a:spAutoFit/>
+          </a:bodyPr>
+          <a:lstStyle/>
+          <a:p>
+            <a:pPr algn="l"/>
+            <a:r>
+              <a:rPr sz="1600" b="1" i="1">
+                <a:solidFill>
+                  <a:srgbClr val="D94A1C"/>
+                </a:solidFill>
+                <a:latin typeface="Calibri"/>
+              </a:rPr>
+              <a:t>Now:  </a:t>
+            </a:r>
+            <a:r>
+              <a:rPr sz="2600" b="1" i="1">
+                <a:solidFill>
+                  <a:srgbClr val="1F1F1F"/>
+                </a:solidFill>
+                <a:latin typeface="Calibri"/>
+              </a:rPr>
+              <a:t>Slide title</a:t>
+            </a:r>
+          </a:p>
+        </p:txBody>
+      </p:sp>
+      <p:cxnSp>
+        <p:nvCxnSpPr>
+          <p:cNvPr id="7" name="Connector 6"/>
+          <p:cNvCxnSpPr/>
+          <p:nvPr/>
+        </p:nvCxnSpPr>
+        <p:spPr>
+          <a:xfrm>
+            <a:off x="0" y="960120"/>
+            <a:ext cx="12191695" cy="0"/>
+          </a:xfrm>
+          <a:prstGeom prst="line">
+            <a:avLst/>
+          </a:prstGeom>
+          <a:ln w="19050">
+            <a:solidFill>
+              <a:srgbClr val="D94A1C"/>
+            </a:solidFill>
+          </a:ln>
+        </p:spPr>
+        <p:style>
+          <a:lnRef idx="2">
+            <a:schemeClr val="accent1"/>
+          </a:lnRef>
+          <a:fillRef idx="0">
+            <a:schemeClr val="accent1"/>
+          </a:fillRef>
+          <a:effectRef idx="1">
+            <a:schemeClr val="accent1"/>
+          </a:effectRef>
+          <a:fontRef idx="minor">
+            <a:schemeClr val="tx1"/>
+          </a:fontRef>
+        </p:style>
+      </p:cxnSp>
+      <p:sp>
+        <p:nvSpPr>
+          <p:cNvPr id="8" name="Rectangle 7"/>
+          <p:cNvSpPr/>
+          <p:nvPr/>
+        </p:nvSpPr>
+        <p:spPr>
+          <a:xfrm>
+            <a:off x="594360" y="1280160"/>
+            <a:ext cx="5486400" cy="5120640"/>
+          </a:xfrm>
+          <a:prstGeom prst="rect">
+            <a:avLst/>
+          </a:prstGeom>
+          <a:noFill/>
+          <a:ln w="6350">
+            <a:solidFill>
+              <a:srgbClr val="555555"/>
+            </a:solidFill>
+          </a:ln>
+        </p:spPr>
+        <p:style>
+          <a:lnRef idx="1">
+            <a:schemeClr val="accent1"/>
+          </a:lnRef>
+          <a:fillRef idx="3">
+            <a:schemeClr val="accent1"/>
+          </a:fillRef>
+          <a:effectRef idx="2">
+            <a:schemeClr val="accent1"/>
+          </a:effectRef>
+          <a:fontRef idx="minor">
+            <a:schemeClr val="lt1"/>
+          </a:fontRef>
+        </p:style>
+        <p:txBody>
+          <a:bodyPr rtlCol="0" anchor="ctr"/>
+          <a:lstStyle/>
+          <a:p>
+            <a:pPr algn="ctr"/>
+          </a:p>
+        </p:txBody>
+      </p:sp>
+      <p:sp>
+        <p:nvSpPr>
+          <p:cNvPr id="9" name="TextBox 8"/>
+          <p:cNvSpPr txBox="1"/>
+          <p:nvPr/>
+        </p:nvSpPr>
+        <p:spPr>
+          <a:xfrm>
+            <a:off x="594360" y="1280160"/>
+            <a:ext cx="5486400" cy="5120640"/>
+          </a:xfrm>
+          <a:prstGeom prst="rect">
+            <a:avLst/>
+          </a:prstGeom>
+          <a:noFill/>
+        </p:spPr>
+        <p:txBody>
+          <a:bodyPr wrap="square" lIns="0" rIns="0" tIns="0" bIns="0" anchor="ctr">
+            <a:spAutoFit/>
+          </a:bodyPr>
+          <a:lstStyle/>
+          <a:p>
+            <a:pPr algn="ctr"/>
+            <a:r>
+              <a:rPr sz="1800" b="0" i="1">
+                <a:solidFill>
+                  <a:srgbClr val="555555"/>
+                </a:solidFill>
+                <a:latin typeface="Calibri"/>
+              </a:rPr>
+              <a:t>[ figure / diagram ]</a:t>
+            </a:r>
+          </a:p>
+        </p:txBody>
+      </p:sp>
+      <p:sp>
+        <p:nvSpPr>
+          <p:cNvPr id="10" name="TextBox 9"/>
+          <p:cNvSpPr txBox="1"/>
+          <p:nvPr/>
+        </p:nvSpPr>
+        <p:spPr>
+          <a:xfrm>
+            <a:off x="6537960" y="1280160"/>
+            <a:ext cx="5242255" cy="457200"/>
+          </a:xfrm>
+          <a:prstGeom prst="rect">
+            <a:avLst/>
+          </a:prstGeom>
+          <a:noFill/>
+        </p:spPr>
+        <p:txBody>
+          <a:bodyPr wrap="square" lIns="0" rIns="0" tIns="0" bIns="0" anchor="t">
+            <a:spAutoFit/>
+          </a:bodyPr>
+          <a:lstStyle/>
+          <a:p>
+            <a:pPr algn="l"/>
+            <a:r>
+              <a:rPr sz="2200" b="1" i="0">
+                <a:solidFill>
+                  <a:srgbClr val="1F1F1F"/>
+                </a:solidFill>
+                <a:latin typeface="Calibri"/>
+              </a:rPr>
+              <a:t>Caption or claim</a:t>
+            </a:r>
+          </a:p>
+        </p:txBody>
+      </p:sp>
+      <p:sp>
+        <p:nvSpPr>
+          <p:cNvPr id="11" name="TextBox 10"/>
+          <p:cNvSpPr txBox="1"/>
+          <p:nvPr/>
+        </p:nvSpPr>
+        <p:spPr>
+          <a:xfrm>
+            <a:off x="6537960" y="2011680"/>
+            <a:ext cx="5242255" cy="4389120"/>
+          </a:xfrm>
+          <a:prstGeom prst="rect">
+            <a:avLst/>
+          </a:prstGeom>
+          <a:noFill/>
+        </p:spPr>
+        <p:txBody>
+          <a:bodyPr wrap="square" lIns="0" rIns="0" tIns="0" bIns="0">
+            <a:spAutoFit/>
+          </a:bodyPr>
+          <a:lstStyle/>
+          <a:p>
+            <a:pPr algn="l">
+              <a:spcAft>
+                <a:spcPts val="1000"/>
+              </a:spcAft>
+            </a:pPr>
+            <a:r>
+              <a:rPr sz="1800">
+                <a:solidFill>
+                  <a:srgbClr val="1F1F1F"/>
+                </a:solidFill>
+                <a:latin typeface="Calibri"/>
+              </a:rPr>
+              <a:t>•  Explain what the figure shows</a:t>
+            </a:r>
+          </a:p>
+          <a:p>
+            <a:pPr algn="l">
+              <a:spcAft>
+                <a:spcPts val="1000"/>
+              </a:spcAft>
+            </a:pPr>
+            <a:r>
+              <a:rPr sz="1800">
+                <a:solidFill>
+                  <a:srgbClr val="1F1F1F"/>
+                </a:solidFill>
+                <a:latin typeface="Calibri"/>
+              </a:rPr>
+              <a:t>•  Call out the one feature worth noting</a:t>
+            </a:r>
+          </a:p>
+          <a:p>
+            <a:pPr algn="l">
+              <a:spcAft>
+                <a:spcPts val="1000"/>
+              </a:spcAft>
+            </a:pPr>
+            <a:r>
+              <a:rPr sz="1800">
+                <a:solidFill>
+                  <a:srgbClr val="1F1F1F"/>
+                </a:solidFill>
+                <a:latin typeface="Calibri"/>
+              </a:rPr>
+              <a:t>•  Relate it back to the slide's main point</a:t>
+            </a:r>
+          </a:p>
+        </p:txBody>
+      </p:sp>
+    </p:spTree>
+  </p:cSld>
+  <p:clrMapOvr>
+    <a:masterClrMapping/>
+  </p:clrMapOvr>
+</p:sld>
+</file>
+
+<file path=ppt/slides/slide6.xml><?xml version="1.0" encoding="utf-8"?>
+<p:sld xmlns:a="http://schemas.openxmlformats.org/drawingml/2006/main" xmlns:p="http://schemas.openxmlformats.org/presentationml/2006/main" xmlns:r="http://schemas.openxmlformats.org/officeDocument/2006/relationships">
+  <p:cSld>
+    <p:spTree>
+      <p:nvGrpSpPr>
+        <p:cNvPr id="1" name=""/>
+        <p:cNvGrpSpPr/>
+        <p:nvPr/>
+      </p:nvGrpSpPr>
+      <p:grpSpPr/>
+      <p:sp>
+        <p:nvSpPr>
+          <p:cNvPr id="2" name="Rectangle 1"/>
+          <p:cNvSpPr/>
+          <p:nvPr/>
+        </p:nvSpPr>
+        <p:spPr>
+          <a:xfrm>
+            <a:off x="0" y="0"/>
+            <a:ext cx="12191695" cy="960120"/>
+          </a:xfrm>
+          <a:prstGeom prst="rect">
+            <a:avLst/>
+          </a:prstGeom>
+          <a:solidFill>
+            <a:srgbClr val="F2E6CC"/>
+          </a:solidFill>
+          <a:ln>
+            <a:noFill/>
+          </a:ln>
+        </p:spPr>
+        <p:style>
+          <a:lnRef idx="1">
+            <a:schemeClr val="accent1"/>
+          </a:lnRef>
+          <a:fillRef idx="3">
+            <a:schemeClr val="accent1"/>
+          </a:fillRef>
+          <a:effectRef idx="2">
+            <a:schemeClr val="accent1"/>
+          </a:effectRef>
+          <a:fontRef idx="minor">
+            <a:schemeClr val="lt1"/>
+          </a:fontRef>
+        </p:style>
+        <p:txBody>
+          <a:bodyPr rtlCol="0" anchor="ctr"/>
+          <a:lstStyle/>
+          <a:p>
+            <a:pPr algn="ctr"/>
+          </a:p>
+        </p:txBody>
+      </p:sp>
+      <p:pic>
+        <p:nvPicPr>
+          <p:cNvPr id="3" name="Picture 2" descr="KCL.png"/>
+          <p:cNvPicPr>
+            <a:picLocks noChangeAspect="1"/>
+          </p:cNvPicPr>
+          <p:nvPr/>
+        </p:nvPicPr>
+        <p:blipFill>
+          <a:blip r:embed="rId2"/>
+          <a:stretch>
+            <a:fillRect/>
+          </a:stretch>
+        </p:blipFill>
+        <p:spPr>
+          <a:xfrm>
+            <a:off x="8368581" y="205740"/>
+            <a:ext cx="1108061" cy="548640"/>
+          </a:xfrm>
+          <a:prstGeom prst="rect">
+            <a:avLst/>
+          </a:prstGeom>
+        </p:spPr>
+      </p:pic>
+      <p:pic>
+        <p:nvPicPr>
+          <p:cNvPr id="4" name="Picture 3" descr="KCLNLP.png"/>
+          <p:cNvPicPr>
+            <a:picLocks noChangeAspect="1"/>
+          </p:cNvPicPr>
+          <p:nvPr/>
+        </p:nvPicPr>
+        <p:blipFill>
+          <a:blip r:embed="rId3"/>
+          <a:stretch>
+            <a:fillRect/>
+          </a:stretch>
+        </p:blipFill>
+        <p:spPr>
+          <a:xfrm>
+            <a:off x="9677810" y="205740"/>
+            <a:ext cx="603709" cy="548640"/>
+          </a:xfrm>
+          <a:prstGeom prst="rect">
+            <a:avLst/>
+          </a:prstGeom>
+        </p:spPr>
+      </p:pic>
+      <p:pic>
+        <p:nvPicPr>
+          <p:cNvPr id="5" name="Picture 4" descr="Alan.png"/>
+          <p:cNvPicPr>
+            <a:picLocks noChangeAspect="1"/>
+          </p:cNvPicPr>
+          <p:nvPr/>
+        </p:nvPicPr>
+        <p:blipFill>
+          <a:blip r:embed="rId4"/>
+          <a:stretch>
+            <a:fillRect/>
+          </a:stretch>
+        </p:blipFill>
+        <p:spPr>
+          <a:xfrm>
+            <a:off x="10482687" y="205740"/>
+            <a:ext cx="1297528" cy="548640"/>
+          </a:xfrm>
+          <a:prstGeom prst="rect">
+            <a:avLst/>
+          </a:prstGeom>
+        </p:spPr>
+      </p:pic>
       <p:cxnSp>
         <p:nvCxnSpPr>
           <p:cNvPr id="6" name="Connector 5"/>
@@ -4862,6 +5215,322 @@
           <a:lstStyle/>
           <a:p>
             <a:pPr algn="l"/>
+            <a:r>
+              <a:rPr sz="1600" b="0" i="0">
+                <a:solidFill>
+                  <a:srgbClr val="1F1F1F"/>
+                </a:solidFill>
+                <a:latin typeface="Calibri"/>
+              </a:rPr>
+              <a:t>speaker@kcl.ac.uk  ·  kclnlp.github.io</a:t>
+            </a:r>
+          </a:p>
+        </p:txBody>
+      </p:sp>
+    </p:spTree>
+  </p:cSld>
+  <p:clrMapOvr>
+    <a:masterClrMapping/>
+  </p:clrMapOvr>
+</p:sld>
+</file>
+
+<file path=ppt/slides/slide7.xml><?xml version="1.0" encoding="utf-8"?>
+<p:sld xmlns:a="http://schemas.openxmlformats.org/drawingml/2006/main" xmlns:p="http://schemas.openxmlformats.org/presentationml/2006/main" xmlns:r="http://schemas.openxmlformats.org/officeDocument/2006/relationships">
+  <p:cSld>
+    <p:spTree>
+      <p:nvGrpSpPr>
+        <p:cNvPr id="1" name=""/>
+        <p:cNvGrpSpPr/>
+        <p:nvPr/>
+      </p:nvGrpSpPr>
+      <p:grpSpPr/>
+      <p:sp>
+        <p:nvSpPr>
+          <p:cNvPr id="2" name="Rectangle 1"/>
+          <p:cNvSpPr/>
+          <p:nvPr/>
+        </p:nvSpPr>
+        <p:spPr>
+          <a:xfrm>
+            <a:off x="0" y="0"/>
+            <a:ext cx="12191695" cy="960120"/>
+          </a:xfrm>
+          <a:prstGeom prst="rect">
+            <a:avLst/>
+          </a:prstGeom>
+          <a:solidFill>
+            <a:srgbClr val="F2E6CC"/>
+          </a:solidFill>
+          <a:ln>
+            <a:noFill/>
+          </a:ln>
+        </p:spPr>
+        <p:style>
+          <a:lnRef idx="1">
+            <a:schemeClr val="accent1"/>
+          </a:lnRef>
+          <a:fillRef idx="3">
+            <a:schemeClr val="accent1"/>
+          </a:fillRef>
+          <a:effectRef idx="2">
+            <a:schemeClr val="accent1"/>
+          </a:effectRef>
+          <a:fontRef idx="minor">
+            <a:schemeClr val="lt1"/>
+          </a:fontRef>
+        </p:style>
+        <p:txBody>
+          <a:bodyPr rtlCol="0" anchor="ctr"/>
+          <a:lstStyle/>
+          <a:p>
+            <a:pPr algn="ctr"/>
+          </a:p>
+        </p:txBody>
+      </p:sp>
+      <p:pic>
+        <p:nvPicPr>
+          <p:cNvPr id="3" name="Picture 2" descr="KCL.png"/>
+          <p:cNvPicPr>
+            <a:picLocks noChangeAspect="1"/>
+          </p:cNvPicPr>
+          <p:nvPr/>
+        </p:nvPicPr>
+        <p:blipFill>
+          <a:blip r:embed="rId2"/>
+          <a:stretch>
+            <a:fillRect/>
+          </a:stretch>
+        </p:blipFill>
+        <p:spPr>
+          <a:xfrm>
+            <a:off x="8368581" y="205740"/>
+            <a:ext cx="1108061" cy="548640"/>
+          </a:xfrm>
+          <a:prstGeom prst="rect">
+            <a:avLst/>
+          </a:prstGeom>
+        </p:spPr>
+      </p:pic>
+      <p:pic>
+        <p:nvPicPr>
+          <p:cNvPr id="4" name="Picture 3" descr="KCLNLP.png"/>
+          <p:cNvPicPr>
+            <a:picLocks noChangeAspect="1"/>
+          </p:cNvPicPr>
+          <p:nvPr/>
+        </p:nvPicPr>
+        <p:blipFill>
+          <a:blip r:embed="rId3"/>
+          <a:stretch>
+            <a:fillRect/>
+          </a:stretch>
+        </p:blipFill>
+        <p:spPr>
+          <a:xfrm>
+            <a:off x="9677810" y="205740"/>
+            <a:ext cx="603709" cy="548640"/>
+          </a:xfrm>
+          <a:prstGeom prst="rect">
+            <a:avLst/>
+          </a:prstGeom>
+        </p:spPr>
+      </p:pic>
+      <p:pic>
+        <p:nvPicPr>
+          <p:cNvPr id="5" name="Picture 4" descr="Alan.png"/>
+          <p:cNvPicPr>
+            <a:picLocks noChangeAspect="1"/>
+          </p:cNvPicPr>
+          <p:nvPr/>
+        </p:nvPicPr>
+        <p:blipFill>
+          <a:blip r:embed="rId4"/>
+          <a:stretch>
+            <a:fillRect/>
+          </a:stretch>
+        </p:blipFill>
+        <p:spPr>
+          <a:xfrm>
+            <a:off x="10482687" y="205740"/>
+            <a:ext cx="1297528" cy="548640"/>
+          </a:xfrm>
+          <a:prstGeom prst="rect">
+            <a:avLst/>
+          </a:prstGeom>
+        </p:spPr>
+      </p:pic>
+      <p:cxnSp>
+        <p:nvCxnSpPr>
+          <p:cNvPr id="6" name="Connector 5"/>
+          <p:cNvCxnSpPr/>
+          <p:nvPr/>
+        </p:nvCxnSpPr>
+        <p:spPr>
+          <a:xfrm>
+            <a:off x="0" y="960120"/>
+            <a:ext cx="12191695" cy="0"/>
+          </a:xfrm>
+          <a:prstGeom prst="line">
+            <a:avLst/>
+          </a:prstGeom>
+          <a:ln w="19050">
+            <a:solidFill>
+              <a:srgbClr val="D94A1C"/>
+            </a:solidFill>
+          </a:ln>
+        </p:spPr>
+        <p:style>
+          <a:lnRef idx="2">
+            <a:schemeClr val="accent1"/>
+          </a:lnRef>
+          <a:fillRef idx="0">
+            <a:schemeClr val="accent1"/>
+          </a:fillRef>
+          <a:effectRef idx="1">
+            <a:schemeClr val="accent1"/>
+          </a:effectRef>
+          <a:fontRef idx="minor">
+            <a:schemeClr val="tx1"/>
+          </a:fontRef>
+        </p:style>
+      </p:cxnSp>
+      <p:sp>
+        <p:nvSpPr>
+          <p:cNvPr id="7" name="Rectangle 6"/>
+          <p:cNvSpPr/>
+          <p:nvPr/>
+        </p:nvSpPr>
+        <p:spPr>
+          <a:xfrm>
+            <a:off x="5272887" y="2354580"/>
+            <a:ext cx="1645920" cy="54864"/>
+          </a:xfrm>
+          <a:prstGeom prst="rect">
+            <a:avLst/>
+          </a:prstGeom>
+          <a:solidFill>
+            <a:srgbClr val="D94A1C"/>
+          </a:solidFill>
+          <a:ln>
+            <a:noFill/>
+          </a:ln>
+        </p:spPr>
+        <p:style>
+          <a:lnRef idx="1">
+            <a:schemeClr val="accent1"/>
+          </a:lnRef>
+          <a:fillRef idx="3">
+            <a:schemeClr val="accent1"/>
+          </a:fillRef>
+          <a:effectRef idx="2">
+            <a:schemeClr val="accent1"/>
+          </a:effectRef>
+          <a:fontRef idx="minor">
+            <a:schemeClr val="lt1"/>
+          </a:fontRef>
+        </p:style>
+        <p:txBody>
+          <a:bodyPr rtlCol="0" anchor="ctr"/>
+          <a:lstStyle/>
+          <a:p>
+            <a:pPr algn="ctr"/>
+          </a:p>
+        </p:txBody>
+      </p:sp>
+      <p:sp>
+        <p:nvSpPr>
+          <p:cNvPr id="8" name="TextBox 7"/>
+          <p:cNvSpPr txBox="1"/>
+          <p:nvPr/>
+        </p:nvSpPr>
+        <p:spPr>
+          <a:xfrm>
+            <a:off x="0" y="2674620"/>
+            <a:ext cx="12191695" cy="1463040"/>
+          </a:xfrm>
+          <a:prstGeom prst="rect">
+            <a:avLst/>
+          </a:prstGeom>
+          <a:noFill/>
+        </p:spPr>
+        <p:txBody>
+          <a:bodyPr wrap="square" lIns="0" rIns="0" tIns="0" bIns="0" anchor="ctr">
+            <a:spAutoFit/>
+          </a:bodyPr>
+          <a:lstStyle/>
+          <a:p>
+            <a:pPr algn="ctr"/>
+            <a:r>
+              <a:rPr sz="5600" b="1" i="0">
+                <a:solidFill>
+                  <a:srgbClr val="1F1F1F"/>
+                </a:solidFill>
+                <a:latin typeface="Calibri"/>
+              </a:rPr>
+              <a:t>Thank you</a:t>
+            </a:r>
+          </a:p>
+        </p:txBody>
+      </p:sp>
+      <p:sp>
+        <p:nvSpPr>
+          <p:cNvPr id="9" name="TextBox 8"/>
+          <p:cNvSpPr txBox="1"/>
+          <p:nvPr/>
+        </p:nvSpPr>
+        <p:spPr>
+          <a:xfrm>
+            <a:off x="0" y="4274820"/>
+            <a:ext cx="12191695" cy="548640"/>
+          </a:xfrm>
+          <a:prstGeom prst="rect">
+            <a:avLst/>
+          </a:prstGeom>
+          <a:noFill/>
+        </p:spPr>
+        <p:txBody>
+          <a:bodyPr wrap="square" lIns="0" rIns="0" tIns="0" bIns="0" anchor="ctr">
+            <a:spAutoFit/>
+          </a:bodyPr>
+          <a:lstStyle/>
+          <a:p>
+            <a:pPr algn="ctr"/>
+            <a:r>
+              <a:rPr sz="2200" b="0" i="1">
+                <a:solidFill>
+                  <a:srgbClr val="555555"/>
+                </a:solidFill>
+                <a:latin typeface="Calibri"/>
+              </a:rPr>
+              <a:t>Questions &amp; discussion</a:t>
+            </a:r>
+          </a:p>
+        </p:txBody>
+      </p:sp>
+      <p:sp>
+        <p:nvSpPr>
+          <p:cNvPr id="10" name="TextBox 9"/>
+          <p:cNvSpPr txBox="1"/>
+          <p:nvPr/>
+        </p:nvSpPr>
+        <p:spPr>
+          <a:xfrm>
+            <a:off x="0" y="4960620"/>
+            <a:ext cx="12191695" cy="411480"/>
+          </a:xfrm>
+          <a:prstGeom prst="rect">
+            <a:avLst/>
+          </a:prstGeom>
+          <a:noFill/>
+        </p:spPr>
+        <p:txBody>
+          <a:bodyPr wrap="square" lIns="0" rIns="0" tIns="0" bIns="0" anchor="t">
+            <a:spAutoFit/>
+          </a:bodyPr>
+          <a:lstStyle/>
+          <a:p>
+            <a:pPr algn="ctr"/>
             <a:r>
               <a:rPr sz="1600" b="0" i="0">
                 <a:solidFill>

--- a/templates/tree_yellow_texture/KCLNLP_TreeYellow.pptx
+++ b/templates/tree_yellow_texture/KCLNLP_TreeYellow.pptx
@@ -3153,8 +3153,8 @@
         </p:blipFill>
         <p:spPr>
           <a:xfrm>
-            <a:off x="8368581" y="205740"/>
-            <a:ext cx="1108061" cy="548640"/>
+            <a:off x="8598181" y="205740"/>
+            <a:ext cx="873549" cy="548640"/>
           </a:xfrm>
           <a:prstGeom prst="rect">
             <a:avLst/>
@@ -3177,7 +3177,7 @@
         </p:blipFill>
         <p:spPr>
           <a:xfrm>
-            <a:off x="9677810" y="205740"/>
+            <a:off x="9672897" y="205740"/>
             <a:ext cx="603709" cy="548640"/>
           </a:xfrm>
           <a:prstGeom prst="rect">
@@ -3201,8 +3201,8 @@
         </p:blipFill>
         <p:spPr>
           <a:xfrm>
-            <a:off x="10482687" y="205740"/>
-            <a:ext cx="1297528" cy="548640"/>
+            <a:off x="10477774" y="205740"/>
+            <a:ext cx="1302442" cy="548640"/>
           </a:xfrm>
           <a:prstGeom prst="rect">
             <a:avLst/>
@@ -3504,8 +3504,8 @@
         </p:blipFill>
         <p:spPr>
           <a:xfrm>
-            <a:off x="8368581" y="205740"/>
-            <a:ext cx="1108061" cy="548640"/>
+            <a:off x="8598181" y="205740"/>
+            <a:ext cx="873549" cy="548640"/>
           </a:xfrm>
           <a:prstGeom prst="rect">
             <a:avLst/>
@@ -3528,7 +3528,7 @@
         </p:blipFill>
         <p:spPr>
           <a:xfrm>
-            <a:off x="9677810" y="205740"/>
+            <a:off x="9672897" y="205740"/>
             <a:ext cx="603709" cy="548640"/>
           </a:xfrm>
           <a:prstGeom prst="rect">
@@ -3552,8 +3552,8 @@
         </p:blipFill>
         <p:spPr>
           <a:xfrm>
-            <a:off x="10482687" y="205740"/>
-            <a:ext cx="1297528" cy="548640"/>
+            <a:off x="10477774" y="205740"/>
+            <a:ext cx="1302442" cy="548640"/>
           </a:xfrm>
           <a:prstGeom prst="rect">
             <a:avLst/>
@@ -3855,8 +3855,8 @@
         </p:blipFill>
         <p:spPr>
           <a:xfrm>
-            <a:off x="8368581" y="205740"/>
-            <a:ext cx="1108061" cy="548640"/>
+            <a:off x="8598181" y="205740"/>
+            <a:ext cx="873549" cy="548640"/>
           </a:xfrm>
           <a:prstGeom prst="rect">
             <a:avLst/>
@@ -3879,7 +3879,7 @@
         </p:blipFill>
         <p:spPr>
           <a:xfrm>
-            <a:off x="9677810" y="205740"/>
+            <a:off x="9672897" y="205740"/>
             <a:ext cx="603709" cy="548640"/>
           </a:xfrm>
           <a:prstGeom prst="rect">
@@ -3903,8 +3903,8 @@
         </p:blipFill>
         <p:spPr>
           <a:xfrm>
-            <a:off x="10482687" y="205740"/>
-            <a:ext cx="1297528" cy="548640"/>
+            <a:off x="10477774" y="205740"/>
+            <a:ext cx="1302442" cy="548640"/>
           </a:xfrm>
           <a:prstGeom prst="rect">
             <a:avLst/>
@@ -3920,7 +3920,7 @@
         <p:spPr>
           <a:xfrm>
             <a:off x="411480" y="0"/>
-            <a:ext cx="7682781" cy="960120"/>
+            <a:ext cx="7912381" cy="960120"/>
           </a:xfrm>
           <a:prstGeom prst="rect">
             <a:avLst/>
@@ -4207,8 +4207,8 @@
         </p:blipFill>
         <p:spPr>
           <a:xfrm>
-            <a:off x="8368581" y="205740"/>
-            <a:ext cx="1108061" cy="548640"/>
+            <a:off x="8598181" y="205740"/>
+            <a:ext cx="873549" cy="548640"/>
           </a:xfrm>
           <a:prstGeom prst="rect">
             <a:avLst/>
@@ -4231,7 +4231,7 @@
         </p:blipFill>
         <p:spPr>
           <a:xfrm>
-            <a:off x="9677810" y="205740"/>
+            <a:off x="9672897" y="205740"/>
             <a:ext cx="603709" cy="548640"/>
           </a:xfrm>
           <a:prstGeom prst="rect">
@@ -4255,8 +4255,8 @@
         </p:blipFill>
         <p:spPr>
           <a:xfrm>
-            <a:off x="10482687" y="205740"/>
-            <a:ext cx="1297528" cy="548640"/>
+            <a:off x="10477774" y="205740"/>
+            <a:ext cx="1302442" cy="548640"/>
           </a:xfrm>
           <a:prstGeom prst="rect">
             <a:avLst/>
@@ -4272,7 +4272,7 @@
         <p:spPr>
           <a:xfrm>
             <a:off x="411480" y="0"/>
-            <a:ext cx="7682781" cy="960120"/>
+            <a:ext cx="7912381" cy="960120"/>
           </a:xfrm>
           <a:prstGeom prst="rect">
             <a:avLst/>
@@ -4557,8 +4557,8 @@
         </p:blipFill>
         <p:spPr>
           <a:xfrm>
-            <a:off x="8368581" y="205740"/>
-            <a:ext cx="1108061" cy="548640"/>
+            <a:off x="8598181" y="205740"/>
+            <a:ext cx="873549" cy="548640"/>
           </a:xfrm>
           <a:prstGeom prst="rect">
             <a:avLst/>
@@ -4581,7 +4581,7 @@
         </p:blipFill>
         <p:spPr>
           <a:xfrm>
-            <a:off x="9677810" y="205740"/>
+            <a:off x="9672897" y="205740"/>
             <a:ext cx="603709" cy="548640"/>
           </a:xfrm>
           <a:prstGeom prst="rect">
@@ -4605,8 +4605,8 @@
         </p:blipFill>
         <p:spPr>
           <a:xfrm>
-            <a:off x="10482687" y="205740"/>
-            <a:ext cx="1297528" cy="548640"/>
+            <a:off x="10477774" y="205740"/>
+            <a:ext cx="1302442" cy="548640"/>
           </a:xfrm>
           <a:prstGeom prst="rect">
             <a:avLst/>
@@ -4622,7 +4622,7 @@
         <p:spPr>
           <a:xfrm>
             <a:off x="411480" y="0"/>
-            <a:ext cx="7682781" cy="960120"/>
+            <a:ext cx="7912381" cy="960120"/>
           </a:xfrm>
           <a:prstGeom prst="rect">
             <a:avLst/>
@@ -4953,8 +4953,8 @@
         </p:blipFill>
         <p:spPr>
           <a:xfrm>
-            <a:off x="8368581" y="205740"/>
-            <a:ext cx="1108061" cy="548640"/>
+            <a:off x="8598181" y="205740"/>
+            <a:ext cx="873549" cy="548640"/>
           </a:xfrm>
           <a:prstGeom prst="rect">
             <a:avLst/>
@@ -4977,7 +4977,7 @@
         </p:blipFill>
         <p:spPr>
           <a:xfrm>
-            <a:off x="9677810" y="205740"/>
+            <a:off x="9672897" y="205740"/>
             <a:ext cx="603709" cy="548640"/>
           </a:xfrm>
           <a:prstGeom prst="rect">
@@ -5001,8 +5001,8 @@
         </p:blipFill>
         <p:spPr>
           <a:xfrm>
-            <a:off x="10482687" y="205740"/>
-            <a:ext cx="1297528" cy="548640"/>
+            <a:off x="10477774" y="205740"/>
+            <a:ext cx="1302442" cy="548640"/>
           </a:xfrm>
           <a:prstGeom prst="rect">
             <a:avLst/>
@@ -5304,8 +5304,8 @@
         </p:blipFill>
         <p:spPr>
           <a:xfrm>
-            <a:off x="8368581" y="205740"/>
-            <a:ext cx="1108061" cy="548640"/>
+            <a:off x="8598181" y="205740"/>
+            <a:ext cx="873549" cy="548640"/>
           </a:xfrm>
           <a:prstGeom prst="rect">
             <a:avLst/>
@@ -5328,7 +5328,7 @@
         </p:blipFill>
         <p:spPr>
           <a:xfrm>
-            <a:off x="9677810" y="205740"/>
+            <a:off x="9672897" y="205740"/>
             <a:ext cx="603709" cy="548640"/>
           </a:xfrm>
           <a:prstGeom prst="rect">
@@ -5352,8 +5352,8 @@
         </p:blipFill>
         <p:spPr>
           <a:xfrm>
-            <a:off x="10482687" y="205740"/>
-            <a:ext cx="1297528" cy="548640"/>
+            <a:off x="10477774" y="205740"/>
+            <a:ext cx="1302442" cy="548640"/>
           </a:xfrm>
           <a:prstGeom prst="rect">
             <a:avLst/>
